--- a/docs/seminar/slides/세션2_메모리모델과_쓰기검증.pptx
+++ b/docs/seminar/slides/세션2_메모리모델과_쓰기검증.pptx
@@ -14,9 +14,11 @@
     <p:sldId id="262" r:id="rId8"/>
     <p:sldId id="263" r:id="rId9"/>
     <p:sldId id="264" r:id="rId10"/>
+    <p:sldId id="265" r:id="rId11"/>
+    <p:sldId id="266" r:id="rId12"/>
   </p:sldIdLst>
   <p:notesMasterIdLst>
-    <p:notesMasterId r:id="rId11"/>
+    <p:notesMasterId r:id="rId13"/>
   </p:notesMasterIdLst>
   <p:sldSz cx="12192000" cy="6858000"/>
   <p:notesSz cx="6858000" cy="12192000"/>
@@ -552,6 +554,182 @@
 </p:notes>
 </file>
 
+<file path=ppt/notesSlides/notesSlide10.xml><?xml version="1.0" encoding="utf-8"?>
+<p:notes xmlns:a="http://schemas.openxmlformats.org/drawingml/2006/main" xmlns:r="http://schemas.openxmlformats.org/officeDocument/2006/relationships" xmlns:p="http://schemas.openxmlformats.org/presentationml/2006/main">
+  <p:cSld>
+    <p:spTree>
+      <p:nvGrpSpPr>
+        <p:cNvPr id="1" name=""/>
+        <p:cNvGrpSpPr/>
+        <p:nvPr/>
+      </p:nvGrpSpPr>
+      <p:grpSpPr>
+        <a:xfrm>
+          <a:off x="0" y="0"/>
+          <a:ext cx="0" cy="0"/>
+          <a:chOff x="0" y="0"/>
+          <a:chExt cx="0" cy="0"/>
+        </a:xfrm>
+      </p:grpSpPr>
+      <p:sp>
+        <p:nvSpPr>
+          <p:cNvPr id="2" name="Slide Image Placeholder 1"/>
+          <p:cNvSpPr>
+            <a:spLocks noGrp="1" noRot="1" noChangeAspect="1"/>
+          </p:cNvSpPr>
+          <p:nvPr>
+            <p:ph type="sldImg"/>
+          </p:nvPr>
+        </p:nvSpPr>
+        <p:spPr/>
+      </p:sp>
+      <p:sp>
+        <p:nvSpPr>
+          <p:cNvPr id="3" name="Notes Placeholder 2"/>
+          <p:cNvSpPr>
+            <a:spLocks noGrp="1"/>
+          </p:cNvSpPr>
+          <p:nvPr>
+            <p:ph type="body" idx="1"/>
+          </p:nvPr>
+        </p:nvSpPr>
+        <p:spPr/>
+        <p:txBody>
+          <a:bodyPr/>
+          <a:lstStyle/>
+          <a:p>
+            <a:r>
+              <a:rPr lang="en-US" dirty="0"/>
+              <a:t>Ex 2는 검증 로직이 정말 오류를 잡는지 확인하는 핵심 실습입니다.</a:t>
+            </a:r>
+            <a:endParaRPr lang="en-US" dirty="0"/>
+          </a:p>
+        </p:txBody>
+      </p:sp>
+      <p:sp>
+        <p:nvSpPr>
+          <p:cNvPr id="4" name="Slide Number Placeholder 3"/>
+          <p:cNvSpPr>
+            <a:spLocks noGrp="1"/>
+          </p:cNvSpPr>
+          <p:nvPr>
+            <p:ph type="sldNum" sz="quarter" idx="10"/>
+          </p:nvPr>
+        </p:nvSpPr>
+        <p:spPr/>
+        <p:txBody>
+          <a:bodyPr/>
+          <a:lstStyle/>
+          <a:p>
+            <a:fld id="{F7021451-1387-4CA6-816F-3879F97B5CBC}" type="slidenum">
+              <a:rPr lang="en-US"/>
+              <a:t>10</a:t>
+            </a:fld>
+            <a:endParaRPr lang="en-US"/>
+          </a:p>
+        </p:txBody>
+      </p:sp>
+    </p:spTree>
+    <p:extLst>
+      <p:ext uri="{BB962C8B-B14F-4D97-AF65-F5344CB8AC3E}">
+        <p14:creationId xmlns:p14="http://schemas.microsoft.com/office/powerpoint/2010/main" val="1024086991"/>
+      </p:ext>
+    </p:extLst>
+  </p:cSld>
+  <p:clrMapOvr>
+    <a:masterClrMapping/>
+  </p:clrMapOvr>
+</p:notes>
+</file>
+
+<file path=ppt/notesSlides/notesSlide11.xml><?xml version="1.0" encoding="utf-8"?>
+<p:notes xmlns:a="http://schemas.openxmlformats.org/drawingml/2006/main" xmlns:r="http://schemas.openxmlformats.org/officeDocument/2006/relationships" xmlns:p="http://schemas.openxmlformats.org/presentationml/2006/main">
+  <p:cSld>
+    <p:spTree>
+      <p:nvGrpSpPr>
+        <p:cNvPr id="1" name=""/>
+        <p:cNvGrpSpPr/>
+        <p:nvPr/>
+      </p:nvGrpSpPr>
+      <p:grpSpPr>
+        <a:xfrm>
+          <a:off x="0" y="0"/>
+          <a:ext cx="0" cy="0"/>
+          <a:chOff x="0" y="0"/>
+          <a:chExt cx="0" cy="0"/>
+        </a:xfrm>
+      </p:grpSpPr>
+      <p:sp>
+        <p:nvSpPr>
+          <p:cNvPr id="2" name="Slide Image Placeholder 1"/>
+          <p:cNvSpPr>
+            <a:spLocks noGrp="1" noRot="1" noChangeAspect="1"/>
+          </p:cNvSpPr>
+          <p:nvPr>
+            <p:ph type="sldImg"/>
+          </p:nvPr>
+        </p:nvSpPr>
+        <p:spPr/>
+      </p:sp>
+      <p:sp>
+        <p:nvSpPr>
+          <p:cNvPr id="3" name="Notes Placeholder 2"/>
+          <p:cNvSpPr>
+            <a:spLocks noGrp="1"/>
+          </p:cNvSpPr>
+          <p:nvPr>
+            <p:ph type="body" idx="1"/>
+          </p:nvPr>
+        </p:nvSpPr>
+        <p:spPr/>
+        <p:txBody>
+          <a:bodyPr/>
+          <a:lstStyle/>
+          <a:p>
+            <a:r>
+              <a:rPr lang="en-US" dirty="0"/>
+              <a:t/>
+            </a:r>
+            <a:endParaRPr lang="en-US" dirty="0"/>
+          </a:p>
+        </p:txBody>
+      </p:sp>
+      <p:sp>
+        <p:nvSpPr>
+          <p:cNvPr id="4" name="Slide Number Placeholder 3"/>
+          <p:cNvSpPr>
+            <a:spLocks noGrp="1"/>
+          </p:cNvSpPr>
+          <p:nvPr>
+            <p:ph type="sldNum" sz="quarter" idx="10"/>
+          </p:nvPr>
+        </p:nvSpPr>
+        <p:spPr/>
+        <p:txBody>
+          <a:bodyPr/>
+          <a:lstStyle/>
+          <a:p>
+            <a:fld id="{F7021451-1387-4CA6-816F-3879F97B5CBC}" type="slidenum">
+              <a:rPr lang="en-US"/>
+              <a:t>11</a:t>
+            </a:fld>
+            <a:endParaRPr lang="en-US"/>
+          </a:p>
+        </p:txBody>
+      </p:sp>
+    </p:spTree>
+    <p:extLst>
+      <p:ext uri="{BB962C8B-B14F-4D97-AF65-F5344CB8AC3E}">
+        <p14:creationId xmlns:p14="http://schemas.microsoft.com/office/powerpoint/2010/main" val="1024086991"/>
+      </p:ext>
+    </p:extLst>
+  </p:cSld>
+  <p:clrMapOvr>
+    <a:masterClrMapping/>
+  </p:clrMapOvr>
+</p:notes>
+</file>
+
 <file path=ppt/notesSlides/notesSlide2.xml><?xml version="1.0" encoding="utf-8"?>
 <p:notes xmlns:a="http://schemas.openxmlformats.org/drawingml/2006/main" xmlns:r="http://schemas.openxmlformats.org/officeDocument/2006/relationships" xmlns:p="http://schemas.openxmlformats.org/presentationml/2006/main">
   <p:cSld>
@@ -774,7 +952,7 @@
           <a:p>
             <a:r>
               <a:rPr lang="en-US" dirty="0"/>
-              <a:t>N(loopIters) = MB/2 인 이유: 2·N MiB가 한 그리드 용량이므로. 이 세 버퍼가 이후 모든 테스트의 재료입니다.</a:t>
+              <a:t>중첩 상자로 '범위'를 시각화: 전역 ⊃ (블록별)공유 ⊃ (스레드별)레지스터. 넓을수록 느리다는 대응을 강조.</a:t>
             </a:r>
             <a:endParaRPr lang="en-US" dirty="0"/>
           </a:p>
@@ -862,7 +1040,7 @@
           <a:p>
             <a:r>
               <a:rPr lang="en-US" dirty="0"/>
-              <a:t>SOFTWAIT는 스핀 대신 슬립 폴링으로 커널 완료를 기다리는 매크로(core.h:49). 커널 경계 = 메모리 배리어 개념을 강조.</a:t>
+              <a:t>N(loopIters) = MB/2 인 이유: 2·N MiB가 한 그리드 용량이므로. 이 세 버퍼가 이후 모든 테스트의 재료입니다.</a:t>
             </a:r>
             <a:endParaRPr lang="en-US" dirty="0"/>
           </a:p>
@@ -950,7 +1128,7 @@
           <a:p>
             <a:r>
               <a:rPr lang="en-US" dirty="0"/>
-              <a:t>cudaStreamQuery로 완료 폴링. 타임아웃 센티넬(0xFFFFFFFE)은 세션 4·5의 오류 관례와 연결됩니다.</a:t>
+              <a:t>SOFTWAIT는 스핀 대신 슬립 폴링으로 커널 완료를 기다리는 매크로(core.h:49). 커널 경계 = 메모리 배리어 개념을 강조.</a:t>
             </a:r>
             <a:endParaRPr lang="en-US" dirty="0"/>
           </a:p>
@@ -1038,7 +1216,7 @@
           <a:p>
             <a:r>
               <a:rPr lang="en-US" dirty="0"/>
-              <a:t>Memtest86 Test 2 계보. 세션 1의 write 커널이 여기서 verify와 짝을 이뤄 완결됩니다.</a:t>
+              <a:t>cudaStreamQuery로 완료 폴링. 타임아웃 센티넬(0xFFFFFFFE)은 세션 4·5의 오류 관례와 연결됩니다.</a:t>
             </a:r>
             <a:endParaRPr lang="en-US" dirty="0"/>
           </a:p>
@@ -1126,7 +1304,7 @@
           <a:p>
             <a:r>
               <a:rPr lang="en-US" dirty="0"/>
-              <a:t>Ex 2는 검증 로직이 정말 오류를 잡는지 확인하는 핵심 실습입니다.</a:t>
+              <a:t>시퀀스 다이어그램: 화살표 방향이 명령/데이터 흐름. write→wait→verify→memcpy D2H→합산의 시간 순서를 짚으세요.</a:t>
             </a:r>
             <a:endParaRPr lang="en-US" dirty="0"/>
           </a:p>
@@ -1214,7 +1392,7 @@
           <a:p>
             <a:r>
               <a:rPr lang="en-US" dirty="0"/>
-              <a:t/>
+              <a:t>Memtest86 Test 2 계보. 세션 1의 write 커널이 여기서 verify와 짝을 이뤄 완결됩니다.</a:t>
             </a:r>
             <a:endParaRPr lang="en-US" dirty="0"/>
           </a:p>
@@ -1863,6 +2041,1018 @@
 </p:sld>
 </file>
 
+<file path=ppt/slides/slide10.xml><?xml version="1.0" encoding="utf-8"?>
+<p:sld xmlns:a="http://schemas.openxmlformats.org/drawingml/2006/main" xmlns:r="http://schemas.openxmlformats.org/officeDocument/2006/relationships" xmlns:p="http://schemas.openxmlformats.org/presentationml/2006/main">
+  <p:cSld name="Slide 10">
+    <p:bg>
+      <p:bgPr>
+        <a:solidFill>
+          <a:srgbClr val="101722"/>
+        </a:solidFill>
+      </p:bgPr>
+    </p:bg>
+    <p:spTree>
+      <p:nvGrpSpPr>
+        <p:cNvPr id="1" name=""/>
+        <p:cNvGrpSpPr/>
+        <p:nvPr/>
+      </p:nvGrpSpPr>
+      <p:grpSpPr>
+        <a:xfrm>
+          <a:off x="0" y="0"/>
+          <a:ext cx="0" cy="0"/>
+          <a:chOff x="0" y="0"/>
+          <a:chExt cx="0" cy="0"/>
+        </a:xfrm>
+      </p:grpSpPr>
+      <p:sp>
+        <p:nvSpPr>
+          <p:cNvPr id="2" name="Text 0"/>
+          <p:cNvSpPr/>
+          <p:nvPr/>
+        </p:nvSpPr>
+        <p:spPr>
+          <a:xfrm>
+            <a:off x="548640" y="411480"/>
+            <a:ext cx="658368" cy="658368"/>
+          </a:xfrm>
+          <a:prstGeom prst="roundRect">
+            <a:avLst>
+              <a:gd name="adj" fmla="val 13889"/>
+            </a:avLst>
+          </a:prstGeom>
+          <a:solidFill>
+            <a:srgbClr val="E8A33D"/>
+          </a:solidFill>
+          <a:ln/>
+        </p:spPr>
+        <p:txBody>
+          <a:bodyPr wrap="square" rtlCol="0" anchor="ctr"/>
+          <a:lstStyle/>
+          <a:p>
+            <a:pPr algn="ctr" indent="0" marL="0">
+              <a:buNone/>
+            </a:pPr>
+            <a:r>
+              <a:rPr lang="en-US" sz="2200" b="1" dirty="0">
+                <a:solidFill>
+                  <a:srgbClr val="101722"/>
+                </a:solidFill>
+                <a:latin typeface="Courier New" pitchFamily="34" charset="0"/>
+                <a:ea typeface="Courier New" pitchFamily="34" charset="-122"/>
+                <a:cs typeface="Courier New" pitchFamily="34" charset="-120"/>
+              </a:rPr>
+              <a:t>7</a:t>
+            </a:r>
+            <a:endParaRPr lang="en-US" sz="2200" dirty="0"/>
+          </a:p>
+        </p:txBody>
+      </p:sp>
+      <p:sp>
+        <p:nvSpPr>
+          <p:cNvPr id="3" name="Text 1"/>
+          <p:cNvSpPr/>
+          <p:nvPr/>
+        </p:nvSpPr>
+        <p:spPr>
+          <a:xfrm>
+            <a:off x="1371600" y="384048"/>
+            <a:ext cx="10241280" cy="713232"/>
+          </a:xfrm>
+          <a:prstGeom prst="rect">
+            <a:avLst/>
+          </a:prstGeom>
+          <a:noFill/>
+          <a:ln/>
+        </p:spPr>
+        <p:txBody>
+          <a:bodyPr wrap="square" lIns="0" tIns="0" rIns="0" bIns="0" rtlCol="0" anchor="ctr"/>
+          <a:lstStyle/>
+          <a:p>
+            <a:pPr algn="l" indent="0" marL="0">
+              <a:buNone/>
+            </a:pPr>
+            <a:r>
+              <a:rPr lang="en-US" sz="2900" b="1" dirty="0">
+                <a:solidFill>
+                  <a:srgbClr val="E7EDF5"/>
+                </a:solidFill>
+                <a:latin typeface="Malgun Gothic" pitchFamily="34" charset="0"/>
+                <a:ea typeface="Malgun Gothic" pitchFamily="34" charset="-122"/>
+                <a:cs typeface="Malgun Gothic" pitchFamily="34" charset="-120"/>
+              </a:rPr>
+              <a:t>실습 미리보기 · Lab 2</a:t>
+            </a:r>
+            <a:endParaRPr lang="en-US" sz="2900" dirty="0"/>
+          </a:p>
+        </p:txBody>
+      </p:sp>
+      <p:sp>
+        <p:nvSpPr>
+          <p:cNvPr id="4" name="Shape 2"/>
+          <p:cNvSpPr/>
+          <p:nvPr/>
+        </p:nvSpPr>
+        <p:spPr>
+          <a:xfrm>
+            <a:off x="548640" y="1600200"/>
+            <a:ext cx="5303520" cy="1920240"/>
+          </a:xfrm>
+          <a:prstGeom prst="roundRect">
+            <a:avLst>
+              <a:gd name="adj" fmla="val 3810"/>
+            </a:avLst>
+          </a:prstGeom>
+          <a:solidFill>
+            <a:srgbClr val="18212E"/>
+          </a:solidFill>
+          <a:ln/>
+        </p:spPr>
+      </p:sp>
+      <p:sp>
+        <p:nvSpPr>
+          <p:cNvPr id="5" name="Text 3"/>
+          <p:cNvSpPr/>
+          <p:nvPr/>
+        </p:nvSpPr>
+        <p:spPr>
+          <a:xfrm>
+            <a:off x="804672" y="1801368"/>
+            <a:ext cx="1188720" cy="502920"/>
+          </a:xfrm>
+          <a:prstGeom prst="roundRect">
+            <a:avLst>
+              <a:gd name="adj" fmla="val 14545"/>
+            </a:avLst>
+          </a:prstGeom>
+          <a:solidFill>
+            <a:srgbClr val="E8A33D"/>
+          </a:solidFill>
+          <a:ln/>
+        </p:spPr>
+        <p:txBody>
+          <a:bodyPr wrap="square" rtlCol="0" anchor="ctr"/>
+          <a:lstStyle/>
+          <a:p>
+            <a:pPr algn="ctr" indent="0" marL="0">
+              <a:buNone/>
+            </a:pPr>
+            <a:r>
+              <a:rPr lang="en-US" sz="1700" b="1" dirty="0">
+                <a:solidFill>
+                  <a:srgbClr val="101722"/>
+                </a:solidFill>
+                <a:latin typeface="Courier New" pitchFamily="34" charset="0"/>
+                <a:ea typeface="Courier New" pitchFamily="34" charset="-122"/>
+                <a:cs typeface="Courier New" pitchFamily="34" charset="-120"/>
+              </a:rPr>
+              <a:t>Ex 1</a:t>
+            </a:r>
+            <a:endParaRPr lang="en-US" sz="1700" dirty="0"/>
+          </a:p>
+        </p:txBody>
+      </p:sp>
+      <p:sp>
+        <p:nvSpPr>
+          <p:cNvPr id="6" name="Text 4"/>
+          <p:cNvSpPr/>
+          <p:nvPr/>
+        </p:nvSpPr>
+        <p:spPr>
+          <a:xfrm>
+            <a:off x="2148840" y="1819656"/>
+            <a:ext cx="3474720" cy="822960"/>
+          </a:xfrm>
+          <a:prstGeom prst="rect">
+            <a:avLst/>
+          </a:prstGeom>
+          <a:noFill/>
+          <a:ln/>
+        </p:spPr>
+        <p:txBody>
+          <a:bodyPr wrap="square" lIns="0" tIns="0" rIns="0" bIns="0" rtlCol="0" anchor="t"/>
+          <a:lstStyle/>
+          <a:p>
+            <a:pPr indent="0" marL="0">
+              <a:buNone/>
+            </a:pPr>
+            <a:r>
+              <a:rPr lang="en-US" sz="1800" b="1" dirty="0">
+                <a:solidFill>
+                  <a:srgbClr val="E7EDF5"/>
+                </a:solidFill>
+                <a:latin typeface="Malgun Gothic" pitchFamily="34" charset="0"/>
+                <a:ea typeface="Malgun Gothic" pitchFamily="34" charset="-122"/>
+                <a:cs typeface="Malgun Gothic" pitchFamily="34" charset="-120"/>
+              </a:rPr>
+              <a:t>패턴 바꿔보기</a:t>
+            </a:r>
+            <a:endParaRPr lang="en-US" sz="1800" dirty="0"/>
+          </a:p>
+        </p:txBody>
+      </p:sp>
+      <p:sp>
+        <p:nvSpPr>
+          <p:cNvPr id="7" name="Text 5"/>
+          <p:cNvSpPr/>
+          <p:nvPr/>
+        </p:nvSpPr>
+        <p:spPr>
+          <a:xfrm>
+            <a:off x="804672" y="2697480"/>
+            <a:ext cx="4791456" cy="731520"/>
+          </a:xfrm>
+          <a:prstGeom prst="rect">
+            <a:avLst/>
+          </a:prstGeom>
+          <a:noFill/>
+          <a:ln/>
+        </p:spPr>
+        <p:txBody>
+          <a:bodyPr wrap="square" lIns="0" tIns="0" rIns="0" bIns="0" rtlCol="0" anchor="t"/>
+          <a:lstStyle/>
+          <a:p>
+            <a:pPr indent="0" marL="0">
+              <a:lnSpc>
+                <a:spcPct val="110000"/>
+              </a:lnSpc>
+              <a:buNone/>
+            </a:pPr>
+            <a:r>
+              <a:rPr lang="en-US" sz="1350" dirty="0">
+                <a:solidFill>
+                  <a:srgbClr val="9FB0C4"/>
+                </a:solidFill>
+                <a:latin typeface="Malgun Gothic" pitchFamily="34" charset="0"/>
+                <a:ea typeface="Malgun Gothic" pitchFamily="34" charset="-122"/>
+                <a:cs typeface="Malgun Gothic" pitchFamily="34" charset="-120"/>
+              </a:rPr>
+              <a:t>gpuWriteConstant의 상수를 0xAAAAAAAA 등으로</a:t>
+            </a:r>
+            <a:endParaRPr lang="en-US" sz="1350" dirty="0"/>
+          </a:p>
+        </p:txBody>
+      </p:sp>
+      <p:sp>
+        <p:nvSpPr>
+          <p:cNvPr id="8" name="Shape 6"/>
+          <p:cNvSpPr/>
+          <p:nvPr/>
+        </p:nvSpPr>
+        <p:spPr>
+          <a:xfrm>
+            <a:off x="6309360" y="1600200"/>
+            <a:ext cx="5303520" cy="1920240"/>
+          </a:xfrm>
+          <a:prstGeom prst="roundRect">
+            <a:avLst>
+              <a:gd name="adj" fmla="val 3810"/>
+            </a:avLst>
+          </a:prstGeom>
+          <a:solidFill>
+            <a:srgbClr val="18212E"/>
+          </a:solidFill>
+          <a:ln/>
+        </p:spPr>
+      </p:sp>
+      <p:sp>
+        <p:nvSpPr>
+          <p:cNvPr id="9" name="Text 7"/>
+          <p:cNvSpPr/>
+          <p:nvPr/>
+        </p:nvSpPr>
+        <p:spPr>
+          <a:xfrm>
+            <a:off x="6565392" y="1801368"/>
+            <a:ext cx="1188720" cy="502920"/>
+          </a:xfrm>
+          <a:prstGeom prst="roundRect">
+            <a:avLst>
+              <a:gd name="adj" fmla="val 14545"/>
+            </a:avLst>
+          </a:prstGeom>
+          <a:solidFill>
+            <a:srgbClr val="3FB8C4"/>
+          </a:solidFill>
+          <a:ln/>
+        </p:spPr>
+        <p:txBody>
+          <a:bodyPr wrap="square" rtlCol="0" anchor="ctr"/>
+          <a:lstStyle/>
+          <a:p>
+            <a:pPr algn="ctr" indent="0" marL="0">
+              <a:buNone/>
+            </a:pPr>
+            <a:r>
+              <a:rPr lang="en-US" sz="1700" b="1" dirty="0">
+                <a:solidFill>
+                  <a:srgbClr val="101722"/>
+                </a:solidFill>
+                <a:latin typeface="Courier New" pitchFamily="34" charset="0"/>
+                <a:ea typeface="Courier New" pitchFamily="34" charset="-122"/>
+                <a:cs typeface="Courier New" pitchFamily="34" charset="-120"/>
+              </a:rPr>
+              <a:t>Ex 2</a:t>
+            </a:r>
+            <a:endParaRPr lang="en-US" sz="1700" dirty="0"/>
+          </a:p>
+        </p:txBody>
+      </p:sp>
+      <p:sp>
+        <p:nvSpPr>
+          <p:cNvPr id="10" name="Text 8"/>
+          <p:cNvSpPr/>
+          <p:nvPr/>
+        </p:nvSpPr>
+        <p:spPr>
+          <a:xfrm>
+            <a:off x="7909560" y="1819656"/>
+            <a:ext cx="3474720" cy="822960"/>
+          </a:xfrm>
+          <a:prstGeom prst="rect">
+            <a:avLst/>
+          </a:prstGeom>
+          <a:noFill/>
+          <a:ln/>
+        </p:spPr>
+        <p:txBody>
+          <a:bodyPr wrap="square" lIns="0" tIns="0" rIns="0" bIns="0" rtlCol="0" anchor="t"/>
+          <a:lstStyle/>
+          <a:p>
+            <a:pPr indent="0" marL="0">
+              <a:buNone/>
+            </a:pPr>
+            <a:r>
+              <a:rPr lang="en-US" sz="1800" b="1" dirty="0">
+                <a:solidFill>
+                  <a:srgbClr val="E7EDF5"/>
+                </a:solidFill>
+                <a:latin typeface="Malgun Gothic" pitchFamily="34" charset="0"/>
+                <a:ea typeface="Malgun Gothic" pitchFamily="34" charset="-122"/>
+                <a:cs typeface="Malgun Gothic" pitchFamily="34" charset="-120"/>
+              </a:rPr>
+              <a:t>오류 인위 주입</a:t>
+            </a:r>
+            <a:endParaRPr lang="en-US" sz="1800" dirty="0"/>
+          </a:p>
+        </p:txBody>
+      </p:sp>
+      <p:sp>
+        <p:nvSpPr>
+          <p:cNvPr id="11" name="Text 9"/>
+          <p:cNvSpPr/>
+          <p:nvPr/>
+        </p:nvSpPr>
+        <p:spPr>
+          <a:xfrm>
+            <a:off x="6565392" y="2697480"/>
+            <a:ext cx="4791456" cy="731520"/>
+          </a:xfrm>
+          <a:prstGeom prst="rect">
+            <a:avLst/>
+          </a:prstGeom>
+          <a:noFill/>
+          <a:ln/>
+        </p:spPr>
+        <p:txBody>
+          <a:bodyPr wrap="square" lIns="0" tIns="0" rIns="0" bIns="0" rtlCol="0" anchor="t"/>
+          <a:lstStyle/>
+          <a:p>
+            <a:pPr indent="0" marL="0">
+              <a:lnSpc>
+                <a:spcPct val="110000"/>
+              </a:lnSpc>
+              <a:buNone/>
+            </a:pPr>
+            <a:r>
+              <a:rPr lang="en-US" sz="1350" dirty="0">
+                <a:solidFill>
+                  <a:srgbClr val="9FB0C4"/>
+                </a:solidFill>
+                <a:latin typeface="Malgun Gothic" pitchFamily="34" charset="0"/>
+                <a:ea typeface="Malgun Gothic" pitchFamily="34" charset="-122"/>
+                <a:cs typeface="Malgun Gothic" pitchFamily="34" charset="-120"/>
+              </a:rPr>
+              <a:t>일부러 메모리를 훼손해 오류 검출 재현</a:t>
+            </a:r>
+            <a:endParaRPr lang="en-US" sz="1350" dirty="0"/>
+          </a:p>
+        </p:txBody>
+      </p:sp>
+      <p:sp>
+        <p:nvSpPr>
+          <p:cNvPr id="12" name="Shape 10"/>
+          <p:cNvSpPr/>
+          <p:nvPr/>
+        </p:nvSpPr>
+        <p:spPr>
+          <a:xfrm>
+            <a:off x="548640" y="3840480"/>
+            <a:ext cx="5303520" cy="1920240"/>
+          </a:xfrm>
+          <a:prstGeom prst="roundRect">
+            <a:avLst>
+              <a:gd name="adj" fmla="val 3810"/>
+            </a:avLst>
+          </a:prstGeom>
+          <a:solidFill>
+            <a:srgbClr val="18212E"/>
+          </a:solidFill>
+          <a:ln/>
+        </p:spPr>
+      </p:sp>
+      <p:sp>
+        <p:nvSpPr>
+          <p:cNvPr id="13" name="Text 11"/>
+          <p:cNvSpPr/>
+          <p:nvPr/>
+        </p:nvSpPr>
+        <p:spPr>
+          <a:xfrm>
+            <a:off x="804672" y="4041648"/>
+            <a:ext cx="1188720" cy="502920"/>
+          </a:xfrm>
+          <a:prstGeom prst="roundRect">
+            <a:avLst>
+              <a:gd name="adj" fmla="val 14545"/>
+            </a:avLst>
+          </a:prstGeom>
+          <a:solidFill>
+            <a:srgbClr val="E8A33D"/>
+          </a:solidFill>
+          <a:ln/>
+        </p:spPr>
+        <p:txBody>
+          <a:bodyPr wrap="square" rtlCol="0" anchor="ctr"/>
+          <a:lstStyle/>
+          <a:p>
+            <a:pPr algn="ctr" indent="0" marL="0">
+              <a:buNone/>
+            </a:pPr>
+            <a:r>
+              <a:rPr lang="en-US" sz="1700" b="1" dirty="0">
+                <a:solidFill>
+                  <a:srgbClr val="101722"/>
+                </a:solidFill>
+                <a:latin typeface="Courier New" pitchFamily="34" charset="0"/>
+                <a:ea typeface="Courier New" pitchFamily="34" charset="-122"/>
+                <a:cs typeface="Courier New" pitchFamily="34" charset="-120"/>
+              </a:rPr>
+              <a:t>Ex 3</a:t>
+            </a:r>
+            <a:endParaRPr lang="en-US" sz="1700" dirty="0"/>
+          </a:p>
+        </p:txBody>
+      </p:sp>
+      <p:sp>
+        <p:nvSpPr>
+          <p:cNvPr id="14" name="Text 12"/>
+          <p:cNvSpPr/>
+          <p:nvPr/>
+        </p:nvSpPr>
+        <p:spPr>
+          <a:xfrm>
+            <a:off x="2148840" y="4059936"/>
+            <a:ext cx="3474720" cy="822960"/>
+          </a:xfrm>
+          <a:prstGeom prst="rect">
+            <a:avLst/>
+          </a:prstGeom>
+          <a:noFill/>
+          <a:ln/>
+        </p:spPr>
+        <p:txBody>
+          <a:bodyPr wrap="square" lIns="0" tIns="0" rIns="0" bIns="0" rtlCol="0" anchor="t"/>
+          <a:lstStyle/>
+          <a:p>
+            <a:pPr indent="0" marL="0">
+              <a:buNone/>
+            </a:pPr>
+            <a:r>
+              <a:rPr lang="en-US" sz="1800" b="1" dirty="0">
+                <a:solidFill>
+                  <a:srgbClr val="E7EDF5"/>
+                </a:solidFill>
+                <a:latin typeface="Malgun Gothic" pitchFamily="34" charset="0"/>
+                <a:ea typeface="Malgun Gothic" pitchFamily="34" charset="-122"/>
+                <a:cs typeface="Malgun Gothic" pitchFamily="34" charset="-120"/>
+              </a:rPr>
+              <a:t>cpuVerify와 비교</a:t>
+            </a:r>
+            <a:endParaRPr lang="en-US" sz="1800" dirty="0"/>
+          </a:p>
+        </p:txBody>
+      </p:sp>
+      <p:sp>
+        <p:nvSpPr>
+          <p:cNvPr id="15" name="Text 13"/>
+          <p:cNvSpPr/>
+          <p:nvPr/>
+        </p:nvSpPr>
+        <p:spPr>
+          <a:xfrm>
+            <a:off x="804672" y="4937760"/>
+            <a:ext cx="4791456" cy="731520"/>
+          </a:xfrm>
+          <a:prstGeom prst="rect">
+            <a:avLst/>
+          </a:prstGeom>
+          <a:noFill/>
+          <a:ln/>
+        </p:spPr>
+        <p:txBody>
+          <a:bodyPr wrap="square" lIns="0" tIns="0" rIns="0" bIns="0" rtlCol="0" anchor="t"/>
+          <a:lstStyle/>
+          <a:p>
+            <a:pPr indent="0" marL="0">
+              <a:lnSpc>
+                <a:spcPct val="110000"/>
+              </a:lnSpc>
+              <a:buNone/>
+            </a:pPr>
+            <a:r>
+              <a:rPr lang="en-US" sz="1350" dirty="0">
+                <a:solidFill>
+                  <a:srgbClr val="9FB0C4"/>
+                </a:solidFill>
+                <a:latin typeface="Malgun Gothic" pitchFamily="34" charset="0"/>
+                <a:ea typeface="Malgun Gothic" pitchFamily="34" charset="-122"/>
+                <a:cs typeface="Malgun Gothic" pitchFamily="34" charset="-120"/>
+              </a:rPr>
+              <a:t>CPU 버전(core.cu:254)과 결과·속도 비교</a:t>
+            </a:r>
+            <a:endParaRPr lang="en-US" sz="1350" dirty="0"/>
+          </a:p>
+        </p:txBody>
+      </p:sp>
+      <p:sp>
+        <p:nvSpPr>
+          <p:cNvPr id="16" name="Shape 14"/>
+          <p:cNvSpPr/>
+          <p:nvPr/>
+        </p:nvSpPr>
+        <p:spPr>
+          <a:xfrm>
+            <a:off x="6309360" y="3840480"/>
+            <a:ext cx="5303520" cy="1920240"/>
+          </a:xfrm>
+          <a:prstGeom prst="roundRect">
+            <a:avLst>
+              <a:gd name="adj" fmla="val 3810"/>
+            </a:avLst>
+          </a:prstGeom>
+          <a:solidFill>
+            <a:srgbClr val="18212E"/>
+          </a:solidFill>
+          <a:ln/>
+        </p:spPr>
+      </p:sp>
+      <p:sp>
+        <p:nvSpPr>
+          <p:cNvPr id="17" name="Text 15"/>
+          <p:cNvSpPr/>
+          <p:nvPr/>
+        </p:nvSpPr>
+        <p:spPr>
+          <a:xfrm>
+            <a:off x="6565392" y="4041648"/>
+            <a:ext cx="1188720" cy="502920"/>
+          </a:xfrm>
+          <a:prstGeom prst="roundRect">
+            <a:avLst>
+              <a:gd name="adj" fmla="val 14545"/>
+            </a:avLst>
+          </a:prstGeom>
+          <a:solidFill>
+            <a:srgbClr val="3FB8C4"/>
+          </a:solidFill>
+          <a:ln/>
+        </p:spPr>
+        <p:txBody>
+          <a:bodyPr wrap="square" rtlCol="0" anchor="ctr"/>
+          <a:lstStyle/>
+          <a:p>
+            <a:pPr algn="ctr" indent="0" marL="0">
+              <a:buNone/>
+            </a:pPr>
+            <a:r>
+              <a:rPr lang="en-US" sz="1700" b="1" dirty="0">
+                <a:solidFill>
+                  <a:srgbClr val="101722"/>
+                </a:solidFill>
+                <a:latin typeface="Courier New" pitchFamily="34" charset="0"/>
+                <a:ea typeface="Courier New" pitchFamily="34" charset="-122"/>
+                <a:cs typeface="Courier New" pitchFamily="34" charset="-120"/>
+              </a:rPr>
+              <a:t>Ex 4</a:t>
+            </a:r>
+            <a:endParaRPr lang="en-US" sz="1700" dirty="0"/>
+          </a:p>
+        </p:txBody>
+      </p:sp>
+      <p:sp>
+        <p:nvSpPr>
+          <p:cNvPr id="18" name="Text 16"/>
+          <p:cNvSpPr/>
+          <p:nvPr/>
+        </p:nvSpPr>
+        <p:spPr>
+          <a:xfrm>
+            <a:off x="7909560" y="4059936"/>
+            <a:ext cx="3474720" cy="822960"/>
+          </a:xfrm>
+          <a:prstGeom prst="rect">
+            <a:avLst/>
+          </a:prstGeom>
+          <a:noFill/>
+          <a:ln/>
+        </p:spPr>
+        <p:txBody>
+          <a:bodyPr wrap="square" lIns="0" tIns="0" rIns="0" bIns="0" rtlCol="0" anchor="t"/>
+          <a:lstStyle/>
+          <a:p>
+            <a:pPr indent="0" marL="0">
+              <a:buNone/>
+            </a:pPr>
+            <a:r>
+              <a:rPr lang="en-US" sz="1800" b="1" dirty="0">
+                <a:solidFill>
+                  <a:srgbClr val="E7EDF5"/>
+                </a:solidFill>
+                <a:latin typeface="Malgun Gothic" pitchFamily="34" charset="0"/>
+                <a:ea typeface="Malgun Gothic" pitchFamily="34" charset="-122"/>
+                <a:cs typeface="Malgun Gothic" pitchFamily="34" charset="-120"/>
+              </a:rPr>
+              <a:t>N(loopIters) 관찰</a:t>
+            </a:r>
+            <a:endParaRPr lang="en-US" sz="1800" dirty="0"/>
+          </a:p>
+        </p:txBody>
+      </p:sp>
+      <p:sp>
+        <p:nvSpPr>
+          <p:cNvPr id="19" name="Text 17"/>
+          <p:cNvSpPr/>
+          <p:nvPr/>
+        </p:nvSpPr>
+        <p:spPr>
+          <a:xfrm>
+            <a:off x="6565392" y="4937760"/>
+            <a:ext cx="4791456" cy="731520"/>
+          </a:xfrm>
+          <a:prstGeom prst="rect">
+            <a:avLst/>
+          </a:prstGeom>
+          <a:noFill/>
+          <a:ln/>
+        </p:spPr>
+        <p:txBody>
+          <a:bodyPr wrap="square" lIns="0" tIns="0" rIns="0" bIns="0" rtlCol="0" anchor="t"/>
+          <a:lstStyle/>
+          <a:p>
+            <a:pPr indent="0" marL="0">
+              <a:lnSpc>
+                <a:spcPct val="110000"/>
+              </a:lnSpc>
+              <a:buNone/>
+            </a:pPr>
+            <a:r>
+              <a:rPr lang="en-US" sz="1350" dirty="0">
+                <a:solidFill>
+                  <a:srgbClr val="9FB0C4"/>
+                </a:solidFill>
+                <a:latin typeface="Malgun Gothic" pitchFamily="34" charset="0"/>
+                <a:ea typeface="Malgun Gothic" pitchFamily="34" charset="-122"/>
+                <a:cs typeface="Malgun Gothic" pitchFamily="34" charset="-120"/>
+              </a:rPr>
+              <a:t>테스트 MB를 바꿔 N이 어떻게 변하는지 출력</a:t>
+            </a:r>
+            <a:endParaRPr lang="en-US" sz="1350" dirty="0"/>
+          </a:p>
+        </p:txBody>
+      </p:sp>
+    </p:spTree>
+  </p:cSld>
+  <p:clrMapOvr>
+    <a:masterClrMapping/>
+  </p:clrMapOvr>
+</p:sld>
+</file>
+
+<file path=ppt/slides/slide11.xml><?xml version="1.0" encoding="utf-8"?>
+<p:sld xmlns:a="http://schemas.openxmlformats.org/drawingml/2006/main" xmlns:r="http://schemas.openxmlformats.org/officeDocument/2006/relationships" xmlns:p="http://schemas.openxmlformats.org/presentationml/2006/main">
+  <p:cSld name="Slide 11">
+    <p:bg>
+      <p:bgPr>
+        <a:solidFill>
+          <a:srgbClr val="101722"/>
+        </a:solidFill>
+      </p:bgPr>
+    </p:bg>
+    <p:spTree>
+      <p:nvGrpSpPr>
+        <p:cNvPr id="1" name=""/>
+        <p:cNvGrpSpPr/>
+        <p:nvPr/>
+      </p:nvGrpSpPr>
+      <p:grpSpPr>
+        <a:xfrm>
+          <a:off x="0" y="0"/>
+          <a:ext cx="0" cy="0"/>
+          <a:chOff x="0" y="0"/>
+          <a:chExt cx="0" cy="0"/>
+        </a:xfrm>
+      </p:grpSpPr>
+      <p:sp>
+        <p:nvSpPr>
+          <p:cNvPr id="2" name="Text 0"/>
+          <p:cNvSpPr/>
+          <p:nvPr/>
+        </p:nvSpPr>
+        <p:spPr>
+          <a:xfrm>
+            <a:off x="548640" y="1463040"/>
+            <a:ext cx="10058400" cy="457200"/>
+          </a:xfrm>
+          <a:prstGeom prst="rect">
+            <a:avLst/>
+          </a:prstGeom>
+          <a:noFill/>
+          <a:ln/>
+        </p:spPr>
+        <p:txBody>
+          <a:bodyPr wrap="square" lIns="0" tIns="0" rIns="0" bIns="0" rtlCol="0" anchor="ctr"/>
+          <a:lstStyle/>
+          <a:p>
+            <a:pPr indent="0" marL="0">
+              <a:buNone/>
+            </a:pPr>
+            <a:r>
+              <a:rPr lang="en-US" sz="1800" b="1" dirty="0">
+                <a:solidFill>
+                  <a:srgbClr val="E8A33D"/>
+                </a:solidFill>
+                <a:latin typeface="Malgun Gothic" pitchFamily="34" charset="0"/>
+                <a:ea typeface="Malgun Gothic" pitchFamily="34" charset="-122"/>
+                <a:cs typeface="Malgun Gothic" pitchFamily="34" charset="-120"/>
+              </a:rPr>
+              <a:t>다음 세션 예고</a:t>
+            </a:r>
+            <a:endParaRPr lang="en-US" sz="1800" dirty="0"/>
+          </a:p>
+        </p:txBody>
+      </p:sp>
+      <p:sp>
+        <p:nvSpPr>
+          <p:cNvPr id="3" name="Text 1"/>
+          <p:cNvSpPr/>
+          <p:nvPr/>
+        </p:nvSpPr>
+        <p:spPr>
+          <a:xfrm>
+            <a:off x="548640" y="1965960"/>
+            <a:ext cx="10972800" cy="914400"/>
+          </a:xfrm>
+          <a:prstGeom prst="rect">
+            <a:avLst/>
+          </a:prstGeom>
+          <a:noFill/>
+          <a:ln/>
+        </p:spPr>
+        <p:txBody>
+          <a:bodyPr wrap="square" lIns="0" tIns="0" rIns="0" bIns="0" rtlCol="0" anchor="ctr"/>
+          <a:lstStyle/>
+          <a:p>
+            <a:pPr indent="0" marL="0">
+              <a:buNone/>
+            </a:pPr>
+            <a:r>
+              <a:rPr lang="en-US" sz="3700" b="1" dirty="0">
+                <a:solidFill>
+                  <a:srgbClr val="E7EDF5"/>
+                </a:solidFill>
+                <a:latin typeface="Malgun Gothic" pitchFamily="34" charset="0"/>
+                <a:ea typeface="Malgun Gothic" pitchFamily="34" charset="-122"/>
+                <a:cs typeface="Malgun Gothic" pitchFamily="34" charset="-120"/>
+              </a:rPr>
+              <a:t>세션 3 · 공유 메모리와 병렬 리덕션</a:t>
+            </a:r>
+            <a:endParaRPr lang="en-US" sz="3700" dirty="0"/>
+          </a:p>
+        </p:txBody>
+      </p:sp>
+      <p:sp>
+        <p:nvSpPr>
+          <p:cNvPr id="4" name="Text 2"/>
+          <p:cNvSpPr/>
+          <p:nvPr/>
+        </p:nvSpPr>
+        <p:spPr>
+          <a:xfrm>
+            <a:off x="548640" y="3063240"/>
+            <a:ext cx="10972800" cy="1280160"/>
+          </a:xfrm>
+          <a:prstGeom prst="rect">
+            <a:avLst/>
+          </a:prstGeom>
+          <a:noFill/>
+          <a:ln/>
+        </p:spPr>
+        <p:txBody>
+          <a:bodyPr wrap="square" lIns="0" tIns="0" rIns="0" bIns="0" rtlCol="0" anchor="t"/>
+          <a:lstStyle/>
+          <a:p>
+            <a:pPr indent="0" marL="0">
+              <a:lnSpc>
+                <a:spcPct val="120000"/>
+              </a:lnSpc>
+              <a:buNone/>
+            </a:pPr>
+            <a:r>
+              <a:rPr lang="en-US" sz="1700" dirty="0">
+                <a:solidFill>
+                  <a:srgbClr val="E7EDF5"/>
+                </a:solidFill>
+                <a:latin typeface="Malgun Gothic" pitchFamily="34" charset="0"/>
+                <a:ea typeface="Malgun Gothic" pitchFamily="34" charset="-122"/>
+                <a:cs typeface="Malgun Gothic" pitchFamily="34" charset="-120"/>
+              </a:rPr>
+              <a:t>52만 개 스레드가 각자 센 오류 수를, 어떻게 </a:t>
+            </a:r>
+            <a:pPr indent="0" marL="0">
+              <a:lnSpc>
+                <a:spcPct val="120000"/>
+              </a:lnSpc>
+              <a:buNone/>
+            </a:pPr>
+            <a:r>
+              <a:rPr lang="en-US" sz="1700" b="1" dirty="0">
+                <a:solidFill>
+                  <a:srgbClr val="3FB8C4"/>
+                </a:solidFill>
+                <a:latin typeface="Malgun Gothic" pitchFamily="34" charset="0"/>
+                <a:ea typeface="Malgun Gothic" pitchFamily="34" charset="-122"/>
+                <a:cs typeface="Malgun Gothic" pitchFamily="34" charset="-120"/>
+              </a:rPr>
+              <a:t>하나의 숫자로 합칠까?</a:t>
+            </a:r>
+            <a:pPr indent="0" marL="0">
+              <a:lnSpc>
+                <a:spcPct val="120000"/>
+              </a:lnSpc>
+              <a:buNone/>
+            </a:pPr>
+            <a:r>
+              <a:rPr lang="en-US" sz="1700" dirty="0">
+                <a:solidFill>
+                  <a:srgbClr val="E7EDF5"/>
+                </a:solidFill>
+                <a:latin typeface="Malgun Gothic" pitchFamily="34" charset="0"/>
+                <a:ea typeface="Malgun Gothic" pitchFamily="34" charset="-122"/>
+                <a:cs typeface="Malgun Gothic" pitchFamily="34" charset="-120"/>
+              </a:rPr>
+              <a:t> MemtestG80의 가장 우아한 코드를 만납니다.</a:t>
+            </a:r>
+            <a:endParaRPr lang="en-US" sz="1700" dirty="0"/>
+          </a:p>
+        </p:txBody>
+      </p:sp>
+      <p:sp>
+        <p:nvSpPr>
+          <p:cNvPr id="5" name="Shape 3"/>
+          <p:cNvSpPr/>
+          <p:nvPr/>
+        </p:nvSpPr>
+        <p:spPr>
+          <a:xfrm>
+            <a:off x="548640" y="4937760"/>
+            <a:ext cx="8412480" cy="1005840"/>
+          </a:xfrm>
+          <a:prstGeom prst="roundRect">
+            <a:avLst>
+              <a:gd name="adj" fmla="val 4545"/>
+            </a:avLst>
+          </a:prstGeom>
+          <a:solidFill>
+            <a:srgbClr val="0B1119"/>
+          </a:solidFill>
+          <a:ln w="12700">
+            <a:solidFill>
+              <a:srgbClr val="2C3A4E"/>
+            </a:solidFill>
+            <a:prstDash val="solid"/>
+          </a:ln>
+        </p:spPr>
+      </p:sp>
+      <p:sp>
+        <p:nvSpPr>
+          <p:cNvPr id="6" name="Text 4"/>
+          <p:cNvSpPr/>
+          <p:nvPr/>
+        </p:nvSpPr>
+        <p:spPr>
+          <a:xfrm>
+            <a:off x="768096" y="5084064"/>
+            <a:ext cx="7973568" cy="713232"/>
+          </a:xfrm>
+          <a:prstGeom prst="rect">
+            <a:avLst/>
+          </a:prstGeom>
+          <a:noFill/>
+          <a:ln/>
+        </p:spPr>
+        <p:txBody>
+          <a:bodyPr wrap="square" lIns="0" tIns="0" rIns="0" bIns="0" rtlCol="0" anchor="t"/>
+          <a:lstStyle/>
+          <a:p>
+            <a:pPr algn="l" indent="0" marL="0">
+              <a:lnSpc>
+                <a:spcPct val="110000"/>
+              </a:lnSpc>
+              <a:buNone/>
+            </a:pPr>
+            <a:r>
+              <a:rPr lang="en-US" sz="1250" dirty="0">
+                <a:solidFill>
+                  <a:srgbClr val="F2C079"/>
+                </a:solidFill>
+                <a:latin typeface="Courier New" pitchFamily="34" charset="0"/>
+                <a:ea typeface="Courier New" pitchFamily="34" charset="-122"/>
+                <a:cs typeface="Courier New" pitchFamily="34" charset="-120"/>
+              </a:rPr>
+              <a:t>__popc(x ^ constant)   →  뒤집힌 비트 개수를 센다</a:t>
+            </a:r>
+            <a:endParaRPr lang="en-US" sz="1250" dirty="0"/>
+          </a:p>
+          <a:p>
+            <a:pPr algn="l" indent="0" marL="0">
+              <a:lnSpc>
+                <a:spcPct val="110000"/>
+              </a:lnSpc>
+              <a:buNone/>
+            </a:pPr>
+            <a:r>
+              <a:rPr lang="en-US" sz="1250" dirty="0">
+                <a:solidFill>
+                  <a:srgbClr val="3FB8C4"/>
+                </a:solidFill>
+                <a:latin typeface="Courier New" pitchFamily="34" charset="0"/>
+                <a:ea typeface="Courier New" pitchFamily="34" charset="-122"/>
+                <a:cs typeface="Courier New" pitchFamily="34" charset="-120"/>
+              </a:rPr>
+              <a:t>트리 리덕션           →  블록 안에서 병렬로 합산</a:t>
+            </a:r>
+            <a:endParaRPr lang="en-US" sz="1250" dirty="0"/>
+          </a:p>
+        </p:txBody>
+      </p:sp>
+      <p:sp>
+        <p:nvSpPr>
+          <p:cNvPr id="7" name="Text 5"/>
+          <p:cNvSpPr/>
+          <p:nvPr/>
+        </p:nvSpPr>
+        <p:spPr>
+          <a:xfrm>
+            <a:off x="548640" y="6126480"/>
+            <a:ext cx="10972800" cy="365760"/>
+          </a:xfrm>
+          <a:prstGeom prst="rect">
+            <a:avLst/>
+          </a:prstGeom>
+          <a:noFill/>
+          <a:ln/>
+        </p:spPr>
+        <p:txBody>
+          <a:bodyPr wrap="square" lIns="0" tIns="0" rIns="0" bIns="0" rtlCol="0" anchor="ctr"/>
+          <a:lstStyle/>
+          <a:p>
+            <a:pPr indent="0" marL="0">
+              <a:buNone/>
+            </a:pPr>
+            <a:r>
+              <a:rPr lang="en-US" sz="1350" i="1" dirty="0">
+                <a:solidFill>
+                  <a:srgbClr val="9FB0C4"/>
+                </a:solidFill>
+                <a:latin typeface="Malgun Gothic" pitchFamily="34" charset="0"/>
+                <a:ea typeface="Malgun Gothic" pitchFamily="34" charset="-122"/>
+                <a:cs typeface="Malgun Gothic" pitchFamily="34" charset="-120"/>
+              </a:rPr>
+              <a:t>실습 랩 2(쓰기·검증)를 먼저 완료하고 오세요.</a:t>
+            </a:r>
+            <a:endParaRPr lang="en-US" sz="1350" dirty="0"/>
+          </a:p>
+        </p:txBody>
+      </p:sp>
+    </p:spTree>
+  </p:cSld>
+  <p:clrMapOvr>
+    <a:masterClrMapping/>
+  </p:clrMapOvr>
+</p:sld>
+</file>
+
 <file path=ppt/slides/slide2.xml><?xml version="1.0" encoding="utf-8"?>
 <p:sld xmlns:a="http://schemas.openxmlformats.org/drawingml/2006/main" xmlns:r="http://schemas.openxmlformats.org/officeDocument/2006/relationships" xmlns:p="http://schemas.openxmlformats.org/presentationml/2006/main">
   <p:cSld name="Slide 2">
@@ -3295,7 +4485,7 @@
             </a:avLst>
           </a:prstGeom>
           <a:solidFill>
-            <a:srgbClr val="E8A33D"/>
+            <a:srgbClr val="3FB8C4"/>
           </a:solidFill>
           <a:ln/>
         </p:spPr>
@@ -3315,7 +4505,7 @@
                 <a:ea typeface="Courier New" pitchFamily="34" charset="-122"/>
                 <a:cs typeface="Courier New" pitchFamily="34" charset="-120"/>
               </a:rPr>
-              <a:t>3</a:t>
+              <a:t>2</a:t>
             </a:r>
             <a:endParaRPr lang="en-US" sz="2200" dirty="0"/>
           </a:p>
@@ -3354,7 +4544,7 @@
                 <a:ea typeface="Malgun Gothic" pitchFamily="34" charset="-122"/>
                 <a:cs typeface="Malgun Gothic" pitchFamily="34" charset="-120"/>
               </a:rPr>
-              <a:t>메모리 할당 · memtestState::allocate</a:t>
+              <a:t>메모리 계층 · 범위(scope)로 보기</a:t>
             </a:r>
             <a:endParaRPr lang="en-US" sz="2900" dirty="0"/>
           </a:p>
@@ -3362,26 +4552,197 @@
       </p:sp>
       <p:sp>
         <p:nvSpPr>
-          <p:cNvPr id="4" name="Shape 2"/>
-          <p:cNvSpPr/>
-          <p:nvPr/>
-        </p:nvSpPr>
-        <p:spPr>
-          <a:xfrm>
-            <a:off x="548640" y="1508760"/>
-            <a:ext cx="11064240" cy="2286000"/>
+          <p:cNvPr id="4" name="Text 2"/>
+          <p:cNvSpPr/>
+          <p:nvPr/>
+        </p:nvSpPr>
+        <p:spPr>
+          <a:xfrm>
+            <a:off x="548640" y="1371600"/>
+            <a:ext cx="11064240" cy="411480"/>
+          </a:xfrm>
+          <a:prstGeom prst="rect">
+            <a:avLst/>
+          </a:prstGeom>
+          <a:noFill/>
+          <a:ln/>
+        </p:spPr>
+        <p:txBody>
+          <a:bodyPr wrap="square" lIns="0" tIns="0" rIns="0" bIns="0" rtlCol="0" anchor="ctr"/>
+          <a:lstStyle/>
+          <a:p>
+            <a:pPr indent="0" marL="0">
+              <a:buNone/>
+            </a:pPr>
+            <a:r>
+              <a:rPr lang="en-US" sz="1450" dirty="0">
+                <a:solidFill>
+                  <a:srgbClr val="9FB0C4"/>
+                </a:solidFill>
+                <a:latin typeface="Malgun Gothic" pitchFamily="34" charset="0"/>
+                <a:ea typeface="Malgun Gothic" pitchFamily="34" charset="-122"/>
+                <a:cs typeface="Malgun Gothic" pitchFamily="34" charset="-120"/>
+              </a:rPr>
+              <a:t>세 계층은 접근 범위가 서로 다릅니다. 큰 범위일수록 느리고, 좁을수록 빠릅니다.</a:t>
+            </a:r>
+            <a:endParaRPr lang="en-US" sz="1450" dirty="0"/>
+          </a:p>
+        </p:txBody>
+      </p:sp>
+      <p:sp>
+        <p:nvSpPr>
+          <p:cNvPr id="5" name="Shape 3"/>
+          <p:cNvSpPr/>
+          <p:nvPr/>
+        </p:nvSpPr>
+        <p:spPr>
+          <a:xfrm>
+            <a:off x="548640" y="1920240"/>
+            <a:ext cx="7589520" cy="3794760"/>
           </a:xfrm>
           <a:prstGeom prst="roundRect">
             <a:avLst>
-              <a:gd name="adj" fmla="val 2000"/>
+              <a:gd name="adj" fmla="val 1928"/>
+            </a:avLst>
+          </a:prstGeom>
+          <a:solidFill>
+            <a:srgbClr val="141A24"/>
+          </a:solidFill>
+          <a:ln w="19050">
+            <a:solidFill>
+              <a:srgbClr val="E8A33D"/>
+            </a:solidFill>
+            <a:prstDash val="solid"/>
+          </a:ln>
+        </p:spPr>
+      </p:sp>
+      <p:sp>
+        <p:nvSpPr>
+          <p:cNvPr id="6" name="Text 4"/>
+          <p:cNvSpPr/>
+          <p:nvPr/>
+        </p:nvSpPr>
+        <p:spPr>
+          <a:xfrm>
+            <a:off x="777240" y="2039112"/>
+            <a:ext cx="7132320" cy="365760"/>
+          </a:xfrm>
+          <a:prstGeom prst="rect">
+            <a:avLst/>
+          </a:prstGeom>
+          <a:noFill/>
+          <a:ln/>
+        </p:spPr>
+        <p:txBody>
+          <a:bodyPr wrap="square" lIns="0" tIns="0" rIns="0" bIns="0" rtlCol="0" anchor="ctr"/>
+          <a:lstStyle/>
+          <a:p>
+            <a:pPr indent="0" marL="0">
+              <a:buNone/>
+            </a:pPr>
+            <a:r>
+              <a:rPr lang="en-US" sz="1400" b="1" dirty="0">
+                <a:solidFill>
+                  <a:srgbClr val="E8A33D"/>
+                </a:solidFill>
+                <a:latin typeface="Malgun Gothic" pitchFamily="34" charset="0"/>
+                <a:ea typeface="Malgun Gothic" pitchFamily="34" charset="-122"/>
+                <a:cs typeface="Malgun Gothic" pitchFamily="34" charset="-120"/>
+              </a:rPr>
+              <a:t>전역 메모리 (global) · 모든 스레드 공유 · 테스트 대상</a:t>
+            </a:r>
+            <a:endParaRPr lang="en-US" sz="1400" dirty="0"/>
+          </a:p>
+        </p:txBody>
+      </p:sp>
+      <p:sp>
+        <p:nvSpPr>
+          <p:cNvPr id="7" name="Shape 5"/>
+          <p:cNvSpPr/>
+          <p:nvPr/>
+        </p:nvSpPr>
+        <p:spPr>
+          <a:xfrm>
+            <a:off x="868680" y="2560320"/>
+            <a:ext cx="3429000" cy="2926080"/>
+          </a:xfrm>
+          <a:prstGeom prst="roundRect">
+            <a:avLst>
+              <a:gd name="adj" fmla="val 2500"/>
+            </a:avLst>
+          </a:prstGeom>
+          <a:solidFill>
+            <a:srgbClr val="12212A"/>
+          </a:solidFill>
+          <a:ln w="19050">
+            <a:solidFill>
+              <a:srgbClr val="3FB8C4"/>
+            </a:solidFill>
+            <a:prstDash val="solid"/>
+          </a:ln>
+        </p:spPr>
+      </p:sp>
+      <p:sp>
+        <p:nvSpPr>
+          <p:cNvPr id="8" name="Text 6"/>
+          <p:cNvSpPr/>
+          <p:nvPr/>
+        </p:nvSpPr>
+        <p:spPr>
+          <a:xfrm>
+            <a:off x="1051560" y="2670048"/>
+            <a:ext cx="3063240" cy="320040"/>
+          </a:xfrm>
+          <a:prstGeom prst="rect">
+            <a:avLst/>
+          </a:prstGeom>
+          <a:noFill/>
+          <a:ln/>
+        </p:spPr>
+        <p:txBody>
+          <a:bodyPr wrap="square" lIns="0" tIns="0" rIns="0" bIns="0" rtlCol="0" anchor="ctr"/>
+          <a:lstStyle/>
+          <a:p>
+            <a:pPr indent="0" marL="0">
+              <a:buNone/>
+            </a:pPr>
+            <a:r>
+              <a:rPr lang="en-US" sz="1250" b="1" dirty="0">
+                <a:solidFill>
+                  <a:srgbClr val="3FB8C4"/>
+                </a:solidFill>
+                <a:latin typeface="Malgun Gothic" pitchFamily="34" charset="0"/>
+                <a:ea typeface="Malgun Gothic" pitchFamily="34" charset="-122"/>
+                <a:cs typeface="Malgun Gothic" pitchFamily="34" charset="-120"/>
+              </a:rPr>
+              <a:t>공유 메모리 (shared) · 블록 0 전용</a:t>
+            </a:r>
+            <a:endParaRPr lang="en-US" sz="1250" dirty="0"/>
+          </a:p>
+        </p:txBody>
+      </p:sp>
+      <p:sp>
+        <p:nvSpPr>
+          <p:cNvPr id="9" name="Shape 7"/>
+          <p:cNvSpPr/>
+          <p:nvPr/>
+        </p:nvSpPr>
+        <p:spPr>
+          <a:xfrm>
+            <a:off x="1097280" y="3127248"/>
+            <a:ext cx="1417320" cy="868680"/>
+          </a:xfrm>
+          <a:prstGeom prst="roundRect">
+            <a:avLst>
+              <a:gd name="adj" fmla="val 5263"/>
             </a:avLst>
           </a:prstGeom>
           <a:solidFill>
             <a:srgbClr val="0B1119"/>
           </a:solidFill>
-          <a:ln w="12700">
+          <a:ln w="19050">
             <a:solidFill>
-              <a:srgbClr val="2C3A4E"/>
+              <a:srgbClr val="9FB0C4"/>
             </a:solidFill>
             <a:prstDash val="solid"/>
           </a:ln>
@@ -3389,14 +4750,14 @@
       </p:sp>
       <p:sp>
         <p:nvSpPr>
-          <p:cNvPr id="5" name="Text 3"/>
-          <p:cNvSpPr/>
-          <p:nvPr/>
-        </p:nvSpPr>
-        <p:spPr>
-          <a:xfrm>
-            <a:off x="768096" y="1655064"/>
-            <a:ext cx="10625328" cy="1993392"/>
+          <p:cNvPr id="10" name="Text 8"/>
+          <p:cNvSpPr/>
+          <p:nvPr/>
+        </p:nvSpPr>
+        <p:spPr>
+          <a:xfrm>
+            <a:off x="1207008" y="3218688"/>
+            <a:ext cx="1197864" cy="365760"/>
           </a:xfrm>
           <a:prstGeom prst="rect">
             <a:avLst/>
@@ -3408,177 +4769,962 @@
           <a:bodyPr wrap="square" lIns="0" tIns="0" rIns="0" bIns="0" rtlCol="0" anchor="t"/>
           <a:lstStyle/>
           <a:p>
-            <a:pPr algn="l" indent="0" marL="0">
-              <a:lnSpc>
-                <a:spcPct val="110000"/>
-              </a:lnSpc>
-              <a:buNone/>
-            </a:pPr>
-            <a:r>
-              <a:rPr lang="en-US" sz="1300" dirty="0">
-                <a:solidFill>
-                  <a:srgbClr val="6B7D94"/>
+            <a:pPr algn="ctr" indent="0" marL="0">
+              <a:buNone/>
+            </a:pPr>
+            <a:r>
+              <a:rPr lang="en-US" sz="1400" b="1" dirty="0">
+                <a:solidFill>
+                  <a:srgbClr val="9FB0C4"/>
+                </a:solidFill>
+                <a:latin typeface="Malgun Gothic" pitchFamily="34" charset="0"/>
+                <a:ea typeface="Malgun Gothic" pitchFamily="34" charset="-122"/>
+                <a:cs typeface="Malgun Gothic" pitchFamily="34" charset="-120"/>
+              </a:rPr>
+              <a:t>레지스터</a:t>
+            </a:r>
+            <a:endParaRPr lang="en-US" sz="1400" dirty="0"/>
+          </a:p>
+        </p:txBody>
+      </p:sp>
+      <p:sp>
+        <p:nvSpPr>
+          <p:cNvPr id="11" name="Text 9"/>
+          <p:cNvSpPr/>
+          <p:nvPr/>
+        </p:nvSpPr>
+        <p:spPr>
+          <a:xfrm>
+            <a:off x="1207008" y="3538728"/>
+            <a:ext cx="1197864" cy="384048"/>
+          </a:xfrm>
+          <a:prstGeom prst="rect">
+            <a:avLst/>
+          </a:prstGeom>
+          <a:noFill/>
+          <a:ln/>
+        </p:spPr>
+        <p:txBody>
+          <a:bodyPr wrap="square" lIns="0" tIns="0" rIns="0" bIns="0" rtlCol="0" anchor="ctr"/>
+          <a:lstStyle/>
+          <a:p>
+            <a:pPr algn="ctr" indent="0" marL="0">
+              <a:buNone/>
+            </a:pPr>
+            <a:r>
+              <a:rPr lang="en-US" sz="1050" dirty="0">
+                <a:solidFill>
+                  <a:srgbClr val="9FB0C4"/>
                 </a:solidFill>
                 <a:latin typeface="Courier New" pitchFamily="34" charset="0"/>
                 <a:ea typeface="Courier New" pitchFamily="34" charset="-122"/>
                 <a:cs typeface="Courier New" pitchFamily="34" charset="-120"/>
               </a:rPr>
-              <a:t>// core.cu:51</a:t>
-            </a:r>
-            <a:endParaRPr lang="en-US" sz="1300" dirty="0"/>
-          </a:p>
-          <a:p>
-            <a:pPr algn="l" indent="0" marL="0">
-              <a:lnSpc>
-                <a:spcPct val="110000"/>
-              </a:lnSpc>
-              <a:buNone/>
-            </a:pPr>
-            <a:r>
-              <a:rPr lang="en-US" sz="1300" dirty="0">
-                <a:solidFill>
-                  <a:srgbClr val="E7EDF5"/>
+              <a:t>스레드 전용</a:t>
+            </a:r>
+            <a:endParaRPr lang="en-US" sz="1050" dirty="0"/>
+          </a:p>
+        </p:txBody>
+      </p:sp>
+      <p:sp>
+        <p:nvSpPr>
+          <p:cNvPr id="12" name="Shape 10"/>
+          <p:cNvSpPr/>
+          <p:nvPr/>
+        </p:nvSpPr>
+        <p:spPr>
+          <a:xfrm>
+            <a:off x="2697480" y="3127248"/>
+            <a:ext cx="1417320" cy="868680"/>
+          </a:xfrm>
+          <a:prstGeom prst="roundRect">
+            <a:avLst>
+              <a:gd name="adj" fmla="val 5263"/>
+            </a:avLst>
+          </a:prstGeom>
+          <a:solidFill>
+            <a:srgbClr val="0B1119"/>
+          </a:solidFill>
+          <a:ln w="19050">
+            <a:solidFill>
+              <a:srgbClr val="9FB0C4"/>
+            </a:solidFill>
+            <a:prstDash val="solid"/>
+          </a:ln>
+        </p:spPr>
+      </p:sp>
+      <p:sp>
+        <p:nvSpPr>
+          <p:cNvPr id="13" name="Text 11"/>
+          <p:cNvSpPr/>
+          <p:nvPr/>
+        </p:nvSpPr>
+        <p:spPr>
+          <a:xfrm>
+            <a:off x="2807208" y="3218688"/>
+            <a:ext cx="1197864" cy="365760"/>
+          </a:xfrm>
+          <a:prstGeom prst="rect">
+            <a:avLst/>
+          </a:prstGeom>
+          <a:noFill/>
+          <a:ln/>
+        </p:spPr>
+        <p:txBody>
+          <a:bodyPr wrap="square" lIns="0" tIns="0" rIns="0" bIns="0" rtlCol="0" anchor="t"/>
+          <a:lstStyle/>
+          <a:p>
+            <a:pPr algn="ctr" indent="0" marL="0">
+              <a:buNone/>
+            </a:pPr>
+            <a:r>
+              <a:rPr lang="en-US" sz="1400" b="1" dirty="0">
+                <a:solidFill>
+                  <a:srgbClr val="9FB0C4"/>
+                </a:solidFill>
+                <a:latin typeface="Malgun Gothic" pitchFamily="34" charset="0"/>
+                <a:ea typeface="Malgun Gothic" pitchFamily="34" charset="-122"/>
+                <a:cs typeface="Malgun Gothic" pitchFamily="34" charset="-120"/>
+              </a:rPr>
+              <a:t>레지스터</a:t>
+            </a:r>
+            <a:endParaRPr lang="en-US" sz="1400" dirty="0"/>
+          </a:p>
+        </p:txBody>
+      </p:sp>
+      <p:sp>
+        <p:nvSpPr>
+          <p:cNvPr id="14" name="Text 12"/>
+          <p:cNvSpPr/>
+          <p:nvPr/>
+        </p:nvSpPr>
+        <p:spPr>
+          <a:xfrm>
+            <a:off x="2807208" y="3538728"/>
+            <a:ext cx="1197864" cy="384048"/>
+          </a:xfrm>
+          <a:prstGeom prst="rect">
+            <a:avLst/>
+          </a:prstGeom>
+          <a:noFill/>
+          <a:ln/>
+        </p:spPr>
+        <p:txBody>
+          <a:bodyPr wrap="square" lIns="0" tIns="0" rIns="0" bIns="0" rtlCol="0" anchor="ctr"/>
+          <a:lstStyle/>
+          <a:p>
+            <a:pPr algn="ctr" indent="0" marL="0">
+              <a:buNone/>
+            </a:pPr>
+            <a:r>
+              <a:rPr lang="en-US" sz="1050" dirty="0">
+                <a:solidFill>
+                  <a:srgbClr val="9FB0C4"/>
                 </a:solidFill>
                 <a:latin typeface="Courier New" pitchFamily="34" charset="0"/>
                 <a:ea typeface="Courier New" pitchFamily="34" charset="-122"/>
                 <a:cs typeface="Courier New" pitchFamily="34" charset="-120"/>
               </a:rPr>
-              <a:t>uint memtestState::allocate(uint mbToTest) {</a:t>
-            </a:r>
-            <a:endParaRPr lang="en-US" sz="1300" dirty="0"/>
-          </a:p>
-          <a:p>
-            <a:pPr algn="l" indent="0" marL="0">
-              <a:lnSpc>
-                <a:spcPct val="110000"/>
-              </a:lnSpc>
-              <a:buNone/>
-            </a:pPr>
-            <a:r>
-              <a:rPr lang="en-US" sz="1300" dirty="0">
-                <a:solidFill>
-                  <a:srgbClr val="F2C079"/>
+              <a:t>스레드 전용</a:t>
+            </a:r>
+            <a:endParaRPr lang="en-US" sz="1050" dirty="0"/>
+          </a:p>
+        </p:txBody>
+      </p:sp>
+      <p:sp>
+        <p:nvSpPr>
+          <p:cNvPr id="15" name="Shape 13"/>
+          <p:cNvSpPr/>
+          <p:nvPr/>
+        </p:nvSpPr>
+        <p:spPr>
+          <a:xfrm>
+            <a:off x="1097280" y="4178808"/>
+            <a:ext cx="1417320" cy="868680"/>
+          </a:xfrm>
+          <a:prstGeom prst="roundRect">
+            <a:avLst>
+              <a:gd name="adj" fmla="val 5263"/>
+            </a:avLst>
+          </a:prstGeom>
+          <a:solidFill>
+            <a:srgbClr val="0B1119"/>
+          </a:solidFill>
+          <a:ln w="19050">
+            <a:solidFill>
+              <a:srgbClr val="9FB0C4"/>
+            </a:solidFill>
+            <a:prstDash val="solid"/>
+          </a:ln>
+        </p:spPr>
+      </p:sp>
+      <p:sp>
+        <p:nvSpPr>
+          <p:cNvPr id="16" name="Text 14"/>
+          <p:cNvSpPr/>
+          <p:nvPr/>
+        </p:nvSpPr>
+        <p:spPr>
+          <a:xfrm>
+            <a:off x="1207008" y="4270248"/>
+            <a:ext cx="1197864" cy="365760"/>
+          </a:xfrm>
+          <a:prstGeom prst="rect">
+            <a:avLst/>
+          </a:prstGeom>
+          <a:noFill/>
+          <a:ln/>
+        </p:spPr>
+        <p:txBody>
+          <a:bodyPr wrap="square" lIns="0" tIns="0" rIns="0" bIns="0" rtlCol="0" anchor="t"/>
+          <a:lstStyle/>
+          <a:p>
+            <a:pPr algn="ctr" indent="0" marL="0">
+              <a:buNone/>
+            </a:pPr>
+            <a:r>
+              <a:rPr lang="en-US" sz="1400" b="1" dirty="0">
+                <a:solidFill>
+                  <a:srgbClr val="9FB0C4"/>
+                </a:solidFill>
+                <a:latin typeface="Malgun Gothic" pitchFamily="34" charset="0"/>
+                <a:ea typeface="Malgun Gothic" pitchFamily="34" charset="-122"/>
+                <a:cs typeface="Malgun Gothic" pitchFamily="34" charset="-120"/>
+              </a:rPr>
+              <a:t>레지스터</a:t>
+            </a:r>
+            <a:endParaRPr lang="en-US" sz="1400" dirty="0"/>
+          </a:p>
+        </p:txBody>
+      </p:sp>
+      <p:sp>
+        <p:nvSpPr>
+          <p:cNvPr id="17" name="Text 15"/>
+          <p:cNvSpPr/>
+          <p:nvPr/>
+        </p:nvSpPr>
+        <p:spPr>
+          <a:xfrm>
+            <a:off x="1207008" y="4590288"/>
+            <a:ext cx="1197864" cy="384048"/>
+          </a:xfrm>
+          <a:prstGeom prst="rect">
+            <a:avLst/>
+          </a:prstGeom>
+          <a:noFill/>
+          <a:ln/>
+        </p:spPr>
+        <p:txBody>
+          <a:bodyPr wrap="square" lIns="0" tIns="0" rIns="0" bIns="0" rtlCol="0" anchor="ctr"/>
+          <a:lstStyle/>
+          <a:p>
+            <a:pPr algn="ctr" indent="0" marL="0">
+              <a:buNone/>
+            </a:pPr>
+            <a:r>
+              <a:rPr lang="en-US" sz="1050" dirty="0">
+                <a:solidFill>
+                  <a:srgbClr val="9FB0C4"/>
                 </a:solidFill>
                 <a:latin typeface="Courier New" pitchFamily="34" charset="0"/>
                 <a:ea typeface="Courier New" pitchFamily="34" charset="-122"/>
                 <a:cs typeface="Courier New" pitchFamily="34" charset="-120"/>
               </a:rPr>
-              <a:t>    if (mbToTest % 2) mbToTest++;              // 2MiB 단위로 반올림</a:t>
-            </a:r>
-            <a:endParaRPr lang="en-US" sz="1300" dirty="0"/>
-          </a:p>
-          <a:p>
-            <a:pPr algn="l" indent="0" marL="0">
-              <a:lnSpc>
-                <a:spcPct val="110000"/>
-              </a:lnSpc>
-              <a:buNone/>
-            </a:pPr>
-            <a:r>
-              <a:rPr lang="en-US" sz="1300" dirty="0">
-                <a:solidFill>
-                  <a:srgbClr val="E7EDF5"/>
+              <a:t>스레드 전용</a:t>
+            </a:r>
+            <a:endParaRPr lang="en-US" sz="1050" dirty="0"/>
+          </a:p>
+        </p:txBody>
+      </p:sp>
+      <p:sp>
+        <p:nvSpPr>
+          <p:cNvPr id="18" name="Shape 16"/>
+          <p:cNvSpPr/>
+          <p:nvPr/>
+        </p:nvSpPr>
+        <p:spPr>
+          <a:xfrm>
+            <a:off x="2697480" y="4178808"/>
+            <a:ext cx="1417320" cy="868680"/>
+          </a:xfrm>
+          <a:prstGeom prst="roundRect">
+            <a:avLst>
+              <a:gd name="adj" fmla="val 5263"/>
+            </a:avLst>
+          </a:prstGeom>
+          <a:solidFill>
+            <a:srgbClr val="0B1119"/>
+          </a:solidFill>
+          <a:ln w="19050">
+            <a:solidFill>
+              <a:srgbClr val="9FB0C4"/>
+            </a:solidFill>
+            <a:prstDash val="solid"/>
+          </a:ln>
+        </p:spPr>
+      </p:sp>
+      <p:sp>
+        <p:nvSpPr>
+          <p:cNvPr id="19" name="Text 17"/>
+          <p:cNvSpPr/>
+          <p:nvPr/>
+        </p:nvSpPr>
+        <p:spPr>
+          <a:xfrm>
+            <a:off x="2807208" y="4270248"/>
+            <a:ext cx="1197864" cy="365760"/>
+          </a:xfrm>
+          <a:prstGeom prst="rect">
+            <a:avLst/>
+          </a:prstGeom>
+          <a:noFill/>
+          <a:ln/>
+        </p:spPr>
+        <p:txBody>
+          <a:bodyPr wrap="square" lIns="0" tIns="0" rIns="0" bIns="0" rtlCol="0" anchor="t"/>
+          <a:lstStyle/>
+          <a:p>
+            <a:pPr algn="ctr" indent="0" marL="0">
+              <a:buNone/>
+            </a:pPr>
+            <a:r>
+              <a:rPr lang="en-US" sz="1400" b="1" dirty="0">
+                <a:solidFill>
+                  <a:srgbClr val="9FB0C4"/>
+                </a:solidFill>
+                <a:latin typeface="Malgun Gothic" pitchFamily="34" charset="0"/>
+                <a:ea typeface="Malgun Gothic" pitchFamily="34" charset="-122"/>
+                <a:cs typeface="Malgun Gothic" pitchFamily="34" charset="-120"/>
+              </a:rPr>
+              <a:t>레지스터</a:t>
+            </a:r>
+            <a:endParaRPr lang="en-US" sz="1400" dirty="0"/>
+          </a:p>
+        </p:txBody>
+      </p:sp>
+      <p:sp>
+        <p:nvSpPr>
+          <p:cNvPr id="20" name="Text 18"/>
+          <p:cNvSpPr/>
+          <p:nvPr/>
+        </p:nvSpPr>
+        <p:spPr>
+          <a:xfrm>
+            <a:off x="2807208" y="4590288"/>
+            <a:ext cx="1197864" cy="384048"/>
+          </a:xfrm>
+          <a:prstGeom prst="rect">
+            <a:avLst/>
+          </a:prstGeom>
+          <a:noFill/>
+          <a:ln/>
+        </p:spPr>
+        <p:txBody>
+          <a:bodyPr wrap="square" lIns="0" tIns="0" rIns="0" bIns="0" rtlCol="0" anchor="ctr"/>
+          <a:lstStyle/>
+          <a:p>
+            <a:pPr algn="ctr" indent="0" marL="0">
+              <a:buNone/>
+            </a:pPr>
+            <a:r>
+              <a:rPr lang="en-US" sz="1050" dirty="0">
+                <a:solidFill>
+                  <a:srgbClr val="9FB0C4"/>
                 </a:solidFill>
                 <a:latin typeface="Courier New" pitchFamily="34" charset="0"/>
                 <a:ea typeface="Courier New" pitchFamily="34" charset="-122"/>
                 <a:cs typeface="Courier New" pitchFamily="34" charset="-120"/>
               </a:rPr>
-              <a:t>    megsToTest = mbToTest;  loopIters = megsToTest/2;   // N = MB/2</a:t>
-            </a:r>
-            <a:endParaRPr lang="en-US" sz="1300" dirty="0"/>
-          </a:p>
-          <a:p>
-            <a:pPr algn="l" indent="0" marL="0">
-              <a:lnSpc>
-                <a:spcPct val="110000"/>
-              </a:lnSpc>
-              <a:buNone/>
-            </a:pPr>
-            <a:r>
-              <a:rPr lang="en-US" sz="1300" dirty="0">
+              <a:t>스레드 전용</a:t>
+            </a:r>
+            <a:endParaRPr lang="en-US" sz="1050" dirty="0"/>
+          </a:p>
+        </p:txBody>
+      </p:sp>
+      <p:sp>
+        <p:nvSpPr>
+          <p:cNvPr id="21" name="Shape 19"/>
+          <p:cNvSpPr/>
+          <p:nvPr/>
+        </p:nvSpPr>
+        <p:spPr>
+          <a:xfrm>
+            <a:off x="4480560" y="2560320"/>
+            <a:ext cx="3429000" cy="2926080"/>
+          </a:xfrm>
+          <a:prstGeom prst="roundRect">
+            <a:avLst>
+              <a:gd name="adj" fmla="val 2500"/>
+            </a:avLst>
+          </a:prstGeom>
+          <a:solidFill>
+            <a:srgbClr val="12212A"/>
+          </a:solidFill>
+          <a:ln w="19050">
+            <a:solidFill>
+              <a:srgbClr val="3FB8C4"/>
+            </a:solidFill>
+            <a:prstDash val="solid"/>
+          </a:ln>
+        </p:spPr>
+      </p:sp>
+      <p:sp>
+        <p:nvSpPr>
+          <p:cNvPr id="22" name="Text 20"/>
+          <p:cNvSpPr/>
+          <p:nvPr/>
+        </p:nvSpPr>
+        <p:spPr>
+          <a:xfrm>
+            <a:off x="4663440" y="2670048"/>
+            <a:ext cx="3063240" cy="320040"/>
+          </a:xfrm>
+          <a:prstGeom prst="rect">
+            <a:avLst/>
+          </a:prstGeom>
+          <a:noFill/>
+          <a:ln/>
+        </p:spPr>
+        <p:txBody>
+          <a:bodyPr wrap="square" lIns="0" tIns="0" rIns="0" bIns="0" rtlCol="0" anchor="ctr"/>
+          <a:lstStyle/>
+          <a:p>
+            <a:pPr indent="0" marL="0">
+              <a:buNone/>
+            </a:pPr>
+            <a:r>
+              <a:rPr lang="en-US" sz="1250" b="1" dirty="0">
                 <a:solidFill>
                   <a:srgbClr val="3FB8C4"/>
+                </a:solidFill>
+                <a:latin typeface="Malgun Gothic" pitchFamily="34" charset="0"/>
+                <a:ea typeface="Malgun Gothic" pitchFamily="34" charset="-122"/>
+                <a:cs typeface="Malgun Gothic" pitchFamily="34" charset="-120"/>
+              </a:rPr>
+              <a:t>공유 메모리 (shared) · 블록 1 전용</a:t>
+            </a:r>
+            <a:endParaRPr lang="en-US" sz="1250" dirty="0"/>
+          </a:p>
+        </p:txBody>
+      </p:sp>
+      <p:sp>
+        <p:nvSpPr>
+          <p:cNvPr id="23" name="Shape 21"/>
+          <p:cNvSpPr/>
+          <p:nvPr/>
+        </p:nvSpPr>
+        <p:spPr>
+          <a:xfrm>
+            <a:off x="4709160" y="3127248"/>
+            <a:ext cx="1417320" cy="868680"/>
+          </a:xfrm>
+          <a:prstGeom prst="roundRect">
+            <a:avLst>
+              <a:gd name="adj" fmla="val 5263"/>
+            </a:avLst>
+          </a:prstGeom>
+          <a:solidFill>
+            <a:srgbClr val="0B1119"/>
+          </a:solidFill>
+          <a:ln w="19050">
+            <a:solidFill>
+              <a:srgbClr val="9FB0C4"/>
+            </a:solidFill>
+            <a:prstDash val="solid"/>
+          </a:ln>
+        </p:spPr>
+      </p:sp>
+      <p:sp>
+        <p:nvSpPr>
+          <p:cNvPr id="24" name="Text 22"/>
+          <p:cNvSpPr/>
+          <p:nvPr/>
+        </p:nvSpPr>
+        <p:spPr>
+          <a:xfrm>
+            <a:off x="4818888" y="3218688"/>
+            <a:ext cx="1197864" cy="365760"/>
+          </a:xfrm>
+          <a:prstGeom prst="rect">
+            <a:avLst/>
+          </a:prstGeom>
+          <a:noFill/>
+          <a:ln/>
+        </p:spPr>
+        <p:txBody>
+          <a:bodyPr wrap="square" lIns="0" tIns="0" rIns="0" bIns="0" rtlCol="0" anchor="t"/>
+          <a:lstStyle/>
+          <a:p>
+            <a:pPr algn="ctr" indent="0" marL="0">
+              <a:buNone/>
+            </a:pPr>
+            <a:r>
+              <a:rPr lang="en-US" sz="1400" b="1" dirty="0">
+                <a:solidFill>
+                  <a:srgbClr val="9FB0C4"/>
+                </a:solidFill>
+                <a:latin typeface="Malgun Gothic" pitchFamily="34" charset="0"/>
+                <a:ea typeface="Malgun Gothic" pitchFamily="34" charset="-122"/>
+                <a:cs typeface="Malgun Gothic" pitchFamily="34" charset="-120"/>
+              </a:rPr>
+              <a:t>레지스터</a:t>
+            </a:r>
+            <a:endParaRPr lang="en-US" sz="1400" dirty="0"/>
+          </a:p>
+        </p:txBody>
+      </p:sp>
+      <p:sp>
+        <p:nvSpPr>
+          <p:cNvPr id="25" name="Text 23"/>
+          <p:cNvSpPr/>
+          <p:nvPr/>
+        </p:nvSpPr>
+        <p:spPr>
+          <a:xfrm>
+            <a:off x="4818888" y="3538728"/>
+            <a:ext cx="1197864" cy="384048"/>
+          </a:xfrm>
+          <a:prstGeom prst="rect">
+            <a:avLst/>
+          </a:prstGeom>
+          <a:noFill/>
+          <a:ln/>
+        </p:spPr>
+        <p:txBody>
+          <a:bodyPr wrap="square" lIns="0" tIns="0" rIns="0" bIns="0" rtlCol="0" anchor="ctr"/>
+          <a:lstStyle/>
+          <a:p>
+            <a:pPr algn="ctr" indent="0" marL="0">
+              <a:buNone/>
+            </a:pPr>
+            <a:r>
+              <a:rPr lang="en-US" sz="1050" dirty="0">
+                <a:solidFill>
+                  <a:srgbClr val="9FB0C4"/>
                 </a:solidFill>
                 <a:latin typeface="Courier New" pitchFamily="34" charset="0"/>
                 <a:ea typeface="Courier New" pitchFamily="34" charset="-122"/>
                 <a:cs typeface="Courier New" pitchFamily="34" charset="-120"/>
               </a:rPr>
-              <a:t>    cudaMalloc(&amp;devTestMem, (size_t)megsToTest*1048576);  // 테스트 영역</a:t>
-            </a:r>
-            <a:endParaRPr lang="en-US" sz="1300" dirty="0"/>
-          </a:p>
-          <a:p>
-            <a:pPr algn="l" indent="0" marL="0">
-              <a:lnSpc>
-                <a:spcPct val="110000"/>
-              </a:lnSpc>
-              <a:buNone/>
-            </a:pPr>
-            <a:r>
-              <a:rPr lang="en-US" sz="1300" dirty="0">
-                <a:solidFill>
-                  <a:srgbClr val="3FB8C4"/>
+              <a:t>스레드 전용</a:t>
+            </a:r>
+            <a:endParaRPr lang="en-US" sz="1050" dirty="0"/>
+          </a:p>
+        </p:txBody>
+      </p:sp>
+      <p:sp>
+        <p:nvSpPr>
+          <p:cNvPr id="26" name="Shape 24"/>
+          <p:cNvSpPr/>
+          <p:nvPr/>
+        </p:nvSpPr>
+        <p:spPr>
+          <a:xfrm>
+            <a:off x="6309360" y="3127248"/>
+            <a:ext cx="1417320" cy="868680"/>
+          </a:xfrm>
+          <a:prstGeom prst="roundRect">
+            <a:avLst>
+              <a:gd name="adj" fmla="val 5263"/>
+            </a:avLst>
+          </a:prstGeom>
+          <a:solidFill>
+            <a:srgbClr val="0B1119"/>
+          </a:solidFill>
+          <a:ln w="19050">
+            <a:solidFill>
+              <a:srgbClr val="9FB0C4"/>
+            </a:solidFill>
+            <a:prstDash val="solid"/>
+          </a:ln>
+        </p:spPr>
+      </p:sp>
+      <p:sp>
+        <p:nvSpPr>
+          <p:cNvPr id="27" name="Text 25"/>
+          <p:cNvSpPr/>
+          <p:nvPr/>
+        </p:nvSpPr>
+        <p:spPr>
+          <a:xfrm>
+            <a:off x="6419088" y="3218688"/>
+            <a:ext cx="1197864" cy="365760"/>
+          </a:xfrm>
+          <a:prstGeom prst="rect">
+            <a:avLst/>
+          </a:prstGeom>
+          <a:noFill/>
+          <a:ln/>
+        </p:spPr>
+        <p:txBody>
+          <a:bodyPr wrap="square" lIns="0" tIns="0" rIns="0" bIns="0" rtlCol="0" anchor="t"/>
+          <a:lstStyle/>
+          <a:p>
+            <a:pPr algn="ctr" indent="0" marL="0">
+              <a:buNone/>
+            </a:pPr>
+            <a:r>
+              <a:rPr lang="en-US" sz="1400" b="1" dirty="0">
+                <a:solidFill>
+                  <a:srgbClr val="9FB0C4"/>
+                </a:solidFill>
+                <a:latin typeface="Malgun Gothic" pitchFamily="34" charset="0"/>
+                <a:ea typeface="Malgun Gothic" pitchFamily="34" charset="-122"/>
+                <a:cs typeface="Malgun Gothic" pitchFamily="34" charset="-120"/>
+              </a:rPr>
+              <a:t>레지스터</a:t>
+            </a:r>
+            <a:endParaRPr lang="en-US" sz="1400" dirty="0"/>
+          </a:p>
+        </p:txBody>
+      </p:sp>
+      <p:sp>
+        <p:nvSpPr>
+          <p:cNvPr id="28" name="Text 26"/>
+          <p:cNvSpPr/>
+          <p:nvPr/>
+        </p:nvSpPr>
+        <p:spPr>
+          <a:xfrm>
+            <a:off x="6419088" y="3538728"/>
+            <a:ext cx="1197864" cy="384048"/>
+          </a:xfrm>
+          <a:prstGeom prst="rect">
+            <a:avLst/>
+          </a:prstGeom>
+          <a:noFill/>
+          <a:ln/>
+        </p:spPr>
+        <p:txBody>
+          <a:bodyPr wrap="square" lIns="0" tIns="0" rIns="0" bIns="0" rtlCol="0" anchor="ctr"/>
+          <a:lstStyle/>
+          <a:p>
+            <a:pPr algn="ctr" indent="0" marL="0">
+              <a:buNone/>
+            </a:pPr>
+            <a:r>
+              <a:rPr lang="en-US" sz="1050" dirty="0">
+                <a:solidFill>
+                  <a:srgbClr val="9FB0C4"/>
                 </a:solidFill>
                 <a:latin typeface="Courier New" pitchFamily="34" charset="0"/>
                 <a:ea typeface="Courier New" pitchFamily="34" charset="-122"/>
                 <a:cs typeface="Courier New" pitchFamily="34" charset="-120"/>
               </a:rPr>
-              <a:t>    cudaMalloc(&amp;devTempMem, sizeof(uint)*nBlocks);        // 블록별 오류 수</a:t>
-            </a:r>
-            <a:endParaRPr lang="en-US" sz="1300" dirty="0"/>
-          </a:p>
-          <a:p>
-            <a:pPr algn="l" indent="0" marL="0">
-              <a:lnSpc>
-                <a:spcPct val="110000"/>
-              </a:lnSpc>
-              <a:buNone/>
-            </a:pPr>
-            <a:r>
-              <a:rPr lang="en-US" sz="1300" dirty="0">
-                <a:solidFill>
-                  <a:srgbClr val="E7EDF5"/>
+              <a:t>스레드 전용</a:t>
+            </a:r>
+            <a:endParaRPr lang="en-US" sz="1050" dirty="0"/>
+          </a:p>
+        </p:txBody>
+      </p:sp>
+      <p:sp>
+        <p:nvSpPr>
+          <p:cNvPr id="29" name="Shape 27"/>
+          <p:cNvSpPr/>
+          <p:nvPr/>
+        </p:nvSpPr>
+        <p:spPr>
+          <a:xfrm>
+            <a:off x="4709160" y="4178808"/>
+            <a:ext cx="1417320" cy="868680"/>
+          </a:xfrm>
+          <a:prstGeom prst="roundRect">
+            <a:avLst>
+              <a:gd name="adj" fmla="val 5263"/>
+            </a:avLst>
+          </a:prstGeom>
+          <a:solidFill>
+            <a:srgbClr val="0B1119"/>
+          </a:solidFill>
+          <a:ln w="19050">
+            <a:solidFill>
+              <a:srgbClr val="9FB0C4"/>
+            </a:solidFill>
+            <a:prstDash val="solid"/>
+          </a:ln>
+        </p:spPr>
+      </p:sp>
+      <p:sp>
+        <p:nvSpPr>
+          <p:cNvPr id="30" name="Text 28"/>
+          <p:cNvSpPr/>
+          <p:nvPr/>
+        </p:nvSpPr>
+        <p:spPr>
+          <a:xfrm>
+            <a:off x="4818888" y="4270248"/>
+            <a:ext cx="1197864" cy="365760"/>
+          </a:xfrm>
+          <a:prstGeom prst="rect">
+            <a:avLst/>
+          </a:prstGeom>
+          <a:noFill/>
+          <a:ln/>
+        </p:spPr>
+        <p:txBody>
+          <a:bodyPr wrap="square" lIns="0" tIns="0" rIns="0" bIns="0" rtlCol="0" anchor="t"/>
+          <a:lstStyle/>
+          <a:p>
+            <a:pPr algn="ctr" indent="0" marL="0">
+              <a:buNone/>
+            </a:pPr>
+            <a:r>
+              <a:rPr lang="en-US" sz="1400" b="1" dirty="0">
+                <a:solidFill>
+                  <a:srgbClr val="9FB0C4"/>
+                </a:solidFill>
+                <a:latin typeface="Malgun Gothic" pitchFamily="34" charset="0"/>
+                <a:ea typeface="Malgun Gothic" pitchFamily="34" charset="-122"/>
+                <a:cs typeface="Malgun Gothic" pitchFamily="34" charset="-120"/>
+              </a:rPr>
+              <a:t>레지스터</a:t>
+            </a:r>
+            <a:endParaRPr lang="en-US" sz="1400" dirty="0"/>
+          </a:p>
+        </p:txBody>
+      </p:sp>
+      <p:sp>
+        <p:nvSpPr>
+          <p:cNvPr id="31" name="Text 29"/>
+          <p:cNvSpPr/>
+          <p:nvPr/>
+        </p:nvSpPr>
+        <p:spPr>
+          <a:xfrm>
+            <a:off x="4818888" y="4590288"/>
+            <a:ext cx="1197864" cy="384048"/>
+          </a:xfrm>
+          <a:prstGeom prst="rect">
+            <a:avLst/>
+          </a:prstGeom>
+          <a:noFill/>
+          <a:ln/>
+        </p:spPr>
+        <p:txBody>
+          <a:bodyPr wrap="square" lIns="0" tIns="0" rIns="0" bIns="0" rtlCol="0" anchor="ctr"/>
+          <a:lstStyle/>
+          <a:p>
+            <a:pPr algn="ctr" indent="0" marL="0">
+              <a:buNone/>
+            </a:pPr>
+            <a:r>
+              <a:rPr lang="en-US" sz="1050" dirty="0">
+                <a:solidFill>
+                  <a:srgbClr val="9FB0C4"/>
                 </a:solidFill>
                 <a:latin typeface="Courier New" pitchFamily="34" charset="0"/>
                 <a:ea typeface="Courier New" pitchFamily="34" charset="-122"/>
                 <a:cs typeface="Courier New" pitchFamily="34" charset="-120"/>
               </a:rPr>
-              <a:t>    hostTempMem = (uint*)malloc(sizeof(uint)*nBlocks);    // 호스트 사본</a:t>
-            </a:r>
-            <a:endParaRPr lang="en-US" sz="1300" dirty="0"/>
-          </a:p>
-          <a:p>
-            <a:pPr algn="l" indent="0" marL="0">
-              <a:lnSpc>
-                <a:spcPct val="110000"/>
-              </a:lnSpc>
-              <a:buNone/>
-            </a:pPr>
-            <a:r>
-              <a:rPr lang="en-US" sz="1300" dirty="0">
-                <a:solidFill>
-                  <a:srgbClr val="E7EDF5"/>
+              <a:t>스레드 전용</a:t>
+            </a:r>
+            <a:endParaRPr lang="en-US" sz="1050" dirty="0"/>
+          </a:p>
+        </p:txBody>
+      </p:sp>
+      <p:sp>
+        <p:nvSpPr>
+          <p:cNvPr id="32" name="Shape 30"/>
+          <p:cNvSpPr/>
+          <p:nvPr/>
+        </p:nvSpPr>
+        <p:spPr>
+          <a:xfrm>
+            <a:off x="6309360" y="4178808"/>
+            <a:ext cx="1417320" cy="868680"/>
+          </a:xfrm>
+          <a:prstGeom prst="roundRect">
+            <a:avLst>
+              <a:gd name="adj" fmla="val 5263"/>
+            </a:avLst>
+          </a:prstGeom>
+          <a:solidFill>
+            <a:srgbClr val="0B1119"/>
+          </a:solidFill>
+          <a:ln w="19050">
+            <a:solidFill>
+              <a:srgbClr val="9FB0C4"/>
+            </a:solidFill>
+            <a:prstDash val="solid"/>
+          </a:ln>
+        </p:spPr>
+      </p:sp>
+      <p:sp>
+        <p:nvSpPr>
+          <p:cNvPr id="33" name="Text 31"/>
+          <p:cNvSpPr/>
+          <p:nvPr/>
+        </p:nvSpPr>
+        <p:spPr>
+          <a:xfrm>
+            <a:off x="6419088" y="4270248"/>
+            <a:ext cx="1197864" cy="365760"/>
+          </a:xfrm>
+          <a:prstGeom prst="rect">
+            <a:avLst/>
+          </a:prstGeom>
+          <a:noFill/>
+          <a:ln/>
+        </p:spPr>
+        <p:txBody>
+          <a:bodyPr wrap="square" lIns="0" tIns="0" rIns="0" bIns="0" rtlCol="0" anchor="t"/>
+          <a:lstStyle/>
+          <a:p>
+            <a:pPr algn="ctr" indent="0" marL="0">
+              <a:buNone/>
+            </a:pPr>
+            <a:r>
+              <a:rPr lang="en-US" sz="1400" b="1" dirty="0">
+                <a:solidFill>
+                  <a:srgbClr val="9FB0C4"/>
+                </a:solidFill>
+                <a:latin typeface="Malgun Gothic" pitchFamily="34" charset="0"/>
+                <a:ea typeface="Malgun Gothic" pitchFamily="34" charset="-122"/>
+                <a:cs typeface="Malgun Gothic" pitchFamily="34" charset="-120"/>
+              </a:rPr>
+              <a:t>레지스터</a:t>
+            </a:r>
+            <a:endParaRPr lang="en-US" sz="1400" dirty="0"/>
+          </a:p>
+        </p:txBody>
+      </p:sp>
+      <p:sp>
+        <p:nvSpPr>
+          <p:cNvPr id="34" name="Text 32"/>
+          <p:cNvSpPr/>
+          <p:nvPr/>
+        </p:nvSpPr>
+        <p:spPr>
+          <a:xfrm>
+            <a:off x="6419088" y="4590288"/>
+            <a:ext cx="1197864" cy="384048"/>
+          </a:xfrm>
+          <a:prstGeom prst="rect">
+            <a:avLst/>
+          </a:prstGeom>
+          <a:noFill/>
+          <a:ln/>
+        </p:spPr>
+        <p:txBody>
+          <a:bodyPr wrap="square" lIns="0" tIns="0" rIns="0" bIns="0" rtlCol="0" anchor="ctr"/>
+          <a:lstStyle/>
+          <a:p>
+            <a:pPr algn="ctr" indent="0" marL="0">
+              <a:buNone/>
+            </a:pPr>
+            <a:r>
+              <a:rPr lang="en-US" sz="1050" dirty="0">
+                <a:solidFill>
+                  <a:srgbClr val="9FB0C4"/>
                 </a:solidFill>
                 <a:latin typeface="Courier New" pitchFamily="34" charset="0"/>
                 <a:ea typeface="Courier New" pitchFamily="34" charset="-122"/>
                 <a:cs typeface="Courier New" pitchFamily="34" charset="-120"/>
               </a:rPr>
-              <a:t>}</a:t>
-            </a:r>
-            <a:endParaRPr lang="en-US" sz="1300" dirty="0"/>
-          </a:p>
-        </p:txBody>
-      </p:sp>
-      <p:sp>
-        <p:nvSpPr>
-          <p:cNvPr id="6" name="Text 4"/>
-          <p:cNvSpPr/>
-          <p:nvPr/>
-        </p:nvSpPr>
-        <p:spPr>
-          <a:xfrm>
-            <a:off x="548640" y="4114800"/>
-            <a:ext cx="2468880" cy="502920"/>
+              <a:t>스레드 전용</a:t>
+            </a:r>
+            <a:endParaRPr lang="en-US" sz="1050" dirty="0"/>
+          </a:p>
+        </p:txBody>
+      </p:sp>
+      <p:sp>
+        <p:nvSpPr>
+          <p:cNvPr id="35" name="Shape 33"/>
+          <p:cNvSpPr/>
+          <p:nvPr/>
+        </p:nvSpPr>
+        <p:spPr>
+          <a:xfrm>
+            <a:off x="7680960" y="1920240"/>
+            <a:ext cx="3931920" cy="3794760"/>
+          </a:xfrm>
+          <a:prstGeom prst="roundRect">
+            <a:avLst>
+              <a:gd name="adj" fmla="val 1928"/>
+            </a:avLst>
+          </a:prstGeom>
+          <a:solidFill>
+            <a:srgbClr val="18212E"/>
+          </a:solidFill>
+          <a:ln/>
+        </p:spPr>
+      </p:sp>
+      <p:sp>
+        <p:nvSpPr>
+          <p:cNvPr id="36" name="Text 34"/>
+          <p:cNvSpPr/>
+          <p:nvPr/>
+        </p:nvSpPr>
+        <p:spPr>
+          <a:xfrm>
+            <a:off x="7909560" y="2057400"/>
+            <a:ext cx="3474720" cy="365760"/>
+          </a:xfrm>
+          <a:prstGeom prst="rect">
+            <a:avLst/>
+          </a:prstGeom>
+          <a:noFill/>
+          <a:ln/>
+        </p:spPr>
+        <p:txBody>
+          <a:bodyPr wrap="square" lIns="0" tIns="0" rIns="0" bIns="0" rtlCol="0" anchor="ctr"/>
+          <a:lstStyle/>
+          <a:p>
+            <a:pPr indent="0" marL="0">
+              <a:buNone/>
+            </a:pPr>
+            <a:r>
+              <a:rPr lang="en-US" sz="1400" b="1" dirty="0">
+                <a:solidFill>
+                  <a:srgbClr val="E7EDF5"/>
+                </a:solidFill>
+                <a:latin typeface="Malgun Gothic" pitchFamily="34" charset="0"/>
+                <a:ea typeface="Malgun Gothic" pitchFamily="34" charset="-122"/>
+                <a:cs typeface="Malgun Gothic" pitchFamily="34" charset="-120"/>
+              </a:rPr>
+              <a:t>빠르기 / 크기</a:t>
+            </a:r>
+            <a:endParaRPr lang="en-US" sz="1400" dirty="0"/>
+          </a:p>
+        </p:txBody>
+      </p:sp>
+      <p:sp>
+        <p:nvSpPr>
+          <p:cNvPr id="37" name="Shape 35"/>
+          <p:cNvSpPr/>
+          <p:nvPr/>
+        </p:nvSpPr>
+        <p:spPr>
+          <a:xfrm>
+            <a:off x="7909560" y="2560320"/>
+            <a:ext cx="3474720" cy="868680"/>
+          </a:xfrm>
+          <a:prstGeom prst="roundRect">
+            <a:avLst>
+              <a:gd name="adj" fmla="val 5263"/>
+            </a:avLst>
+          </a:prstGeom>
+          <a:solidFill>
+            <a:srgbClr val="0B1119"/>
+          </a:solidFill>
+          <a:ln w="19050">
+            <a:solidFill>
+              <a:srgbClr val="9FB0C4"/>
+            </a:solidFill>
+            <a:prstDash val="solid"/>
+          </a:ln>
+        </p:spPr>
+      </p:sp>
+      <p:sp>
+        <p:nvSpPr>
+          <p:cNvPr id="38" name="Text 36"/>
+          <p:cNvSpPr/>
+          <p:nvPr/>
+        </p:nvSpPr>
+        <p:spPr>
+          <a:xfrm>
+            <a:off x="8019288" y="2651760"/>
+            <a:ext cx="3255264" cy="365760"/>
           </a:xfrm>
           <a:prstGeom prst="rect">
             <a:avLst/>
@@ -3590,19 +5736,124 @@
           <a:bodyPr wrap="square" lIns="0" tIns="0" rIns="0" bIns="0" rtlCol="0" anchor="t"/>
           <a:lstStyle/>
           <a:p>
-            <a:pPr indent="0" marL="0">
+            <a:pPr algn="ctr" indent="0" marL="0">
               <a:buNone/>
             </a:pPr>
             <a:r>
               <a:rPr lang="en-US" sz="1400" b="1" dirty="0">
                 <a:solidFill>
-                  <a:srgbClr val="E8A33D"/>
+                  <a:srgbClr val="9FB0C4"/>
+                </a:solidFill>
+                <a:latin typeface="Malgun Gothic" pitchFamily="34" charset="0"/>
+                <a:ea typeface="Malgun Gothic" pitchFamily="34" charset="-122"/>
+                <a:cs typeface="Malgun Gothic" pitchFamily="34" charset="-120"/>
+              </a:rPr>
+              <a:t>레지스터</a:t>
+            </a:r>
+            <a:endParaRPr lang="en-US" sz="1400" dirty="0"/>
+          </a:p>
+        </p:txBody>
+      </p:sp>
+      <p:sp>
+        <p:nvSpPr>
+          <p:cNvPr id="39" name="Text 37"/>
+          <p:cNvSpPr/>
+          <p:nvPr/>
+        </p:nvSpPr>
+        <p:spPr>
+          <a:xfrm>
+            <a:off x="8019288" y="2971800"/>
+            <a:ext cx="3255264" cy="384048"/>
+          </a:xfrm>
+          <a:prstGeom prst="rect">
+            <a:avLst/>
+          </a:prstGeom>
+          <a:noFill/>
+          <a:ln/>
+        </p:spPr>
+        <p:txBody>
+          <a:bodyPr wrap="square" lIns="0" tIns="0" rIns="0" bIns="0" rtlCol="0" anchor="ctr"/>
+          <a:lstStyle/>
+          <a:p>
+            <a:pPr algn="ctr" indent="0" marL="0">
+              <a:buNone/>
+            </a:pPr>
+            <a:r>
+              <a:rPr lang="en-US" sz="1050" dirty="0">
+                <a:solidFill>
+                  <a:srgbClr val="9FB0C4"/>
                 </a:solidFill>
                 <a:latin typeface="Courier New" pitchFamily="34" charset="0"/>
                 <a:ea typeface="Courier New" pitchFamily="34" charset="-122"/>
                 <a:cs typeface="Courier New" pitchFamily="34" charset="-120"/>
               </a:rPr>
-              <a:t>devTestMem</a:t>
+              <a:t>가장 빠름 · 가장 작음</a:t>
+            </a:r>
+            <a:endParaRPr lang="en-US" sz="1050" dirty="0"/>
+          </a:p>
+        </p:txBody>
+      </p:sp>
+      <p:sp>
+        <p:nvSpPr>
+          <p:cNvPr id="40" name="Shape 38"/>
+          <p:cNvSpPr/>
+          <p:nvPr/>
+        </p:nvSpPr>
+        <p:spPr>
+          <a:xfrm>
+            <a:off x="7909560" y="3566160"/>
+            <a:ext cx="3474720" cy="868680"/>
+          </a:xfrm>
+          <a:prstGeom prst="roundRect">
+            <a:avLst>
+              <a:gd name="adj" fmla="val 5263"/>
+            </a:avLst>
+          </a:prstGeom>
+          <a:solidFill>
+            <a:srgbClr val="0B1119"/>
+          </a:solidFill>
+          <a:ln w="19050">
+            <a:solidFill>
+              <a:srgbClr val="3FB8C4"/>
+            </a:solidFill>
+            <a:prstDash val="solid"/>
+          </a:ln>
+        </p:spPr>
+      </p:sp>
+      <p:sp>
+        <p:nvSpPr>
+          <p:cNvPr id="41" name="Text 39"/>
+          <p:cNvSpPr/>
+          <p:nvPr/>
+        </p:nvSpPr>
+        <p:spPr>
+          <a:xfrm>
+            <a:off x="8019288" y="3657600"/>
+            <a:ext cx="3255264" cy="365760"/>
+          </a:xfrm>
+          <a:prstGeom prst="rect">
+            <a:avLst/>
+          </a:prstGeom>
+          <a:noFill/>
+          <a:ln/>
+        </p:spPr>
+        <p:txBody>
+          <a:bodyPr wrap="square" lIns="0" tIns="0" rIns="0" bIns="0" rtlCol="0" anchor="t"/>
+          <a:lstStyle/>
+          <a:p>
+            <a:pPr algn="ctr" indent="0" marL="0">
+              <a:buNone/>
+            </a:pPr>
+            <a:r>
+              <a:rPr lang="en-US" sz="1400" b="1" dirty="0">
+                <a:solidFill>
+                  <a:srgbClr val="3FB8C4"/>
+                </a:solidFill>
+                <a:latin typeface="Malgun Gothic" pitchFamily="34" charset="0"/>
+                <a:ea typeface="Malgun Gothic" pitchFamily="34" charset="-122"/>
+                <a:cs typeface="Malgun Gothic" pitchFamily="34" charset="-120"/>
+              </a:rPr>
+              <a:t>공유 메모리</a:t>
             </a:r>
             <a:endParaRPr lang="en-US" sz="1400" dirty="0"/>
           </a:p>
@@ -3610,77 +5861,104 @@
       </p:sp>
       <p:sp>
         <p:nvSpPr>
-          <p:cNvPr id="7" name="Text 5"/>
-          <p:cNvSpPr/>
-          <p:nvPr/>
-        </p:nvSpPr>
-        <p:spPr>
-          <a:xfrm>
-            <a:off x="3200400" y="4114800"/>
-            <a:ext cx="8412480" cy="502920"/>
-          </a:xfrm>
-          <a:prstGeom prst="rect">
-            <a:avLst/>
-          </a:prstGeom>
-          <a:noFill/>
-          <a:ln/>
-        </p:spPr>
-        <p:txBody>
-          <a:bodyPr wrap="square" lIns="0" tIns="0" rIns="0" bIns="0" rtlCol="0" anchor="t"/>
-          <a:lstStyle/>
-          <a:p>
-            <a:pPr indent="0" marL="0">
-              <a:buNone/>
-            </a:pPr>
-            <a:r>
-              <a:rPr lang="en-US" sz="1500" dirty="0">
-                <a:solidFill>
-                  <a:srgbClr val="E7EDF5"/>
-                </a:solidFill>
-                <a:latin typeface="Malgun Gothic" pitchFamily="34" charset="0"/>
-                <a:ea typeface="Malgun Gothic" pitchFamily="34" charset="-122"/>
-                <a:cs typeface="Malgun Gothic" pitchFamily="34" charset="-120"/>
-              </a:rPr>
-              <a:t>실제로 검사할 전역 메모리 (수백 MB~GB)</a:t>
-            </a:r>
-            <a:endParaRPr lang="en-US" sz="1500" dirty="0"/>
-          </a:p>
-        </p:txBody>
-      </p:sp>
-      <p:sp>
-        <p:nvSpPr>
-          <p:cNvPr id="8" name="Text 6"/>
-          <p:cNvSpPr/>
-          <p:nvPr/>
-        </p:nvSpPr>
-        <p:spPr>
-          <a:xfrm>
-            <a:off x="548640" y="4681728"/>
-            <a:ext cx="2468880" cy="502920"/>
-          </a:xfrm>
-          <a:prstGeom prst="rect">
-            <a:avLst/>
-          </a:prstGeom>
-          <a:noFill/>
-          <a:ln/>
-        </p:spPr>
-        <p:txBody>
-          <a:bodyPr wrap="square" lIns="0" tIns="0" rIns="0" bIns="0" rtlCol="0" anchor="t"/>
-          <a:lstStyle/>
-          <a:p>
-            <a:pPr indent="0" marL="0">
-              <a:buNone/>
-            </a:pPr>
-            <a:r>
-              <a:rPr lang="en-US" sz="1400" b="1" dirty="0">
-                <a:solidFill>
-                  <a:srgbClr val="3FB8C4"/>
+          <p:cNvPr id="42" name="Text 40"/>
+          <p:cNvSpPr/>
+          <p:nvPr/>
+        </p:nvSpPr>
+        <p:spPr>
+          <a:xfrm>
+            <a:off x="8019288" y="3977640"/>
+            <a:ext cx="3255264" cy="384048"/>
+          </a:xfrm>
+          <a:prstGeom prst="rect">
+            <a:avLst/>
+          </a:prstGeom>
+          <a:noFill/>
+          <a:ln/>
+        </p:spPr>
+        <p:txBody>
+          <a:bodyPr wrap="square" lIns="0" tIns="0" rIns="0" bIns="0" rtlCol="0" anchor="ctr"/>
+          <a:lstStyle/>
+          <a:p>
+            <a:pPr algn="ctr" indent="0" marL="0">
+              <a:buNone/>
+            </a:pPr>
+            <a:r>
+              <a:rPr lang="en-US" sz="1050" dirty="0">
+                <a:solidFill>
+                  <a:srgbClr val="9FB0C4"/>
                 </a:solidFill>
                 <a:latin typeface="Courier New" pitchFamily="34" charset="0"/>
                 <a:ea typeface="Courier New" pitchFamily="34" charset="-122"/>
                 <a:cs typeface="Courier New" pitchFamily="34" charset="-120"/>
               </a:rPr>
-              <a:t>devTempMem</a:t>
+              <a:t>빠름 · 블록당 수십 KB</a:t>
+            </a:r>
+            <a:endParaRPr lang="en-US" sz="1050" dirty="0"/>
+          </a:p>
+        </p:txBody>
+      </p:sp>
+      <p:sp>
+        <p:nvSpPr>
+          <p:cNvPr id="43" name="Shape 41"/>
+          <p:cNvSpPr/>
+          <p:nvPr/>
+        </p:nvSpPr>
+        <p:spPr>
+          <a:xfrm>
+            <a:off x="7909560" y="4572000"/>
+            <a:ext cx="3474720" cy="868680"/>
+          </a:xfrm>
+          <a:prstGeom prst="roundRect">
+            <a:avLst>
+              <a:gd name="adj" fmla="val 5263"/>
+            </a:avLst>
+          </a:prstGeom>
+          <a:solidFill>
+            <a:srgbClr val="0B1119"/>
+          </a:solidFill>
+          <a:ln w="19050">
+            <a:solidFill>
+              <a:srgbClr val="E8A33D"/>
+            </a:solidFill>
+            <a:prstDash val="solid"/>
+          </a:ln>
+        </p:spPr>
+      </p:sp>
+      <p:sp>
+        <p:nvSpPr>
+          <p:cNvPr id="44" name="Text 42"/>
+          <p:cNvSpPr/>
+          <p:nvPr/>
+        </p:nvSpPr>
+        <p:spPr>
+          <a:xfrm>
+            <a:off x="8019288" y="4663440"/>
+            <a:ext cx="3255264" cy="365760"/>
+          </a:xfrm>
+          <a:prstGeom prst="rect">
+            <a:avLst/>
+          </a:prstGeom>
+          <a:noFill/>
+          <a:ln/>
+        </p:spPr>
+        <p:txBody>
+          <a:bodyPr wrap="square" lIns="0" tIns="0" rIns="0" bIns="0" rtlCol="0" anchor="t"/>
+          <a:lstStyle/>
+          <a:p>
+            <a:pPr algn="ctr" indent="0" marL="0">
+              <a:buNone/>
+            </a:pPr>
+            <a:r>
+              <a:rPr lang="en-US" sz="1400" b="1" dirty="0">
+                <a:solidFill>
+                  <a:srgbClr val="E8A33D"/>
+                </a:solidFill>
+                <a:latin typeface="Malgun Gothic" pitchFamily="34" charset="0"/>
+                <a:ea typeface="Malgun Gothic" pitchFamily="34" charset="-122"/>
+                <a:cs typeface="Malgun Gothic" pitchFamily="34" charset="-120"/>
+              </a:rPr>
+              <a:t>전역 메모리</a:t>
             </a:r>
             <a:endParaRPr lang="en-US" sz="1400" dirty="0"/>
           </a:p>
@@ -3688,69 +5966,30 @@
       </p:sp>
       <p:sp>
         <p:nvSpPr>
-          <p:cNvPr id="9" name="Text 7"/>
-          <p:cNvSpPr/>
-          <p:nvPr/>
-        </p:nvSpPr>
-        <p:spPr>
-          <a:xfrm>
-            <a:off x="3200400" y="4681728"/>
-            <a:ext cx="8412480" cy="502920"/>
-          </a:xfrm>
-          <a:prstGeom prst="rect">
-            <a:avLst/>
-          </a:prstGeom>
-          <a:noFill/>
-          <a:ln/>
-        </p:spPr>
-        <p:txBody>
-          <a:bodyPr wrap="square" lIns="0" tIns="0" rIns="0" bIns="0" rtlCol="0" anchor="t"/>
-          <a:lstStyle/>
-          <a:p>
-            <a:pPr indent="0" marL="0">
-              <a:buNone/>
-            </a:pPr>
-            <a:r>
-              <a:rPr lang="en-US" sz="1500" dirty="0">
-                <a:solidFill>
-                  <a:srgbClr val="E7EDF5"/>
-                </a:solidFill>
-                <a:latin typeface="Malgun Gothic" pitchFamily="34" charset="0"/>
-                <a:ea typeface="Malgun Gothic" pitchFamily="34" charset="-122"/>
-                <a:cs typeface="Malgun Gothic" pitchFamily="34" charset="-120"/>
-              </a:rPr>
-              <a:t>블록마다 오류 수 1개 — nBlocks(1024)개의 uint</a:t>
-            </a:r>
-            <a:endParaRPr lang="en-US" sz="1500" dirty="0"/>
-          </a:p>
-        </p:txBody>
-      </p:sp>
-      <p:sp>
-        <p:nvSpPr>
-          <p:cNvPr id="10" name="Text 8"/>
-          <p:cNvSpPr/>
-          <p:nvPr/>
-        </p:nvSpPr>
-        <p:spPr>
-          <a:xfrm>
-            <a:off x="548640" y="5248656"/>
-            <a:ext cx="2468880" cy="502920"/>
-          </a:xfrm>
-          <a:prstGeom prst="rect">
-            <a:avLst/>
-          </a:prstGeom>
-          <a:noFill/>
-          <a:ln/>
-        </p:spPr>
-        <p:txBody>
-          <a:bodyPr wrap="square" lIns="0" tIns="0" rIns="0" bIns="0" rtlCol="0" anchor="t"/>
-          <a:lstStyle/>
-          <a:p>
-            <a:pPr indent="0" marL="0">
-              <a:buNone/>
-            </a:pPr>
-            <a:r>
-              <a:rPr lang="en-US" sz="1400" b="1" dirty="0">
+          <p:cNvPr id="45" name="Text 43"/>
+          <p:cNvSpPr/>
+          <p:nvPr/>
+        </p:nvSpPr>
+        <p:spPr>
+          <a:xfrm>
+            <a:off x="8019288" y="4983480"/>
+            <a:ext cx="3255264" cy="384048"/>
+          </a:xfrm>
+          <a:prstGeom prst="rect">
+            <a:avLst/>
+          </a:prstGeom>
+          <a:noFill/>
+          <a:ln/>
+        </p:spPr>
+        <p:txBody>
+          <a:bodyPr wrap="square" lIns="0" tIns="0" rIns="0" bIns="0" rtlCol="0" anchor="ctr"/>
+          <a:lstStyle/>
+          <a:p>
+            <a:pPr algn="ctr" indent="0" marL="0">
+              <a:buNone/>
+            </a:pPr>
+            <a:r>
+              <a:rPr lang="en-US" sz="1050" dirty="0">
                 <a:solidFill>
                   <a:srgbClr val="9FB0C4"/>
                 </a:solidFill>
@@ -3758,48 +5997,48 @@
                 <a:ea typeface="Courier New" pitchFamily="34" charset="-122"/>
                 <a:cs typeface="Courier New" pitchFamily="34" charset="-120"/>
               </a:rPr>
-              <a:t>hostTempMem</a:t>
-            </a:r>
-            <a:endParaRPr lang="en-US" sz="1400" dirty="0"/>
-          </a:p>
-        </p:txBody>
-      </p:sp>
-      <p:sp>
-        <p:nvSpPr>
-          <p:cNvPr id="11" name="Text 9"/>
-          <p:cNvSpPr/>
-          <p:nvPr/>
-        </p:nvSpPr>
-        <p:spPr>
-          <a:xfrm>
-            <a:off x="3200400" y="5248656"/>
-            <a:ext cx="8412480" cy="502920"/>
-          </a:xfrm>
-          <a:prstGeom prst="rect">
-            <a:avLst/>
-          </a:prstGeom>
-          <a:noFill/>
-          <a:ln/>
-        </p:spPr>
-        <p:txBody>
-          <a:bodyPr wrap="square" lIns="0" tIns="0" rIns="0" bIns="0" rtlCol="0" anchor="t"/>
-          <a:lstStyle/>
-          <a:p>
-            <a:pPr indent="0" marL="0">
-              <a:buNone/>
-            </a:pPr>
-            <a:r>
-              <a:rPr lang="en-US" sz="1500" dirty="0">
-                <a:solidFill>
-                  <a:srgbClr val="E7EDF5"/>
-                </a:solidFill>
-                <a:latin typeface="Malgun Gothic" pitchFamily="34" charset="0"/>
-                <a:ea typeface="Malgun Gothic" pitchFamily="34" charset="-122"/>
-                <a:cs typeface="Malgun Gothic" pitchFamily="34" charset="-120"/>
-              </a:rPr>
-              <a:t>devTempMem을 CPU로 복사해 최종 합산할 버퍼</a:t>
-            </a:r>
-            <a:endParaRPr lang="en-US" sz="1500" dirty="0"/>
+              <a:t>느림 · 수 GB (VRAM)</a:t>
+            </a:r>
+            <a:endParaRPr lang="en-US" sz="1050" dirty="0"/>
+          </a:p>
+        </p:txBody>
+      </p:sp>
+      <p:sp>
+        <p:nvSpPr>
+          <p:cNvPr id="46" name="Text 44"/>
+          <p:cNvSpPr/>
+          <p:nvPr/>
+        </p:nvSpPr>
+        <p:spPr>
+          <a:xfrm>
+            <a:off x="548640" y="5852160"/>
+            <a:ext cx="11064240" cy="365760"/>
+          </a:xfrm>
+          <a:prstGeom prst="rect">
+            <a:avLst/>
+          </a:prstGeom>
+          <a:noFill/>
+          <a:ln/>
+        </p:spPr>
+        <p:txBody>
+          <a:bodyPr wrap="square" lIns="0" tIns="0" rIns="0" bIns="0" rtlCol="0" anchor="ctr"/>
+          <a:lstStyle/>
+          <a:p>
+            <a:pPr algn="ctr" indent="0" marL="0">
+              <a:buNone/>
+            </a:pPr>
+            <a:r>
+              <a:rPr lang="en-US" sz="1300" i="1" dirty="0">
+                <a:solidFill>
+                  <a:srgbClr val="9FB0C4"/>
+                </a:solidFill>
+                <a:latin typeface="Malgun Gothic" pitchFamily="34" charset="0"/>
+                <a:ea typeface="Malgun Gothic" pitchFamily="34" charset="-122"/>
+                <a:cs typeface="Malgun Gothic" pitchFamily="34" charset="-120"/>
+              </a:rPr>
+              <a:t>테스트 '대상'은 전역 메모리. 공유 메모리는 리덕션의 '도구'입니다(세션 3).</a:t>
+            </a:r>
+            <a:endParaRPr lang="en-US" sz="1300" dirty="0"/>
           </a:p>
         </p:txBody>
       </p:sp>
@@ -3872,7 +6111,7 @@
                 <a:ea typeface="Courier New" pitchFamily="34" charset="-122"/>
                 <a:cs typeface="Courier New" pitchFamily="34" charset="-120"/>
               </a:rPr>
-              <a:t>4</a:t>
+              <a:t>3</a:t>
             </a:r>
             <a:endParaRPr lang="en-US" sz="2200" dirty="0"/>
           </a:p>
@@ -3911,7 +6150,7 @@
                 <a:ea typeface="Malgun Gothic" pitchFamily="34" charset="-122"/>
                 <a:cs typeface="Malgun Gothic" pitchFamily="34" charset="-120"/>
               </a:rPr>
-              <a:t>모든 테스트의 뼈대 · 쓰고 → 되읽는다</a:t>
+              <a:t>메모리 할당 · memtestState::allocate</a:t>
             </a:r>
             <a:endParaRPr lang="en-US" sz="2900" dirty="0"/>
           </a:p>
@@ -3925,20 +6164,20 @@
         </p:nvSpPr>
         <p:spPr>
           <a:xfrm>
-            <a:off x="548640" y="1828800"/>
-            <a:ext cx="3200400" cy="2743200"/>
+            <a:off x="548640" y="1508760"/>
+            <a:ext cx="11064240" cy="2286000"/>
           </a:xfrm>
           <a:prstGeom prst="roundRect">
             <a:avLst>
-              <a:gd name="adj" fmla="val 2667"/>
+              <a:gd name="adj" fmla="val 2000"/>
             </a:avLst>
           </a:prstGeom>
           <a:solidFill>
-            <a:srgbClr val="18212E"/>
+            <a:srgbClr val="0B1119"/>
           </a:solidFill>
-          <a:ln w="19050">
+          <a:ln w="12700">
             <a:solidFill>
-              <a:srgbClr val="E8A33D"/>
+              <a:srgbClr val="2C3A4E"/>
             </a:solidFill>
             <a:prstDash val="solid"/>
           </a:ln>
@@ -3952,622 +6191,244 @@
         </p:nvSpPr>
         <p:spPr>
           <a:xfrm>
-            <a:off x="777240" y="2011680"/>
-            <a:ext cx="2743200" cy="365760"/>
-          </a:xfrm>
-          <a:prstGeom prst="rect">
-            <a:avLst/>
-          </a:prstGeom>
-          <a:noFill/>
-          <a:ln/>
-        </p:spPr>
-        <p:txBody>
-          <a:bodyPr wrap="square" lIns="0" tIns="0" rIns="0" bIns="0" rtlCol="0" anchor="ctr"/>
-          <a:lstStyle/>
-          <a:p>
-            <a:pPr indent="0" marL="0">
-              <a:buNone/>
-            </a:pPr>
-            <a:r>
-              <a:rPr lang="en-US" sz="1300" b="1" dirty="0">
-                <a:solidFill>
-                  <a:srgbClr val="E8A33D"/>
+            <a:off x="768096" y="1655064"/>
+            <a:ext cx="10625328" cy="1993392"/>
+          </a:xfrm>
+          <a:prstGeom prst="rect">
+            <a:avLst/>
+          </a:prstGeom>
+          <a:noFill/>
+          <a:ln/>
+        </p:spPr>
+        <p:txBody>
+          <a:bodyPr wrap="square" lIns="0" tIns="0" rIns="0" bIns="0" rtlCol="0" anchor="t"/>
+          <a:lstStyle/>
+          <a:p>
+            <a:pPr algn="l" indent="0" marL="0">
+              <a:lnSpc>
+                <a:spcPct val="110000"/>
+              </a:lnSpc>
+              <a:buNone/>
+            </a:pPr>
+            <a:r>
+              <a:rPr lang="en-US" sz="1300" dirty="0">
+                <a:solidFill>
+                  <a:srgbClr val="6B7D94"/>
                 </a:solidFill>
                 <a:latin typeface="Courier New" pitchFamily="34" charset="0"/>
                 <a:ea typeface="Courier New" pitchFamily="34" charset="-122"/>
                 <a:cs typeface="Courier New" pitchFamily="34" charset="-120"/>
               </a:rPr>
-              <a:t>STEP 1</a:t>
+              <a:t>// core.cu:51</a:t>
             </a:r>
             <a:endParaRPr lang="en-US" sz="1300" dirty="0"/>
           </a:p>
-        </p:txBody>
-      </p:sp>
-      <p:sp>
-        <p:nvSpPr>
-          <p:cNvPr id="6" name="Text 4"/>
-          <p:cNvSpPr/>
-          <p:nvPr/>
-        </p:nvSpPr>
-        <p:spPr>
-          <a:xfrm>
-            <a:off x="777240" y="2423160"/>
-            <a:ext cx="2743200" cy="457200"/>
-          </a:xfrm>
-          <a:prstGeom prst="rect">
-            <a:avLst/>
-          </a:prstGeom>
-          <a:noFill/>
-          <a:ln/>
-        </p:spPr>
-        <p:txBody>
-          <a:bodyPr wrap="square" lIns="0" tIns="0" rIns="0" bIns="0" rtlCol="0" anchor="ctr"/>
-          <a:lstStyle/>
-          <a:p>
-            <a:pPr indent="0" marL="0">
-              <a:buNone/>
-            </a:pPr>
-            <a:r>
-              <a:rPr lang="en-US" sz="2000" b="1" dirty="0">
+          <a:p>
+            <a:pPr algn="l" indent="0" marL="0">
+              <a:lnSpc>
+                <a:spcPct val="110000"/>
+              </a:lnSpc>
+              <a:buNone/>
+            </a:pPr>
+            <a:r>
+              <a:rPr lang="en-US" sz="1300" dirty="0">
                 <a:solidFill>
                   <a:srgbClr val="E7EDF5"/>
-                </a:solidFill>
-                <a:latin typeface="Malgun Gothic" pitchFamily="34" charset="0"/>
-                <a:ea typeface="Malgun Gothic" pitchFamily="34" charset="-122"/>
-                <a:cs typeface="Malgun Gothic" pitchFamily="34" charset="-120"/>
-              </a:rPr>
-              <a:t>패턴 쓰기</a:t>
-            </a:r>
-            <a:endParaRPr lang="en-US" sz="2000" dirty="0"/>
-          </a:p>
-        </p:txBody>
-      </p:sp>
-      <p:sp>
-        <p:nvSpPr>
-          <p:cNvPr id="7" name="Text 5"/>
-          <p:cNvSpPr/>
-          <p:nvPr/>
-        </p:nvSpPr>
-        <p:spPr>
-          <a:xfrm>
-            <a:off x="777240" y="3017520"/>
-            <a:ext cx="2743200" cy="1371600"/>
-          </a:xfrm>
-          <a:prstGeom prst="rect">
-            <a:avLst/>
-          </a:prstGeom>
-          <a:noFill/>
-          <a:ln/>
-        </p:spPr>
-        <p:txBody>
-          <a:bodyPr wrap="square" lIns="0" tIns="0" rIns="0" bIns="0" rtlCol="0" anchor="t"/>
-          <a:lstStyle/>
-          <a:p>
-            <a:pPr indent="0" marL="0">
-              <a:lnSpc>
-                <a:spcPct val="120000"/>
-              </a:lnSpc>
-              <a:buNone/>
-            </a:pPr>
-            <a:r>
-              <a:rPr lang="en-US" sz="1400" dirty="0">
-                <a:solidFill>
-                  <a:srgbClr val="9FB0C4"/>
-                </a:solidFill>
-                <a:latin typeface="Malgun Gothic" pitchFamily="34" charset="0"/>
-                <a:ea typeface="Malgun Gothic" pitchFamily="34" charset="-122"/>
-                <a:cs typeface="Malgun Gothic" pitchFamily="34" charset="-120"/>
-              </a:rPr>
-              <a:t>알려진 비트 패턴을 전 영역에 기록</a:t>
-            </a:r>
-            <a:endParaRPr lang="en-US" sz="1400" dirty="0"/>
-          </a:p>
-          <a:p>
-            <a:pPr indent="0" marL="0">
-              <a:lnSpc>
-                <a:spcPct val="120000"/>
-              </a:lnSpc>
-              <a:buNone/>
-            </a:pPr>
-            <a:r>
-              <a:rPr lang="en-US" sz="1400" dirty="0">
-                <a:solidFill>
-                  <a:srgbClr val="9FB0C4"/>
-                </a:solidFill>
-                <a:latin typeface="Malgun Gothic" pitchFamily="34" charset="0"/>
-                <a:ea typeface="Malgun Gothic" pitchFamily="34" charset="-122"/>
-                <a:cs typeface="Malgun Gothic" pitchFamily="34" charset="-120"/>
-              </a:rPr>
-              <a:t>deviceWriteConstant</a:t>
-            </a:r>
-            <a:endParaRPr lang="en-US" sz="1400" dirty="0"/>
-          </a:p>
-        </p:txBody>
-      </p:sp>
-      <p:sp>
-        <p:nvSpPr>
-          <p:cNvPr id="8" name="Text 6"/>
-          <p:cNvSpPr/>
-          <p:nvPr/>
-        </p:nvSpPr>
-        <p:spPr>
-          <a:xfrm>
-            <a:off x="3886200" y="2834640"/>
-            <a:ext cx="457200" cy="731520"/>
-          </a:xfrm>
-          <a:prstGeom prst="rect">
-            <a:avLst/>
-          </a:prstGeom>
-          <a:noFill/>
-          <a:ln/>
-        </p:spPr>
-        <p:txBody>
-          <a:bodyPr wrap="square" lIns="0" tIns="0" rIns="0" bIns="0" rtlCol="0" anchor="ctr"/>
-          <a:lstStyle/>
-          <a:p>
-            <a:pPr algn="ctr" indent="0" marL="0">
-              <a:buNone/>
-            </a:pPr>
-            <a:r>
-              <a:rPr lang="en-US" sz="3000" dirty="0">
-                <a:solidFill>
-                  <a:srgbClr val="6B7D94"/>
-                </a:solidFill>
-                <a:latin typeface="Malgun Gothic" pitchFamily="34" charset="0"/>
-                <a:ea typeface="Malgun Gothic" pitchFamily="34" charset="-122"/>
-                <a:cs typeface="Malgun Gothic" pitchFamily="34" charset="-120"/>
-              </a:rPr>
-              <a:t>→</a:t>
-            </a:r>
-            <a:endParaRPr lang="en-US" sz="3000" dirty="0"/>
-          </a:p>
-        </p:txBody>
-      </p:sp>
-      <p:sp>
-        <p:nvSpPr>
-          <p:cNvPr id="9" name="Shape 7"/>
-          <p:cNvSpPr/>
-          <p:nvPr/>
-        </p:nvSpPr>
-        <p:spPr>
-          <a:xfrm>
-            <a:off x="4480560" y="1828800"/>
-            <a:ext cx="3200400" cy="2743200"/>
-          </a:xfrm>
-          <a:prstGeom prst="roundRect">
-            <a:avLst>
-              <a:gd name="adj" fmla="val 2667"/>
-            </a:avLst>
-          </a:prstGeom>
-          <a:solidFill>
-            <a:srgbClr val="18212E"/>
-          </a:solidFill>
-          <a:ln w="19050">
-            <a:solidFill>
-              <a:srgbClr val="3FB8C4"/>
-            </a:solidFill>
-            <a:prstDash val="solid"/>
-          </a:ln>
-        </p:spPr>
-      </p:sp>
-      <p:sp>
-        <p:nvSpPr>
-          <p:cNvPr id="10" name="Text 8"/>
-          <p:cNvSpPr/>
-          <p:nvPr/>
-        </p:nvSpPr>
-        <p:spPr>
-          <a:xfrm>
-            <a:off x="4709160" y="2011680"/>
-            <a:ext cx="2743200" cy="365760"/>
-          </a:xfrm>
-          <a:prstGeom prst="rect">
-            <a:avLst/>
-          </a:prstGeom>
-          <a:noFill/>
-          <a:ln/>
-        </p:spPr>
-        <p:txBody>
-          <a:bodyPr wrap="square" lIns="0" tIns="0" rIns="0" bIns="0" rtlCol="0" anchor="ctr"/>
-          <a:lstStyle/>
-          <a:p>
-            <a:pPr indent="0" marL="0">
-              <a:buNone/>
-            </a:pPr>
-            <a:r>
-              <a:rPr lang="en-US" sz="1300" b="1" dirty="0">
-                <a:solidFill>
-                  <a:srgbClr val="3FB8C4"/>
                 </a:solidFill>
                 <a:latin typeface="Courier New" pitchFamily="34" charset="0"/>
                 <a:ea typeface="Courier New" pitchFamily="34" charset="-122"/>
                 <a:cs typeface="Courier New" pitchFamily="34" charset="-120"/>
               </a:rPr>
-              <a:t>STEP 2</a:t>
+              <a:t>uint memtestState::allocate(uint mbToTest) {</a:t>
             </a:r>
             <a:endParaRPr lang="en-US" sz="1300" dirty="0"/>
           </a:p>
-        </p:txBody>
-      </p:sp>
-      <p:sp>
-        <p:nvSpPr>
-          <p:cNvPr id="11" name="Text 9"/>
-          <p:cNvSpPr/>
-          <p:nvPr/>
-        </p:nvSpPr>
-        <p:spPr>
-          <a:xfrm>
-            <a:off x="4709160" y="2423160"/>
-            <a:ext cx="2743200" cy="457200"/>
-          </a:xfrm>
-          <a:prstGeom prst="rect">
-            <a:avLst/>
-          </a:prstGeom>
-          <a:noFill/>
-          <a:ln/>
-        </p:spPr>
-        <p:txBody>
-          <a:bodyPr wrap="square" lIns="0" tIns="0" rIns="0" bIns="0" rtlCol="0" anchor="ctr"/>
-          <a:lstStyle/>
-          <a:p>
-            <a:pPr indent="0" marL="0">
-              <a:buNone/>
-            </a:pPr>
-            <a:r>
-              <a:rPr lang="en-US" sz="2000" b="1" dirty="0">
-                <a:solidFill>
-                  <a:srgbClr val="E7EDF5"/>
-                </a:solidFill>
-                <a:latin typeface="Malgun Gothic" pitchFamily="34" charset="0"/>
-                <a:ea typeface="Malgun Gothic" pitchFamily="34" charset="-122"/>
-                <a:cs typeface="Malgun Gothic" pitchFamily="34" charset="-120"/>
-              </a:rPr>
-              <a:t>커널 종료 대기</a:t>
-            </a:r>
-            <a:endParaRPr lang="en-US" sz="2000" dirty="0"/>
-          </a:p>
-        </p:txBody>
-      </p:sp>
-      <p:sp>
-        <p:nvSpPr>
-          <p:cNvPr id="12" name="Text 10"/>
-          <p:cNvSpPr/>
-          <p:nvPr/>
-        </p:nvSpPr>
-        <p:spPr>
-          <a:xfrm>
-            <a:off x="4709160" y="3017520"/>
-            <a:ext cx="2743200" cy="1371600"/>
-          </a:xfrm>
-          <a:prstGeom prst="rect">
-            <a:avLst/>
-          </a:prstGeom>
-          <a:noFill/>
-          <a:ln/>
-        </p:spPr>
-        <p:txBody>
-          <a:bodyPr wrap="square" lIns="0" tIns="0" rIns="0" bIns="0" rtlCol="0" anchor="t"/>
-          <a:lstStyle/>
-          <a:p>
-            <a:pPr indent="0" marL="0">
+          <a:p>
+            <a:pPr algn="l" indent="0" marL="0">
               <a:lnSpc>
-                <a:spcPct val="120000"/>
+                <a:spcPct val="110000"/>
               </a:lnSpc>
               <a:buNone/>
             </a:pPr>
             <a:r>
-              <a:rPr lang="en-US" sz="1400" dirty="0">
-                <a:solidFill>
-                  <a:srgbClr val="9FB0C4"/>
-                </a:solidFill>
-                <a:latin typeface="Malgun Gothic" pitchFamily="34" charset="0"/>
-                <a:ea typeface="Malgun Gothic" pitchFamily="34" charset="-122"/>
-                <a:cs typeface="Malgun Gothic" pitchFamily="34" charset="-120"/>
-              </a:rPr>
-              <a:t>SOFTWAIT()로 GPU 완료를 기다림</a:t>
-            </a:r>
-            <a:endParaRPr lang="en-US" sz="1400" dirty="0"/>
-          </a:p>
-          <a:p>
-            <a:pPr indent="0" marL="0">
-              <a:lnSpc>
-                <a:spcPct val="120000"/>
-              </a:lnSpc>
-              <a:buNone/>
-            </a:pPr>
-            <a:r>
-              <a:rPr lang="en-US" sz="1400" dirty="0">
-                <a:solidFill>
-                  <a:srgbClr val="9FB0C4"/>
-                </a:solidFill>
-                <a:latin typeface="Malgun Gothic" pitchFamily="34" charset="0"/>
-                <a:ea typeface="Malgun Gothic" pitchFamily="34" charset="-122"/>
-                <a:cs typeface="Malgun Gothic" pitchFamily="34" charset="-120"/>
-              </a:rPr>
-              <a:t>= 메모리에 값이 확실히 반영</a:t>
-            </a:r>
-            <a:endParaRPr lang="en-US" sz="1400" dirty="0"/>
-          </a:p>
-        </p:txBody>
-      </p:sp>
-      <p:sp>
-        <p:nvSpPr>
-          <p:cNvPr id="13" name="Text 11"/>
-          <p:cNvSpPr/>
-          <p:nvPr/>
-        </p:nvSpPr>
-        <p:spPr>
-          <a:xfrm>
-            <a:off x="7818120" y="2834640"/>
-            <a:ext cx="457200" cy="731520"/>
-          </a:xfrm>
-          <a:prstGeom prst="rect">
-            <a:avLst/>
-          </a:prstGeom>
-          <a:noFill/>
-          <a:ln/>
-        </p:spPr>
-        <p:txBody>
-          <a:bodyPr wrap="square" lIns="0" tIns="0" rIns="0" bIns="0" rtlCol="0" anchor="ctr"/>
-          <a:lstStyle/>
-          <a:p>
-            <a:pPr algn="ctr" indent="0" marL="0">
-              <a:buNone/>
-            </a:pPr>
-            <a:r>
-              <a:rPr lang="en-US" sz="3000" dirty="0">
-                <a:solidFill>
-                  <a:srgbClr val="6B7D94"/>
-                </a:solidFill>
-                <a:latin typeface="Malgun Gothic" pitchFamily="34" charset="0"/>
-                <a:ea typeface="Malgun Gothic" pitchFamily="34" charset="-122"/>
-                <a:cs typeface="Malgun Gothic" pitchFamily="34" charset="-120"/>
-              </a:rPr>
-              <a:t>→</a:t>
-            </a:r>
-            <a:endParaRPr lang="en-US" sz="3000" dirty="0"/>
-          </a:p>
-        </p:txBody>
-      </p:sp>
-      <p:sp>
-        <p:nvSpPr>
-          <p:cNvPr id="14" name="Shape 12"/>
-          <p:cNvSpPr/>
-          <p:nvPr/>
-        </p:nvSpPr>
-        <p:spPr>
-          <a:xfrm>
-            <a:off x="8412480" y="1828800"/>
-            <a:ext cx="3200400" cy="2743200"/>
-          </a:xfrm>
-          <a:prstGeom prst="roundRect">
-            <a:avLst>
-              <a:gd name="adj" fmla="val 2667"/>
-            </a:avLst>
-          </a:prstGeom>
-          <a:solidFill>
-            <a:srgbClr val="18212E"/>
-          </a:solidFill>
-          <a:ln w="19050">
-            <a:solidFill>
-              <a:srgbClr val="E8A33D"/>
-            </a:solidFill>
-            <a:prstDash val="solid"/>
-          </a:ln>
-        </p:spPr>
-      </p:sp>
-      <p:sp>
-        <p:nvSpPr>
-          <p:cNvPr id="15" name="Text 13"/>
-          <p:cNvSpPr/>
-          <p:nvPr/>
-        </p:nvSpPr>
-        <p:spPr>
-          <a:xfrm>
-            <a:off x="8641080" y="2011680"/>
-            <a:ext cx="2743200" cy="365760"/>
-          </a:xfrm>
-          <a:prstGeom prst="rect">
-            <a:avLst/>
-          </a:prstGeom>
-          <a:noFill/>
-          <a:ln/>
-        </p:spPr>
-        <p:txBody>
-          <a:bodyPr wrap="square" lIns="0" tIns="0" rIns="0" bIns="0" rtlCol="0" anchor="ctr"/>
-          <a:lstStyle/>
-          <a:p>
-            <a:pPr indent="0" marL="0">
-              <a:buNone/>
-            </a:pPr>
-            <a:r>
-              <a:rPr lang="en-US" sz="1300" b="1" dirty="0">
-                <a:solidFill>
-                  <a:srgbClr val="E8A33D"/>
+              <a:rPr lang="en-US" sz="1300" dirty="0">
+                <a:solidFill>
+                  <a:srgbClr val="F2C079"/>
                 </a:solidFill>
                 <a:latin typeface="Courier New" pitchFamily="34" charset="0"/>
                 <a:ea typeface="Courier New" pitchFamily="34" charset="-122"/>
                 <a:cs typeface="Courier New" pitchFamily="34" charset="-120"/>
               </a:rPr>
-              <a:t>STEP 3</a:t>
+              <a:t>    if (mbToTest % 2) mbToTest++;              // 2MiB 단위로 반올림</a:t>
             </a:r>
             <a:endParaRPr lang="en-US" sz="1300" dirty="0"/>
           </a:p>
-        </p:txBody>
-      </p:sp>
-      <p:sp>
-        <p:nvSpPr>
-          <p:cNvPr id="16" name="Text 14"/>
-          <p:cNvSpPr/>
-          <p:nvPr/>
-        </p:nvSpPr>
-        <p:spPr>
-          <a:xfrm>
-            <a:off x="8641080" y="2423160"/>
-            <a:ext cx="2743200" cy="457200"/>
-          </a:xfrm>
-          <a:prstGeom prst="rect">
-            <a:avLst/>
-          </a:prstGeom>
-          <a:noFill/>
-          <a:ln/>
-        </p:spPr>
-        <p:txBody>
-          <a:bodyPr wrap="square" lIns="0" tIns="0" rIns="0" bIns="0" rtlCol="0" anchor="ctr"/>
-          <a:lstStyle/>
-          <a:p>
-            <a:pPr indent="0" marL="0">
-              <a:buNone/>
-            </a:pPr>
-            <a:r>
-              <a:rPr lang="en-US" sz="2000" b="1" dirty="0">
-                <a:solidFill>
-                  <a:srgbClr val="E7EDF5"/>
-                </a:solidFill>
-                <a:latin typeface="Malgun Gothic" pitchFamily="34" charset="0"/>
-                <a:ea typeface="Malgun Gothic" pitchFamily="34" charset="-122"/>
-                <a:cs typeface="Malgun Gothic" pitchFamily="34" charset="-120"/>
-              </a:rPr>
-              <a:t>되읽고 검증</a:t>
-            </a:r>
-            <a:endParaRPr lang="en-US" sz="2000" dirty="0"/>
-          </a:p>
-        </p:txBody>
-      </p:sp>
-      <p:sp>
-        <p:nvSpPr>
-          <p:cNvPr id="17" name="Text 15"/>
-          <p:cNvSpPr/>
-          <p:nvPr/>
-        </p:nvSpPr>
-        <p:spPr>
-          <a:xfrm>
-            <a:off x="8641080" y="3017520"/>
-            <a:ext cx="2743200" cy="1371600"/>
-          </a:xfrm>
-          <a:prstGeom prst="rect">
-            <a:avLst/>
-          </a:prstGeom>
-          <a:noFill/>
-          <a:ln/>
-        </p:spPr>
-        <p:txBody>
-          <a:bodyPr wrap="square" lIns="0" tIns="0" rIns="0" bIns="0" rtlCol="0" anchor="t"/>
-          <a:lstStyle/>
-          <a:p>
-            <a:pPr indent="0" marL="0">
-              <a:lnSpc>
-                <a:spcPct val="120000"/>
-              </a:lnSpc>
-              <a:buNone/>
-            </a:pPr>
-            <a:r>
-              <a:rPr lang="en-US" sz="1400" dirty="0">
-                <a:solidFill>
-                  <a:srgbClr val="9FB0C4"/>
-                </a:solidFill>
-                <a:latin typeface="Malgun Gothic" pitchFamily="34" charset="0"/>
-                <a:ea typeface="Malgun Gothic" pitchFamily="34" charset="-122"/>
-                <a:cs typeface="Malgun Gothic" pitchFamily="34" charset="-120"/>
-              </a:rPr>
-              <a:t>기대값과 비교, 틀린 비트 수 집계</a:t>
-            </a:r>
-            <a:endParaRPr lang="en-US" sz="1400" dirty="0"/>
-          </a:p>
-          <a:p>
-            <a:pPr indent="0" marL="0">
-              <a:lnSpc>
-                <a:spcPct val="120000"/>
-              </a:lnSpc>
-              <a:buNone/>
-            </a:pPr>
-            <a:r>
-              <a:rPr lang="en-US" sz="1400" dirty="0">
-                <a:solidFill>
-                  <a:srgbClr val="9FB0C4"/>
-                </a:solidFill>
-                <a:latin typeface="Malgun Gothic" pitchFamily="34" charset="0"/>
-                <a:ea typeface="Malgun Gothic" pitchFamily="34" charset="-122"/>
-                <a:cs typeface="Malgun Gothic" pitchFamily="34" charset="-120"/>
-              </a:rPr>
-              <a:t>deviceVerifyConstant</a:t>
-            </a:r>
-            <a:endParaRPr lang="en-US" sz="1400" dirty="0"/>
-          </a:p>
-        </p:txBody>
-      </p:sp>
-      <p:sp>
-        <p:nvSpPr>
-          <p:cNvPr id="18" name="Shape 16"/>
-          <p:cNvSpPr/>
-          <p:nvPr/>
-        </p:nvSpPr>
-        <p:spPr>
-          <a:xfrm>
-            <a:off x="548640" y="4892040"/>
-            <a:ext cx="11064240" cy="914400"/>
-          </a:xfrm>
-          <a:prstGeom prst="roundRect">
-            <a:avLst>
-              <a:gd name="adj" fmla="val 8000"/>
-            </a:avLst>
-          </a:prstGeom>
-          <a:solidFill>
-            <a:srgbClr val="241A16"/>
-          </a:solidFill>
-          <a:ln w="19050">
-            <a:solidFill>
-              <a:srgbClr val="E8A33D"/>
-            </a:solidFill>
-            <a:prstDash val="solid"/>
-          </a:ln>
-        </p:spPr>
-      </p:sp>
-      <p:sp>
-        <p:nvSpPr>
-          <p:cNvPr id="19" name="Text 17"/>
-          <p:cNvSpPr/>
-          <p:nvPr/>
-        </p:nvSpPr>
-        <p:spPr>
-          <a:xfrm>
-            <a:off x="822960" y="5074920"/>
-            <a:ext cx="10515600" cy="640080"/>
-          </a:xfrm>
-          <a:prstGeom prst="rect">
-            <a:avLst/>
-          </a:prstGeom>
-          <a:noFill/>
-          <a:ln/>
-        </p:spPr>
-        <p:txBody>
-          <a:bodyPr wrap="square" lIns="0" tIns="0" rIns="0" bIns="0" rtlCol="0" anchor="t"/>
-          <a:lstStyle/>
-          <a:p>
-            <a:pPr indent="0" marL="0">
+          <a:p>
+            <a:pPr algn="l" indent="0" marL="0">
               <a:lnSpc>
                 <a:spcPct val="110000"/>
               </a:lnSpc>
               <a:buNone/>
             </a:pPr>
             <a:r>
-              <a:rPr lang="en-US" sz="1500" b="1" dirty="0">
-                <a:solidFill>
-                  <a:srgbClr val="E8A33D"/>
-                </a:solidFill>
-                <a:latin typeface="Malgun Gothic" pitchFamily="34" charset="0"/>
-                <a:ea typeface="Malgun Gothic" pitchFamily="34" charset="-122"/>
-                <a:cs typeface="Malgun Gothic" pitchFamily="34" charset="-120"/>
-              </a:rPr>
-              <a:t>왜 쓰기와 읽기를 나눌까? </a:t>
-            </a:r>
-            <a:pPr indent="0" marL="0">
+              <a:rPr lang="en-US" sz="1300" dirty="0">
+                <a:solidFill>
+                  <a:srgbClr val="E7EDF5"/>
+                </a:solidFill>
+                <a:latin typeface="Courier New" pitchFamily="34" charset="0"/>
+                <a:ea typeface="Courier New" pitchFamily="34" charset="-122"/>
+                <a:cs typeface="Courier New" pitchFamily="34" charset="-120"/>
+              </a:rPr>
+              <a:t>    megsToTest = mbToTest;  loopIters = megsToTest/2;   // N = MB/2</a:t>
+            </a:r>
+            <a:endParaRPr lang="en-US" sz="1300" dirty="0"/>
+          </a:p>
+          <a:p>
+            <a:pPr algn="l" indent="0" marL="0">
               <a:lnSpc>
                 <a:spcPct val="110000"/>
               </a:lnSpc>
               <a:buNone/>
             </a:pPr>
             <a:r>
+              <a:rPr lang="en-US" sz="1300" dirty="0">
+                <a:solidFill>
+                  <a:srgbClr val="3FB8C4"/>
+                </a:solidFill>
+                <a:latin typeface="Courier New" pitchFamily="34" charset="0"/>
+                <a:ea typeface="Courier New" pitchFamily="34" charset="-122"/>
+                <a:cs typeface="Courier New" pitchFamily="34" charset="-120"/>
+              </a:rPr>
+              <a:t>    cudaMalloc(&amp;devTestMem, (size_t)megsToTest*1048576);  // 테스트 영역</a:t>
+            </a:r>
+            <a:endParaRPr lang="en-US" sz="1300" dirty="0"/>
+          </a:p>
+          <a:p>
+            <a:pPr algn="l" indent="0" marL="0">
+              <a:lnSpc>
+                <a:spcPct val="110000"/>
+              </a:lnSpc>
+              <a:buNone/>
+            </a:pPr>
+            <a:r>
+              <a:rPr lang="en-US" sz="1300" dirty="0">
+                <a:solidFill>
+                  <a:srgbClr val="3FB8C4"/>
+                </a:solidFill>
+                <a:latin typeface="Courier New" pitchFamily="34" charset="0"/>
+                <a:ea typeface="Courier New" pitchFamily="34" charset="-122"/>
+                <a:cs typeface="Courier New" pitchFamily="34" charset="-120"/>
+              </a:rPr>
+              <a:t>    cudaMalloc(&amp;devTempMem, sizeof(uint)*nBlocks);        // 블록별 오류 수</a:t>
+            </a:r>
+            <a:endParaRPr lang="en-US" sz="1300" dirty="0"/>
+          </a:p>
+          <a:p>
+            <a:pPr algn="l" indent="0" marL="0">
+              <a:lnSpc>
+                <a:spcPct val="110000"/>
+              </a:lnSpc>
+              <a:buNone/>
+            </a:pPr>
+            <a:r>
+              <a:rPr lang="en-US" sz="1300" dirty="0">
+                <a:solidFill>
+                  <a:srgbClr val="E7EDF5"/>
+                </a:solidFill>
+                <a:latin typeface="Courier New" pitchFamily="34" charset="0"/>
+                <a:ea typeface="Courier New" pitchFamily="34" charset="-122"/>
+                <a:cs typeface="Courier New" pitchFamily="34" charset="-120"/>
+              </a:rPr>
+              <a:t>    hostTempMem = (uint*)malloc(sizeof(uint)*nBlocks);    // 호스트 사본</a:t>
+            </a:r>
+            <a:endParaRPr lang="en-US" sz="1300" dirty="0"/>
+          </a:p>
+          <a:p>
+            <a:pPr algn="l" indent="0" marL="0">
+              <a:lnSpc>
+                <a:spcPct val="110000"/>
+              </a:lnSpc>
+              <a:buNone/>
+            </a:pPr>
+            <a:r>
+              <a:rPr lang="en-US" sz="1300" dirty="0">
+                <a:solidFill>
+                  <a:srgbClr val="E7EDF5"/>
+                </a:solidFill>
+                <a:latin typeface="Courier New" pitchFamily="34" charset="0"/>
+                <a:ea typeface="Courier New" pitchFamily="34" charset="-122"/>
+                <a:cs typeface="Courier New" pitchFamily="34" charset="-120"/>
+              </a:rPr>
+              <a:t>}</a:t>
+            </a:r>
+            <a:endParaRPr lang="en-US" sz="1300" dirty="0"/>
+          </a:p>
+        </p:txBody>
+      </p:sp>
+      <p:sp>
+        <p:nvSpPr>
+          <p:cNvPr id="6" name="Text 4"/>
+          <p:cNvSpPr/>
+          <p:nvPr/>
+        </p:nvSpPr>
+        <p:spPr>
+          <a:xfrm>
+            <a:off x="548640" y="4114800"/>
+            <a:ext cx="2468880" cy="502920"/>
+          </a:xfrm>
+          <a:prstGeom prst="rect">
+            <a:avLst/>
+          </a:prstGeom>
+          <a:noFill/>
+          <a:ln/>
+        </p:spPr>
+        <p:txBody>
+          <a:bodyPr wrap="square" lIns="0" tIns="0" rIns="0" bIns="0" rtlCol="0" anchor="t"/>
+          <a:lstStyle/>
+          <a:p>
+            <a:pPr indent="0" marL="0">
+              <a:buNone/>
+            </a:pPr>
+            <a:r>
+              <a:rPr lang="en-US" sz="1400" b="1" dirty="0">
+                <a:solidFill>
+                  <a:srgbClr val="E8A33D"/>
+                </a:solidFill>
+                <a:latin typeface="Courier New" pitchFamily="34" charset="0"/>
+                <a:ea typeface="Courier New" pitchFamily="34" charset="-122"/>
+                <a:cs typeface="Courier New" pitchFamily="34" charset="-120"/>
+              </a:rPr>
+              <a:t>devTestMem</a:t>
+            </a:r>
+            <a:endParaRPr lang="en-US" sz="1400" dirty="0"/>
+          </a:p>
+        </p:txBody>
+      </p:sp>
+      <p:sp>
+        <p:nvSpPr>
+          <p:cNvPr id="7" name="Text 5"/>
+          <p:cNvSpPr/>
+          <p:nvPr/>
+        </p:nvSpPr>
+        <p:spPr>
+          <a:xfrm>
+            <a:off x="3200400" y="4114800"/>
+            <a:ext cx="8412480" cy="502920"/>
+          </a:xfrm>
+          <a:prstGeom prst="rect">
+            <a:avLst/>
+          </a:prstGeom>
+          <a:noFill/>
+          <a:ln/>
+        </p:spPr>
+        <p:txBody>
+          <a:bodyPr wrap="square" lIns="0" tIns="0" rIns="0" bIns="0" rtlCol="0" anchor="t"/>
+          <a:lstStyle/>
+          <a:p>
+            <a:pPr indent="0" marL="0">
+              <a:buNone/>
+            </a:pPr>
+            <a:r>
               <a:rPr lang="en-US" sz="1500" dirty="0">
                 <a:solidFill>
                   <a:srgbClr val="E7EDF5"/>
@@ -4576,7 +6437,163 @@
                 <a:ea typeface="Malgun Gothic" pitchFamily="34" charset="-122"/>
                 <a:cs typeface="Malgun Gothic" pitchFamily="34" charset="-120"/>
               </a:rPr>
-              <a:t>커널이 끝나야 모든 스레드의 쓰기가 전역 메모리에 확실히 반영됩니다. 그 다음에 읽어야 올바른 값을 검증할 수 있습니다.</a:t>
+              <a:t>실제로 검사할 전역 메모리 (수백 MB~GB)</a:t>
+            </a:r>
+            <a:endParaRPr lang="en-US" sz="1500" dirty="0"/>
+          </a:p>
+        </p:txBody>
+      </p:sp>
+      <p:sp>
+        <p:nvSpPr>
+          <p:cNvPr id="8" name="Text 6"/>
+          <p:cNvSpPr/>
+          <p:nvPr/>
+        </p:nvSpPr>
+        <p:spPr>
+          <a:xfrm>
+            <a:off x="548640" y="4681728"/>
+            <a:ext cx="2468880" cy="502920"/>
+          </a:xfrm>
+          <a:prstGeom prst="rect">
+            <a:avLst/>
+          </a:prstGeom>
+          <a:noFill/>
+          <a:ln/>
+        </p:spPr>
+        <p:txBody>
+          <a:bodyPr wrap="square" lIns="0" tIns="0" rIns="0" bIns="0" rtlCol="0" anchor="t"/>
+          <a:lstStyle/>
+          <a:p>
+            <a:pPr indent="0" marL="0">
+              <a:buNone/>
+            </a:pPr>
+            <a:r>
+              <a:rPr lang="en-US" sz="1400" b="1" dirty="0">
+                <a:solidFill>
+                  <a:srgbClr val="3FB8C4"/>
+                </a:solidFill>
+                <a:latin typeface="Courier New" pitchFamily="34" charset="0"/>
+                <a:ea typeface="Courier New" pitchFamily="34" charset="-122"/>
+                <a:cs typeface="Courier New" pitchFamily="34" charset="-120"/>
+              </a:rPr>
+              <a:t>devTempMem</a:t>
+            </a:r>
+            <a:endParaRPr lang="en-US" sz="1400" dirty="0"/>
+          </a:p>
+        </p:txBody>
+      </p:sp>
+      <p:sp>
+        <p:nvSpPr>
+          <p:cNvPr id="9" name="Text 7"/>
+          <p:cNvSpPr/>
+          <p:nvPr/>
+        </p:nvSpPr>
+        <p:spPr>
+          <a:xfrm>
+            <a:off x="3200400" y="4681728"/>
+            <a:ext cx="8412480" cy="502920"/>
+          </a:xfrm>
+          <a:prstGeom prst="rect">
+            <a:avLst/>
+          </a:prstGeom>
+          <a:noFill/>
+          <a:ln/>
+        </p:spPr>
+        <p:txBody>
+          <a:bodyPr wrap="square" lIns="0" tIns="0" rIns="0" bIns="0" rtlCol="0" anchor="t"/>
+          <a:lstStyle/>
+          <a:p>
+            <a:pPr indent="0" marL="0">
+              <a:buNone/>
+            </a:pPr>
+            <a:r>
+              <a:rPr lang="en-US" sz="1500" dirty="0">
+                <a:solidFill>
+                  <a:srgbClr val="E7EDF5"/>
+                </a:solidFill>
+                <a:latin typeface="Malgun Gothic" pitchFamily="34" charset="0"/>
+                <a:ea typeface="Malgun Gothic" pitchFamily="34" charset="-122"/>
+                <a:cs typeface="Malgun Gothic" pitchFamily="34" charset="-120"/>
+              </a:rPr>
+              <a:t>블록마다 오류 수 1개 — nBlocks(1024)개의 uint</a:t>
+            </a:r>
+            <a:endParaRPr lang="en-US" sz="1500" dirty="0"/>
+          </a:p>
+        </p:txBody>
+      </p:sp>
+      <p:sp>
+        <p:nvSpPr>
+          <p:cNvPr id="10" name="Text 8"/>
+          <p:cNvSpPr/>
+          <p:nvPr/>
+        </p:nvSpPr>
+        <p:spPr>
+          <a:xfrm>
+            <a:off x="548640" y="5248656"/>
+            <a:ext cx="2468880" cy="502920"/>
+          </a:xfrm>
+          <a:prstGeom prst="rect">
+            <a:avLst/>
+          </a:prstGeom>
+          <a:noFill/>
+          <a:ln/>
+        </p:spPr>
+        <p:txBody>
+          <a:bodyPr wrap="square" lIns="0" tIns="0" rIns="0" bIns="0" rtlCol="0" anchor="t"/>
+          <a:lstStyle/>
+          <a:p>
+            <a:pPr indent="0" marL="0">
+              <a:buNone/>
+            </a:pPr>
+            <a:r>
+              <a:rPr lang="en-US" sz="1400" b="1" dirty="0">
+                <a:solidFill>
+                  <a:srgbClr val="9FB0C4"/>
+                </a:solidFill>
+                <a:latin typeface="Courier New" pitchFamily="34" charset="0"/>
+                <a:ea typeface="Courier New" pitchFamily="34" charset="-122"/>
+                <a:cs typeface="Courier New" pitchFamily="34" charset="-120"/>
+              </a:rPr>
+              <a:t>hostTempMem</a:t>
+            </a:r>
+            <a:endParaRPr lang="en-US" sz="1400" dirty="0"/>
+          </a:p>
+        </p:txBody>
+      </p:sp>
+      <p:sp>
+        <p:nvSpPr>
+          <p:cNvPr id="11" name="Text 9"/>
+          <p:cNvSpPr/>
+          <p:nvPr/>
+        </p:nvSpPr>
+        <p:spPr>
+          <a:xfrm>
+            <a:off x="3200400" y="5248656"/>
+            <a:ext cx="8412480" cy="502920"/>
+          </a:xfrm>
+          <a:prstGeom prst="rect">
+            <a:avLst/>
+          </a:prstGeom>
+          <a:noFill/>
+          <a:ln/>
+        </p:spPr>
+        <p:txBody>
+          <a:bodyPr wrap="square" lIns="0" tIns="0" rIns="0" bIns="0" rtlCol="0" anchor="t"/>
+          <a:lstStyle/>
+          <a:p>
+            <a:pPr indent="0" marL="0">
+              <a:buNone/>
+            </a:pPr>
+            <a:r>
+              <a:rPr lang="en-US" sz="1500" dirty="0">
+                <a:solidFill>
+                  <a:srgbClr val="E7EDF5"/>
+                </a:solidFill>
+                <a:latin typeface="Malgun Gothic" pitchFamily="34" charset="0"/>
+                <a:ea typeface="Malgun Gothic" pitchFamily="34" charset="-122"/>
+                <a:cs typeface="Malgun Gothic" pitchFamily="34" charset="-120"/>
+              </a:rPr>
+              <a:t>devTempMem을 CPU로 복사해 최종 합산할 버퍼</a:t>
             </a:r>
             <a:endParaRPr lang="en-US" sz="1500" dirty="0"/>
           </a:p>
@@ -4651,7 +6668,7 @@
                 <a:ea typeface="Courier New" pitchFamily="34" charset="-122"/>
                 <a:cs typeface="Courier New" pitchFamily="34" charset="-120"/>
               </a:rPr>
-              <a:t>5</a:t>
+              <a:t>4</a:t>
             </a:r>
             <a:endParaRPr lang="en-US" sz="2200" dirty="0"/>
           </a:p>
@@ -4690,7 +6707,7 @@
                 <a:ea typeface="Malgun Gothic" pitchFamily="34" charset="-122"/>
                 <a:cs typeface="Malgun Gothic" pitchFamily="34" charset="-120"/>
               </a:rPr>
-              <a:t>커널 완료 기다리기 · SOFTWAIT</a:t>
+              <a:t>모든 테스트의 뼈대 · 쓰고 → 되읽는다</a:t>
             </a:r>
             <a:endParaRPr lang="en-US" sz="2900" dirty="0"/>
           </a:p>
@@ -4698,65 +6715,26 @@
       </p:sp>
       <p:sp>
         <p:nvSpPr>
-          <p:cNvPr id="4" name="Text 2"/>
-          <p:cNvSpPr/>
-          <p:nvPr/>
-        </p:nvSpPr>
-        <p:spPr>
-          <a:xfrm>
-            <a:off x="548640" y="1463040"/>
-            <a:ext cx="11064240" cy="457200"/>
-          </a:xfrm>
-          <a:prstGeom prst="rect">
-            <a:avLst/>
-          </a:prstGeom>
-          <a:noFill/>
-          <a:ln/>
-        </p:spPr>
-        <p:txBody>
-          <a:bodyPr wrap="square" lIns="0" tIns="0" rIns="0" bIns="0" rtlCol="0" anchor="ctr"/>
-          <a:lstStyle/>
-          <a:p>
-            <a:pPr indent="0" marL="0">
-              <a:buNone/>
-            </a:pPr>
-            <a:r>
-              <a:rPr lang="en-US" sz="1600" dirty="0">
-                <a:solidFill>
-                  <a:srgbClr val="9FB0C4"/>
-                </a:solidFill>
-                <a:latin typeface="Malgun Gothic" pitchFamily="34" charset="0"/>
-                <a:ea typeface="Malgun Gothic" pitchFamily="34" charset="-122"/>
-                <a:cs typeface="Malgun Gothic" pitchFamily="34" charset="-120"/>
-              </a:rPr>
-              <a:t>커널 launch는 비동기 — 호스트는 곧바로 리턴합니다. 결과를 읽기 전에 GPU 완료를 기다려야 합니다.</a:t>
-            </a:r>
-            <a:endParaRPr lang="en-US" sz="1600" dirty="0"/>
-          </a:p>
-        </p:txBody>
-      </p:sp>
-      <p:sp>
-        <p:nvSpPr>
-          <p:cNvPr id="5" name="Shape 3"/>
-          <p:cNvSpPr/>
-          <p:nvPr/>
-        </p:nvSpPr>
-        <p:spPr>
-          <a:xfrm>
-            <a:off x="548640" y="1965960"/>
-            <a:ext cx="11064240" cy="2194560"/>
+          <p:cNvPr id="4" name="Shape 2"/>
+          <p:cNvSpPr/>
+          <p:nvPr/>
+        </p:nvSpPr>
+        <p:spPr>
+          <a:xfrm>
+            <a:off x="548640" y="1828800"/>
+            <a:ext cx="3200400" cy="2743200"/>
           </a:xfrm>
           <a:prstGeom prst="roundRect">
             <a:avLst>
-              <a:gd name="adj" fmla="val 2083"/>
+              <a:gd name="adj" fmla="val 2667"/>
             </a:avLst>
           </a:prstGeom>
           <a:solidFill>
-            <a:srgbClr val="0B1119"/>
+            <a:srgbClr val="18212E"/>
           </a:solidFill>
-          <a:ln w="12700">
+          <a:ln w="19050">
             <a:solidFill>
-              <a:srgbClr val="2C3A4E"/>
+              <a:srgbClr val="E8A33D"/>
             </a:solidFill>
             <a:prstDash val="solid"/>
           </a:ln>
@@ -4764,14 +6742,92 @@
       </p:sp>
       <p:sp>
         <p:nvSpPr>
+          <p:cNvPr id="5" name="Text 3"/>
+          <p:cNvSpPr/>
+          <p:nvPr/>
+        </p:nvSpPr>
+        <p:spPr>
+          <a:xfrm>
+            <a:off x="777240" y="2011680"/>
+            <a:ext cx="2743200" cy="365760"/>
+          </a:xfrm>
+          <a:prstGeom prst="rect">
+            <a:avLst/>
+          </a:prstGeom>
+          <a:noFill/>
+          <a:ln/>
+        </p:spPr>
+        <p:txBody>
+          <a:bodyPr wrap="square" lIns="0" tIns="0" rIns="0" bIns="0" rtlCol="0" anchor="ctr"/>
+          <a:lstStyle/>
+          <a:p>
+            <a:pPr indent="0" marL="0">
+              <a:buNone/>
+            </a:pPr>
+            <a:r>
+              <a:rPr lang="en-US" sz="1300" b="1" dirty="0">
+                <a:solidFill>
+                  <a:srgbClr val="E8A33D"/>
+                </a:solidFill>
+                <a:latin typeface="Courier New" pitchFamily="34" charset="0"/>
+                <a:ea typeface="Courier New" pitchFamily="34" charset="-122"/>
+                <a:cs typeface="Courier New" pitchFamily="34" charset="-120"/>
+              </a:rPr>
+              <a:t>STEP 1</a:t>
+            </a:r>
+            <a:endParaRPr lang="en-US" sz="1300" dirty="0"/>
+          </a:p>
+        </p:txBody>
+      </p:sp>
+      <p:sp>
+        <p:nvSpPr>
           <p:cNvPr id="6" name="Text 4"/>
           <p:cNvSpPr/>
           <p:nvPr/>
         </p:nvSpPr>
         <p:spPr>
           <a:xfrm>
-            <a:off x="768096" y="2112264"/>
-            <a:ext cx="10625328" cy="1901952"/>
+            <a:off x="777240" y="2423160"/>
+            <a:ext cx="2743200" cy="457200"/>
+          </a:xfrm>
+          <a:prstGeom prst="rect">
+            <a:avLst/>
+          </a:prstGeom>
+          <a:noFill/>
+          <a:ln/>
+        </p:spPr>
+        <p:txBody>
+          <a:bodyPr wrap="square" lIns="0" tIns="0" rIns="0" bIns="0" rtlCol="0" anchor="ctr"/>
+          <a:lstStyle/>
+          <a:p>
+            <a:pPr indent="0" marL="0">
+              <a:buNone/>
+            </a:pPr>
+            <a:r>
+              <a:rPr lang="en-US" sz="2000" b="1" dirty="0">
+                <a:solidFill>
+                  <a:srgbClr val="E7EDF5"/>
+                </a:solidFill>
+                <a:latin typeface="Malgun Gothic" pitchFamily="34" charset="0"/>
+                <a:ea typeface="Malgun Gothic" pitchFamily="34" charset="-122"/>
+                <a:cs typeface="Malgun Gothic" pitchFamily="34" charset="-120"/>
+              </a:rPr>
+              <a:t>패턴 쓰기</a:t>
+            </a:r>
+            <a:endParaRPr lang="en-US" sz="2000" dirty="0"/>
+          </a:p>
+        </p:txBody>
+      </p:sp>
+      <p:sp>
+        <p:nvSpPr>
+          <p:cNvPr id="7" name="Text 5"/>
+          <p:cNvSpPr/>
+          <p:nvPr/>
+        </p:nvSpPr>
+        <p:spPr>
+          <a:xfrm>
+            <a:off x="777240" y="3017520"/>
+            <a:ext cx="2743200" cy="1371600"/>
           </a:xfrm>
           <a:prstGeom prst="rect">
             <a:avLst/>
@@ -4783,243 +6839,542 @@
           <a:bodyPr wrap="square" lIns="0" tIns="0" rIns="0" bIns="0" rtlCol="0" anchor="t"/>
           <a:lstStyle/>
           <a:p>
-            <a:pPr algn="l" indent="0" marL="0">
+            <a:pPr indent="0" marL="0">
+              <a:lnSpc>
+                <a:spcPct val="120000"/>
+              </a:lnSpc>
+              <a:buNone/>
+            </a:pPr>
+            <a:r>
+              <a:rPr lang="en-US" sz="1400" dirty="0">
+                <a:solidFill>
+                  <a:srgbClr val="9FB0C4"/>
+                </a:solidFill>
+                <a:latin typeface="Malgun Gothic" pitchFamily="34" charset="0"/>
+                <a:ea typeface="Malgun Gothic" pitchFamily="34" charset="-122"/>
+                <a:cs typeface="Malgun Gothic" pitchFamily="34" charset="-120"/>
+              </a:rPr>
+              <a:t>알려진 비트 패턴을 전 영역에 기록</a:t>
+            </a:r>
+            <a:endParaRPr lang="en-US" sz="1400" dirty="0"/>
+          </a:p>
+          <a:p>
+            <a:pPr indent="0" marL="0">
+              <a:lnSpc>
+                <a:spcPct val="120000"/>
+              </a:lnSpc>
+              <a:buNone/>
+            </a:pPr>
+            <a:r>
+              <a:rPr lang="en-US" sz="1400" dirty="0">
+                <a:solidFill>
+                  <a:srgbClr val="9FB0C4"/>
+                </a:solidFill>
+                <a:latin typeface="Malgun Gothic" pitchFamily="34" charset="0"/>
+                <a:ea typeface="Malgun Gothic" pitchFamily="34" charset="-122"/>
+                <a:cs typeface="Malgun Gothic" pitchFamily="34" charset="-120"/>
+              </a:rPr>
+              <a:t>deviceWriteConstant</a:t>
+            </a:r>
+            <a:endParaRPr lang="en-US" sz="1400" dirty="0"/>
+          </a:p>
+        </p:txBody>
+      </p:sp>
+      <p:sp>
+        <p:nvSpPr>
+          <p:cNvPr id="8" name="Text 6"/>
+          <p:cNvSpPr/>
+          <p:nvPr/>
+        </p:nvSpPr>
+        <p:spPr>
+          <a:xfrm>
+            <a:off x="3886200" y="2834640"/>
+            <a:ext cx="457200" cy="731520"/>
+          </a:xfrm>
+          <a:prstGeom prst="rect">
+            <a:avLst/>
+          </a:prstGeom>
+          <a:noFill/>
+          <a:ln/>
+        </p:spPr>
+        <p:txBody>
+          <a:bodyPr wrap="square" lIns="0" tIns="0" rIns="0" bIns="0" rtlCol="0" anchor="ctr"/>
+          <a:lstStyle/>
+          <a:p>
+            <a:pPr algn="ctr" indent="0" marL="0">
+              <a:buNone/>
+            </a:pPr>
+            <a:r>
+              <a:rPr lang="en-US" sz="3000" dirty="0">
+                <a:solidFill>
+                  <a:srgbClr val="6B7D94"/>
+                </a:solidFill>
+                <a:latin typeface="Malgun Gothic" pitchFamily="34" charset="0"/>
+                <a:ea typeface="Malgun Gothic" pitchFamily="34" charset="-122"/>
+                <a:cs typeface="Malgun Gothic" pitchFamily="34" charset="-120"/>
+              </a:rPr>
+              <a:t>→</a:t>
+            </a:r>
+            <a:endParaRPr lang="en-US" sz="3000" dirty="0"/>
+          </a:p>
+        </p:txBody>
+      </p:sp>
+      <p:sp>
+        <p:nvSpPr>
+          <p:cNvPr id="9" name="Shape 7"/>
+          <p:cNvSpPr/>
+          <p:nvPr/>
+        </p:nvSpPr>
+        <p:spPr>
+          <a:xfrm>
+            <a:off x="4480560" y="1828800"/>
+            <a:ext cx="3200400" cy="2743200"/>
+          </a:xfrm>
+          <a:prstGeom prst="roundRect">
+            <a:avLst>
+              <a:gd name="adj" fmla="val 2667"/>
+            </a:avLst>
+          </a:prstGeom>
+          <a:solidFill>
+            <a:srgbClr val="18212E"/>
+          </a:solidFill>
+          <a:ln w="19050">
+            <a:solidFill>
+              <a:srgbClr val="3FB8C4"/>
+            </a:solidFill>
+            <a:prstDash val="solid"/>
+          </a:ln>
+        </p:spPr>
+      </p:sp>
+      <p:sp>
+        <p:nvSpPr>
+          <p:cNvPr id="10" name="Text 8"/>
+          <p:cNvSpPr/>
+          <p:nvPr/>
+        </p:nvSpPr>
+        <p:spPr>
+          <a:xfrm>
+            <a:off x="4709160" y="2011680"/>
+            <a:ext cx="2743200" cy="365760"/>
+          </a:xfrm>
+          <a:prstGeom prst="rect">
+            <a:avLst/>
+          </a:prstGeom>
+          <a:noFill/>
+          <a:ln/>
+        </p:spPr>
+        <p:txBody>
+          <a:bodyPr wrap="square" lIns="0" tIns="0" rIns="0" bIns="0" rtlCol="0" anchor="ctr"/>
+          <a:lstStyle/>
+          <a:p>
+            <a:pPr indent="0" marL="0">
+              <a:buNone/>
+            </a:pPr>
+            <a:r>
+              <a:rPr lang="en-US" sz="1300" b="1" dirty="0">
+                <a:solidFill>
+                  <a:srgbClr val="3FB8C4"/>
+                </a:solidFill>
+                <a:latin typeface="Courier New" pitchFamily="34" charset="0"/>
+                <a:ea typeface="Courier New" pitchFamily="34" charset="-122"/>
+                <a:cs typeface="Courier New" pitchFamily="34" charset="-120"/>
+              </a:rPr>
+              <a:t>STEP 2</a:t>
+            </a:r>
+            <a:endParaRPr lang="en-US" sz="1300" dirty="0"/>
+          </a:p>
+        </p:txBody>
+      </p:sp>
+      <p:sp>
+        <p:nvSpPr>
+          <p:cNvPr id="11" name="Text 9"/>
+          <p:cNvSpPr/>
+          <p:nvPr/>
+        </p:nvSpPr>
+        <p:spPr>
+          <a:xfrm>
+            <a:off x="4709160" y="2423160"/>
+            <a:ext cx="2743200" cy="457200"/>
+          </a:xfrm>
+          <a:prstGeom prst="rect">
+            <a:avLst/>
+          </a:prstGeom>
+          <a:noFill/>
+          <a:ln/>
+        </p:spPr>
+        <p:txBody>
+          <a:bodyPr wrap="square" lIns="0" tIns="0" rIns="0" bIns="0" rtlCol="0" anchor="ctr"/>
+          <a:lstStyle/>
+          <a:p>
+            <a:pPr indent="0" marL="0">
+              <a:buNone/>
+            </a:pPr>
+            <a:r>
+              <a:rPr lang="en-US" sz="2000" b="1" dirty="0">
+                <a:solidFill>
+                  <a:srgbClr val="E7EDF5"/>
+                </a:solidFill>
+                <a:latin typeface="Malgun Gothic" pitchFamily="34" charset="0"/>
+                <a:ea typeface="Malgun Gothic" pitchFamily="34" charset="-122"/>
+                <a:cs typeface="Malgun Gothic" pitchFamily="34" charset="-120"/>
+              </a:rPr>
+              <a:t>커널 종료 대기</a:t>
+            </a:r>
+            <a:endParaRPr lang="en-US" sz="2000" dirty="0"/>
+          </a:p>
+        </p:txBody>
+      </p:sp>
+      <p:sp>
+        <p:nvSpPr>
+          <p:cNvPr id="12" name="Text 10"/>
+          <p:cNvSpPr/>
+          <p:nvPr/>
+        </p:nvSpPr>
+        <p:spPr>
+          <a:xfrm>
+            <a:off x="4709160" y="3017520"/>
+            <a:ext cx="2743200" cy="1371600"/>
+          </a:xfrm>
+          <a:prstGeom prst="rect">
+            <a:avLst/>
+          </a:prstGeom>
+          <a:noFill/>
+          <a:ln/>
+        </p:spPr>
+        <p:txBody>
+          <a:bodyPr wrap="square" lIns="0" tIns="0" rIns="0" bIns="0" rtlCol="0" anchor="t"/>
+          <a:lstStyle/>
+          <a:p>
+            <a:pPr indent="0" marL="0">
+              <a:lnSpc>
+                <a:spcPct val="120000"/>
+              </a:lnSpc>
+              <a:buNone/>
+            </a:pPr>
+            <a:r>
+              <a:rPr lang="en-US" sz="1400" dirty="0">
+                <a:solidFill>
+                  <a:srgbClr val="9FB0C4"/>
+                </a:solidFill>
+                <a:latin typeface="Malgun Gothic" pitchFamily="34" charset="0"/>
+                <a:ea typeface="Malgun Gothic" pitchFamily="34" charset="-122"/>
+                <a:cs typeface="Malgun Gothic" pitchFamily="34" charset="-120"/>
+              </a:rPr>
+              <a:t>SOFTWAIT()로 GPU 완료를 기다림</a:t>
+            </a:r>
+            <a:endParaRPr lang="en-US" sz="1400" dirty="0"/>
+          </a:p>
+          <a:p>
+            <a:pPr indent="0" marL="0">
+              <a:lnSpc>
+                <a:spcPct val="120000"/>
+              </a:lnSpc>
+              <a:buNone/>
+            </a:pPr>
+            <a:r>
+              <a:rPr lang="en-US" sz="1400" dirty="0">
+                <a:solidFill>
+                  <a:srgbClr val="9FB0C4"/>
+                </a:solidFill>
+                <a:latin typeface="Malgun Gothic" pitchFamily="34" charset="0"/>
+                <a:ea typeface="Malgun Gothic" pitchFamily="34" charset="-122"/>
+                <a:cs typeface="Malgun Gothic" pitchFamily="34" charset="-120"/>
+              </a:rPr>
+              <a:t>= 메모리에 값이 확실히 반영</a:t>
+            </a:r>
+            <a:endParaRPr lang="en-US" sz="1400" dirty="0"/>
+          </a:p>
+        </p:txBody>
+      </p:sp>
+      <p:sp>
+        <p:nvSpPr>
+          <p:cNvPr id="13" name="Text 11"/>
+          <p:cNvSpPr/>
+          <p:nvPr/>
+        </p:nvSpPr>
+        <p:spPr>
+          <a:xfrm>
+            <a:off x="7818120" y="2834640"/>
+            <a:ext cx="457200" cy="731520"/>
+          </a:xfrm>
+          <a:prstGeom prst="rect">
+            <a:avLst/>
+          </a:prstGeom>
+          <a:noFill/>
+          <a:ln/>
+        </p:spPr>
+        <p:txBody>
+          <a:bodyPr wrap="square" lIns="0" tIns="0" rIns="0" bIns="0" rtlCol="0" anchor="ctr"/>
+          <a:lstStyle/>
+          <a:p>
+            <a:pPr algn="ctr" indent="0" marL="0">
+              <a:buNone/>
+            </a:pPr>
+            <a:r>
+              <a:rPr lang="en-US" sz="3000" dirty="0">
+                <a:solidFill>
+                  <a:srgbClr val="6B7D94"/>
+                </a:solidFill>
+                <a:latin typeface="Malgun Gothic" pitchFamily="34" charset="0"/>
+                <a:ea typeface="Malgun Gothic" pitchFamily="34" charset="-122"/>
+                <a:cs typeface="Malgun Gothic" pitchFamily="34" charset="-120"/>
+              </a:rPr>
+              <a:t>→</a:t>
+            </a:r>
+            <a:endParaRPr lang="en-US" sz="3000" dirty="0"/>
+          </a:p>
+        </p:txBody>
+      </p:sp>
+      <p:sp>
+        <p:nvSpPr>
+          <p:cNvPr id="14" name="Shape 12"/>
+          <p:cNvSpPr/>
+          <p:nvPr/>
+        </p:nvSpPr>
+        <p:spPr>
+          <a:xfrm>
+            <a:off x="8412480" y="1828800"/>
+            <a:ext cx="3200400" cy="2743200"/>
+          </a:xfrm>
+          <a:prstGeom prst="roundRect">
+            <a:avLst>
+              <a:gd name="adj" fmla="val 2667"/>
+            </a:avLst>
+          </a:prstGeom>
+          <a:solidFill>
+            <a:srgbClr val="18212E"/>
+          </a:solidFill>
+          <a:ln w="19050">
+            <a:solidFill>
+              <a:srgbClr val="E8A33D"/>
+            </a:solidFill>
+            <a:prstDash val="solid"/>
+          </a:ln>
+        </p:spPr>
+      </p:sp>
+      <p:sp>
+        <p:nvSpPr>
+          <p:cNvPr id="15" name="Text 13"/>
+          <p:cNvSpPr/>
+          <p:nvPr/>
+        </p:nvSpPr>
+        <p:spPr>
+          <a:xfrm>
+            <a:off x="8641080" y="2011680"/>
+            <a:ext cx="2743200" cy="365760"/>
+          </a:xfrm>
+          <a:prstGeom prst="rect">
+            <a:avLst/>
+          </a:prstGeom>
+          <a:noFill/>
+          <a:ln/>
+        </p:spPr>
+        <p:txBody>
+          <a:bodyPr wrap="square" lIns="0" tIns="0" rIns="0" bIns="0" rtlCol="0" anchor="ctr"/>
+          <a:lstStyle/>
+          <a:p>
+            <a:pPr indent="0" marL="0">
+              <a:buNone/>
+            </a:pPr>
+            <a:r>
+              <a:rPr lang="en-US" sz="1300" b="1" dirty="0">
+                <a:solidFill>
+                  <a:srgbClr val="E8A33D"/>
+                </a:solidFill>
+                <a:latin typeface="Courier New" pitchFamily="34" charset="0"/>
+                <a:ea typeface="Courier New" pitchFamily="34" charset="-122"/>
+                <a:cs typeface="Courier New" pitchFamily="34" charset="-120"/>
+              </a:rPr>
+              <a:t>STEP 3</a:t>
+            </a:r>
+            <a:endParaRPr lang="en-US" sz="1300" dirty="0"/>
+          </a:p>
+        </p:txBody>
+      </p:sp>
+      <p:sp>
+        <p:nvSpPr>
+          <p:cNvPr id="16" name="Text 14"/>
+          <p:cNvSpPr/>
+          <p:nvPr/>
+        </p:nvSpPr>
+        <p:spPr>
+          <a:xfrm>
+            <a:off x="8641080" y="2423160"/>
+            <a:ext cx="2743200" cy="457200"/>
+          </a:xfrm>
+          <a:prstGeom prst="rect">
+            <a:avLst/>
+          </a:prstGeom>
+          <a:noFill/>
+          <a:ln/>
+        </p:spPr>
+        <p:txBody>
+          <a:bodyPr wrap="square" lIns="0" tIns="0" rIns="0" bIns="0" rtlCol="0" anchor="ctr"/>
+          <a:lstStyle/>
+          <a:p>
+            <a:pPr indent="0" marL="0">
+              <a:buNone/>
+            </a:pPr>
+            <a:r>
+              <a:rPr lang="en-US" sz="2000" b="1" dirty="0">
+                <a:solidFill>
+                  <a:srgbClr val="E7EDF5"/>
+                </a:solidFill>
+                <a:latin typeface="Malgun Gothic" pitchFamily="34" charset="0"/>
+                <a:ea typeface="Malgun Gothic" pitchFamily="34" charset="-122"/>
+                <a:cs typeface="Malgun Gothic" pitchFamily="34" charset="-120"/>
+              </a:rPr>
+              <a:t>되읽고 검증</a:t>
+            </a:r>
+            <a:endParaRPr lang="en-US" sz="2000" dirty="0"/>
+          </a:p>
+        </p:txBody>
+      </p:sp>
+      <p:sp>
+        <p:nvSpPr>
+          <p:cNvPr id="17" name="Text 15"/>
+          <p:cNvSpPr/>
+          <p:nvPr/>
+        </p:nvSpPr>
+        <p:spPr>
+          <a:xfrm>
+            <a:off x="8641080" y="3017520"/>
+            <a:ext cx="2743200" cy="1371600"/>
+          </a:xfrm>
+          <a:prstGeom prst="rect">
+            <a:avLst/>
+          </a:prstGeom>
+          <a:noFill/>
+          <a:ln/>
+        </p:spPr>
+        <p:txBody>
+          <a:bodyPr wrap="square" lIns="0" tIns="0" rIns="0" bIns="0" rtlCol="0" anchor="t"/>
+          <a:lstStyle/>
+          <a:p>
+            <a:pPr indent="0" marL="0">
+              <a:lnSpc>
+                <a:spcPct val="120000"/>
+              </a:lnSpc>
+              <a:buNone/>
+            </a:pPr>
+            <a:r>
+              <a:rPr lang="en-US" sz="1400" dirty="0">
+                <a:solidFill>
+                  <a:srgbClr val="9FB0C4"/>
+                </a:solidFill>
+                <a:latin typeface="Malgun Gothic" pitchFamily="34" charset="0"/>
+                <a:ea typeface="Malgun Gothic" pitchFamily="34" charset="-122"/>
+                <a:cs typeface="Malgun Gothic" pitchFamily="34" charset="-120"/>
+              </a:rPr>
+              <a:t>기대값과 비교, 틀린 비트 수 집계</a:t>
+            </a:r>
+            <a:endParaRPr lang="en-US" sz="1400" dirty="0"/>
+          </a:p>
+          <a:p>
+            <a:pPr indent="0" marL="0">
+              <a:lnSpc>
+                <a:spcPct val="120000"/>
+              </a:lnSpc>
+              <a:buNone/>
+            </a:pPr>
+            <a:r>
+              <a:rPr lang="en-US" sz="1400" dirty="0">
+                <a:solidFill>
+                  <a:srgbClr val="9FB0C4"/>
+                </a:solidFill>
+                <a:latin typeface="Malgun Gothic" pitchFamily="34" charset="0"/>
+                <a:ea typeface="Malgun Gothic" pitchFamily="34" charset="-122"/>
+                <a:cs typeface="Malgun Gothic" pitchFamily="34" charset="-120"/>
+              </a:rPr>
+              <a:t>deviceVerifyConstant</a:t>
+            </a:r>
+            <a:endParaRPr lang="en-US" sz="1400" dirty="0"/>
+          </a:p>
+        </p:txBody>
+      </p:sp>
+      <p:sp>
+        <p:nvSpPr>
+          <p:cNvPr id="18" name="Shape 16"/>
+          <p:cNvSpPr/>
+          <p:nvPr/>
+        </p:nvSpPr>
+        <p:spPr>
+          <a:xfrm>
+            <a:off x="548640" y="4892040"/>
+            <a:ext cx="11064240" cy="914400"/>
+          </a:xfrm>
+          <a:prstGeom prst="roundRect">
+            <a:avLst>
+              <a:gd name="adj" fmla="val 8000"/>
+            </a:avLst>
+          </a:prstGeom>
+          <a:solidFill>
+            <a:srgbClr val="241A16"/>
+          </a:solidFill>
+          <a:ln w="19050">
+            <a:solidFill>
+              <a:srgbClr val="E8A33D"/>
+            </a:solidFill>
+            <a:prstDash val="solid"/>
+          </a:ln>
+        </p:spPr>
+      </p:sp>
+      <p:sp>
+        <p:nvSpPr>
+          <p:cNvPr id="19" name="Text 17"/>
+          <p:cNvSpPr/>
+          <p:nvPr/>
+        </p:nvSpPr>
+        <p:spPr>
+          <a:xfrm>
+            <a:off x="822960" y="5074920"/>
+            <a:ext cx="10515600" cy="640080"/>
+          </a:xfrm>
+          <a:prstGeom prst="rect">
+            <a:avLst/>
+          </a:prstGeom>
+          <a:noFill/>
+          <a:ln/>
+        </p:spPr>
+        <p:txBody>
+          <a:bodyPr wrap="square" lIns="0" tIns="0" rIns="0" bIns="0" rtlCol="0" anchor="t"/>
+          <a:lstStyle/>
+          <a:p>
+            <a:pPr indent="0" marL="0">
               <a:lnSpc>
                 <a:spcPct val="110000"/>
               </a:lnSpc>
               <a:buNone/>
             </a:pPr>
             <a:r>
-              <a:rPr lang="en-US" sz="1250" dirty="0">
-                <a:solidFill>
-                  <a:srgbClr val="6B7D94"/>
-                </a:solidFill>
-                <a:latin typeface="Courier New" pitchFamily="34" charset="0"/>
-                <a:ea typeface="Courier New" pitchFamily="34" charset="-122"/>
-                <a:cs typeface="Courier New" pitchFamily="34" charset="-120"/>
-              </a:rPr>
-              <a:t>// core.h:40 — 스핀 대신 슬립하며 폴링 (드라이버 스핀웨이트 회피)</a:t>
-            </a:r>
-            <a:endParaRPr lang="en-US" sz="1250" dirty="0"/>
-          </a:p>
-          <a:p>
-            <a:pPr algn="l" indent="0" marL="0">
+              <a:rPr lang="en-US" sz="1500" b="1" dirty="0">
+                <a:solidFill>
+                  <a:srgbClr val="E8A33D"/>
+                </a:solidFill>
+                <a:latin typeface="Malgun Gothic" pitchFamily="34" charset="0"/>
+                <a:ea typeface="Malgun Gothic" pitchFamily="34" charset="-122"/>
+                <a:cs typeface="Malgun Gothic" pitchFamily="34" charset="-120"/>
+              </a:rPr>
+              <a:t>왜 쓰기와 읽기를 나눌까? </a:t>
+            </a:r>
+            <a:pPr indent="0" marL="0">
               <a:lnSpc>
                 <a:spcPct val="110000"/>
               </a:lnSpc>
               <a:buNone/>
             </a:pPr>
             <a:r>
-              <a:rPr lang="en-US" sz="1250" dirty="0">
+              <a:rPr lang="en-US" sz="1500" dirty="0">
                 <a:solidFill>
                   <a:srgbClr val="E7EDF5"/>
                 </a:solidFill>
-                <a:latin typeface="Courier New" pitchFamily="34" charset="0"/>
-                <a:ea typeface="Courier New" pitchFamily="34" charset="-122"/>
-                <a:cs typeface="Courier New" pitchFamily="34" charset="-120"/>
-              </a:rPr>
-              <a:t>inline int _pollStatus(unsigned length=1, unsigned limit=15000) {</a:t>
-            </a:r>
-            <a:endParaRPr lang="en-US" sz="1250" dirty="0"/>
-          </a:p>
-          <a:p>
-            <a:pPr algn="l" indent="0" marL="0">
-              <a:lnSpc>
-                <a:spcPct val="110000"/>
-              </a:lnSpc>
-              <a:buNone/>
-            </a:pPr>
-            <a:r>
-              <a:rPr lang="en-US" sz="1250" dirty="0">
-                <a:solidFill>
-                  <a:srgbClr val="E7EDF5"/>
-                </a:solidFill>
-                <a:latin typeface="Courier New" pitchFamily="34" charset="0"/>
-                <a:ea typeface="Courier New" pitchFamily="34" charset="-122"/>
-                <a:cs typeface="Courier New" pitchFamily="34" charset="-120"/>
-              </a:rPr>
-              <a:t>    unsigned startTime = getTimeMilliseconds();</a:t>
-            </a:r>
-            <a:endParaRPr lang="en-US" sz="1250" dirty="0"/>
-          </a:p>
-          <a:p>
-            <a:pPr algn="l" indent="0" marL="0">
-              <a:lnSpc>
-                <a:spcPct val="110000"/>
-              </a:lnSpc>
-              <a:buNone/>
-            </a:pPr>
-            <a:r>
-              <a:rPr lang="en-US" sz="1250" dirty="0">
-                <a:solidFill>
-                  <a:srgbClr val="F2C079"/>
-                </a:solidFill>
-                <a:latin typeface="Courier New" pitchFamily="34" charset="0"/>
-                <a:ea typeface="Courier New" pitchFamily="34" charset="-122"/>
-                <a:cs typeface="Courier New" pitchFamily="34" charset="-120"/>
-              </a:rPr>
-              <a:t>    while (cudaStreamQuery(0) == cudaErrorNotReady) {</a:t>
-            </a:r>
-            <a:endParaRPr lang="en-US" sz="1250" dirty="0"/>
-          </a:p>
-          <a:p>
-            <a:pPr algn="l" indent="0" marL="0">
-              <a:lnSpc>
-                <a:spcPct val="110000"/>
-              </a:lnSpc>
-              <a:buNone/>
-            </a:pPr>
-            <a:r>
-              <a:rPr lang="en-US" sz="1250" dirty="0">
-                <a:solidFill>
-                  <a:srgbClr val="E6604F"/>
-                </a:solidFill>
-                <a:latin typeface="Courier New" pitchFamily="34" charset="0"/>
-                <a:ea typeface="Courier New" pitchFamily="34" charset="-122"/>
-                <a:cs typeface="Courier New" pitchFamily="34" charset="-120"/>
-              </a:rPr>
-              <a:t>        if ((getTimeMilliseconds() - startTime) &gt; limit) return -1;  // 타임아웃</a:t>
-            </a:r>
-            <a:endParaRPr lang="en-US" sz="1250" dirty="0"/>
-          </a:p>
-          <a:p>
-            <a:pPr algn="l" indent="0" marL="0">
-              <a:lnSpc>
-                <a:spcPct val="110000"/>
-              </a:lnSpc>
-              <a:buNone/>
-            </a:pPr>
-            <a:r>
-              <a:rPr lang="en-US" sz="1250" dirty="0">
-                <a:solidFill>
-                  <a:srgbClr val="E7EDF5"/>
-                </a:solidFill>
-                <a:latin typeface="Courier New" pitchFamily="34" charset="0"/>
-                <a:ea typeface="Courier New" pitchFamily="34" charset="-122"/>
-                <a:cs typeface="Courier New" pitchFamily="34" charset="-120"/>
-              </a:rPr>
-              <a:t>        SLEEPMS(length);</a:t>
-            </a:r>
-            <a:endParaRPr lang="en-US" sz="1250" dirty="0"/>
-          </a:p>
-          <a:p>
-            <a:pPr algn="l" indent="0" marL="0">
-              <a:lnSpc>
-                <a:spcPct val="110000"/>
-              </a:lnSpc>
-              <a:buNone/>
-            </a:pPr>
-            <a:r>
-              <a:rPr lang="en-US" sz="1250" dirty="0">
-                <a:solidFill>
-                  <a:srgbClr val="E7EDF5"/>
-                </a:solidFill>
-                <a:latin typeface="Courier New" pitchFamily="34" charset="0"/>
-                <a:ea typeface="Courier New" pitchFamily="34" charset="-122"/>
-                <a:cs typeface="Courier New" pitchFamily="34" charset="-120"/>
-              </a:rPr>
-              <a:t>    }</a:t>
-            </a:r>
-            <a:endParaRPr lang="en-US" sz="1250" dirty="0"/>
-          </a:p>
-          <a:p>
-            <a:pPr algn="l" indent="0" marL="0">
-              <a:lnSpc>
-                <a:spcPct val="110000"/>
-              </a:lnSpc>
-              <a:buNone/>
-            </a:pPr>
-            <a:r>
-              <a:rPr lang="en-US" sz="1250" dirty="0">
-                <a:solidFill>
-                  <a:srgbClr val="E7EDF5"/>
-                </a:solidFill>
-                <a:latin typeface="Courier New" pitchFamily="34" charset="0"/>
-                <a:ea typeface="Courier New" pitchFamily="34" charset="-122"/>
-                <a:cs typeface="Courier New" pitchFamily="34" charset="-120"/>
-              </a:rPr>
-              <a:t>    return 0;</a:t>
-            </a:r>
-            <a:endParaRPr lang="en-US" sz="1250" dirty="0"/>
-          </a:p>
-          <a:p>
-            <a:pPr algn="l" indent="0" marL="0">
-              <a:lnSpc>
-                <a:spcPct val="110000"/>
-              </a:lnSpc>
-              <a:buNone/>
-            </a:pPr>
-            <a:r>
-              <a:rPr lang="en-US" sz="1250" dirty="0">
-                <a:solidFill>
-                  <a:srgbClr val="E7EDF5"/>
-                </a:solidFill>
-                <a:latin typeface="Courier New" pitchFamily="34" charset="0"/>
-                <a:ea typeface="Courier New" pitchFamily="34" charset="-122"/>
-                <a:cs typeface="Courier New" pitchFamily="34" charset="-120"/>
-              </a:rPr>
-              <a:t>}</a:t>
-            </a:r>
-            <a:endParaRPr lang="en-US" sz="1250" dirty="0"/>
-          </a:p>
-          <a:p>
-            <a:pPr algn="l" indent="0" marL="0">
-              <a:lnSpc>
-                <a:spcPct val="110000"/>
-              </a:lnSpc>
-              <a:buNone/>
-            </a:pPr>
-            <a:r>
-              <a:rPr lang="en-US" sz="1250" dirty="0">
-                <a:solidFill>
-                  <a:srgbClr val="3FB8C4"/>
-                </a:solidFill>
-                <a:latin typeface="Courier New" pitchFamily="34" charset="0"/>
-                <a:ea typeface="Courier New" pitchFamily="34" charset="-122"/>
-                <a:cs typeface="Courier New" pitchFamily="34" charset="-120"/>
-              </a:rPr>
-              <a:t>#define SOFTWAIT() if (_pollStatus() != 0) { return 0xFFFFFFFE; }  // 타임아웃 센티넬</a:t>
-            </a:r>
-            <a:endParaRPr lang="en-US" sz="1250" dirty="0"/>
-          </a:p>
-        </p:txBody>
-      </p:sp>
-      <p:sp>
-        <p:nvSpPr>
-          <p:cNvPr id="7" name="Text 5"/>
-          <p:cNvSpPr/>
-          <p:nvPr/>
-        </p:nvSpPr>
-        <p:spPr>
-          <a:xfrm>
-            <a:off x="548640" y="4297680"/>
-            <a:ext cx="11064240" cy="457200"/>
-          </a:xfrm>
-          <a:prstGeom prst="rect">
-            <a:avLst/>
-          </a:prstGeom>
-          <a:noFill/>
-          <a:ln/>
-        </p:spPr>
-        <p:txBody>
-          <a:bodyPr wrap="square" lIns="0" tIns="0" rIns="0" bIns="0" rtlCol="0" anchor="ctr"/>
-          <a:lstStyle/>
-          <a:p>
-            <a:pPr indent="0" marL="0">
-              <a:buNone/>
-            </a:pPr>
-            <a:r>
-              <a:rPr lang="en-US" sz="1350" i="1" dirty="0">
-                <a:solidFill>
-                  <a:srgbClr val="9FB0C4"/>
-                </a:solidFill>
-                <a:latin typeface="Malgun Gothic" pitchFamily="34" charset="0"/>
-                <a:ea typeface="Malgun Gothic" pitchFamily="34" charset="-122"/>
-                <a:cs typeface="Malgun Gothic" pitchFamily="34" charset="-120"/>
-              </a:rPr>
-              <a:t>기본 15초 안에 커널이 안 끝나면 타임아웃 → 0xFFFFFFFE 반환. 디스플레이 구동 GPU의 워치독 대비책.</a:t>
-            </a:r>
-            <a:endParaRPr lang="en-US" sz="1350" dirty="0"/>
+                <a:latin typeface="Malgun Gothic" pitchFamily="34" charset="0"/>
+                <a:ea typeface="Malgun Gothic" pitchFamily="34" charset="-122"/>
+                <a:cs typeface="Malgun Gothic" pitchFamily="34" charset="-120"/>
+              </a:rPr>
+              <a:t>커널이 끝나야 모든 스레드의 쓰기가 전역 메모리에 확실히 반영됩니다. 그 다음에 읽어야 올바른 값을 검증할 수 있습니다.</a:t>
+            </a:r>
+            <a:endParaRPr lang="en-US" sz="1500" dirty="0"/>
           </a:p>
         </p:txBody>
       </p:sp>
@@ -5092,7 +7447,7 @@
                 <a:ea typeface="Courier New" pitchFamily="34" charset="-122"/>
                 <a:cs typeface="Courier New" pitchFamily="34" charset="-120"/>
               </a:rPr>
-              <a:t>6</a:t>
+              <a:t>5</a:t>
             </a:r>
             <a:endParaRPr lang="en-US" sz="2200" dirty="0"/>
           </a:p>
@@ -5131,7 +7486,7 @@
                 <a:ea typeface="Malgun Gothic" pitchFamily="34" charset="-122"/>
                 <a:cs typeface="Malgun Gothic" pitchFamily="34" charset="-120"/>
               </a:rPr>
-              <a:t>Moving Inversions · 가장 고전적인 테스트</a:t>
+              <a:t>커널 완료 기다리기 · SOFTWAIT</a:t>
             </a:r>
             <a:endParaRPr lang="en-US" sz="2900" dirty="0"/>
           </a:p>
@@ -5139,18 +7494,57 @@
       </p:sp>
       <p:sp>
         <p:nvSpPr>
-          <p:cNvPr id="4" name="Shape 2"/>
-          <p:cNvSpPr/>
-          <p:nvPr/>
-        </p:nvSpPr>
-        <p:spPr>
-          <a:xfrm>
-            <a:off x="548640" y="1508760"/>
-            <a:ext cx="11064240" cy="2103120"/>
+          <p:cNvPr id="4" name="Text 2"/>
+          <p:cNvSpPr/>
+          <p:nvPr/>
+        </p:nvSpPr>
+        <p:spPr>
+          <a:xfrm>
+            <a:off x="548640" y="1463040"/>
+            <a:ext cx="11064240" cy="457200"/>
+          </a:xfrm>
+          <a:prstGeom prst="rect">
+            <a:avLst/>
+          </a:prstGeom>
+          <a:noFill/>
+          <a:ln/>
+        </p:spPr>
+        <p:txBody>
+          <a:bodyPr wrap="square" lIns="0" tIns="0" rIns="0" bIns="0" rtlCol="0" anchor="ctr"/>
+          <a:lstStyle/>
+          <a:p>
+            <a:pPr indent="0" marL="0">
+              <a:buNone/>
+            </a:pPr>
+            <a:r>
+              <a:rPr lang="en-US" sz="1600" dirty="0">
+                <a:solidFill>
+                  <a:srgbClr val="9FB0C4"/>
+                </a:solidFill>
+                <a:latin typeface="Malgun Gothic" pitchFamily="34" charset="0"/>
+                <a:ea typeface="Malgun Gothic" pitchFamily="34" charset="-122"/>
+                <a:cs typeface="Malgun Gothic" pitchFamily="34" charset="-120"/>
+              </a:rPr>
+              <a:t>커널 launch는 비동기 — 호스트는 곧바로 리턴합니다. 결과를 읽기 전에 GPU 완료를 기다려야 합니다.</a:t>
+            </a:r>
+            <a:endParaRPr lang="en-US" sz="1600" dirty="0"/>
+          </a:p>
+        </p:txBody>
+      </p:sp>
+      <p:sp>
+        <p:nvSpPr>
+          <p:cNvPr id="5" name="Shape 3"/>
+          <p:cNvSpPr/>
+          <p:nvPr/>
+        </p:nvSpPr>
+        <p:spPr>
+          <a:xfrm>
+            <a:off x="548640" y="1965960"/>
+            <a:ext cx="11064240" cy="2194560"/>
           </a:xfrm>
           <a:prstGeom prst="roundRect">
             <a:avLst>
-              <a:gd name="adj" fmla="val 2174"/>
+              <a:gd name="adj" fmla="val 2083"/>
             </a:avLst>
           </a:prstGeom>
           <a:solidFill>
@@ -5166,14 +7560,14 @@
       </p:sp>
       <p:sp>
         <p:nvSpPr>
-          <p:cNvPr id="5" name="Text 3"/>
-          <p:cNvSpPr/>
-          <p:nvPr/>
-        </p:nvSpPr>
-        <p:spPr>
-          <a:xfrm>
-            <a:off x="768096" y="1655064"/>
-            <a:ext cx="10625328" cy="1810512"/>
+          <p:cNvPr id="6" name="Text 4"/>
+          <p:cNvSpPr/>
+          <p:nvPr/>
+        </p:nvSpPr>
+        <p:spPr>
+          <a:xfrm>
+            <a:off x="768096" y="2112264"/>
+            <a:ext cx="10625328" cy="1901952"/>
           </a:xfrm>
           <a:prstGeom prst="rect">
             <a:avLst/>
@@ -5192,7 +7586,7 @@
               <a:buNone/>
             </a:pPr>
             <a:r>
-              <a:rPr lang="en-US" sz="1300" dirty="0">
+              <a:rPr lang="en-US" sz="1250" dirty="0">
                 <a:solidFill>
                   <a:srgbClr val="6B7D94"/>
                 </a:solidFill>
@@ -5200,9 +7594,9 @@
                 <a:ea typeface="Courier New" pitchFamily="34" charset="-122"/>
                 <a:cs typeface="Courier New" pitchFamily="34" charset="-120"/>
               </a:rPr>
-              <a:t>// core.cu:370 — gpuMovingInversionsOnesZeros</a:t>
-            </a:r>
-            <a:endParaRPr lang="en-US" sz="1300" dirty="0"/>
+              <a:t>// core.h:40 — 스핀 대신 슬립하며 폴링 (드라이버 스핀웨이트 회피)</a:t>
+            </a:r>
+            <a:endParaRPr lang="en-US" sz="1250" dirty="0"/>
           </a:p>
           <a:p>
             <a:pPr algn="l" indent="0" marL="0">
@@ -5212,17 +7606,17 @@
               <a:buNone/>
             </a:pPr>
             <a:r>
-              <a:rPr lang="en-US" sz="1300" dirty="0">
-                <a:solidFill>
-                  <a:srgbClr val="F2C079"/>
+              <a:rPr lang="en-US" sz="1250" dirty="0">
+                <a:solidFill>
+                  <a:srgbClr val="E7EDF5"/>
                 </a:solidFill>
                 <a:latin typeface="Courier New" pitchFamily="34" charset="0"/>
                 <a:ea typeface="Courier New" pitchFamily="34" charset="-122"/>
                 <a:cs typeface="Courier New" pitchFamily="34" charset="-120"/>
               </a:rPr>
-              <a:t>gpuWriteConstant (..., 0xFFFFFFFF);          // 전부 1을 쓴다</a:t>
-            </a:r>
-            <a:endParaRPr lang="en-US" sz="1300" dirty="0"/>
+              <a:t>inline int _pollStatus(unsigned length=1, unsigned limit=15000) {</a:t>
+            </a:r>
+            <a:endParaRPr lang="en-US" sz="1250" dirty="0"/>
           </a:p>
           <a:p>
             <a:pPr algn="l" indent="0" marL="0">
@@ -5232,17 +7626,17 @@
               <a:buNone/>
             </a:pPr>
             <a:r>
-              <a:rPr lang="en-US" sz="1300" dirty="0">
-                <a:solidFill>
-                  <a:srgbClr val="3FB8C4"/>
+              <a:rPr lang="en-US" sz="1250" dirty="0">
+                <a:solidFill>
+                  <a:srgbClr val="E7EDF5"/>
                 </a:solidFill>
                 <a:latin typeface="Courier New" pitchFamily="34" charset="0"/>
                 <a:ea typeface="Courier New" pitchFamily="34" charset="-122"/>
                 <a:cs typeface="Courier New" pitchFamily="34" charset="-120"/>
               </a:rPr>
-              <a:t>err  = gpuVerifyConstant(..., 0xFFFFFFFF);   // 1이 유지되는지 검증</a:t>
-            </a:r>
-            <a:endParaRPr lang="en-US" sz="1300" dirty="0"/>
+              <a:t>    unsigned startTime = getTimeMilliseconds();</a:t>
+            </a:r>
+            <a:endParaRPr lang="en-US" sz="1250" dirty="0"/>
           </a:p>
           <a:p>
             <a:pPr algn="l" indent="0" marL="0">
@@ -5251,7 +7645,18 @@
               </a:lnSpc>
               <a:buNone/>
             </a:pPr>
-            <a:endParaRPr lang="en-US" sz="1300" dirty="0"/>
+            <a:r>
+              <a:rPr lang="en-US" sz="1250" dirty="0">
+                <a:solidFill>
+                  <a:srgbClr val="F2C079"/>
+                </a:solidFill>
+                <a:latin typeface="Courier New" pitchFamily="34" charset="0"/>
+                <a:ea typeface="Courier New" pitchFamily="34" charset="-122"/>
+                <a:cs typeface="Courier New" pitchFamily="34" charset="-120"/>
+              </a:rPr>
+              <a:t>    while (cudaStreamQuery(0) == cudaErrorNotReady) {</a:t>
+            </a:r>
+            <a:endParaRPr lang="en-US" sz="1250" dirty="0"/>
           </a:p>
           <a:p>
             <a:pPr algn="l" indent="0" marL="0">
@@ -5261,17 +7666,17 @@
               <a:buNone/>
             </a:pPr>
             <a:r>
-              <a:rPr lang="en-US" sz="1300" dirty="0">
-                <a:solidFill>
-                  <a:srgbClr val="F2C079"/>
+              <a:rPr lang="en-US" sz="1250" dirty="0">
+                <a:solidFill>
+                  <a:srgbClr val="E6604F"/>
                 </a:solidFill>
                 <a:latin typeface="Courier New" pitchFamily="34" charset="0"/>
                 <a:ea typeface="Courier New" pitchFamily="34" charset="-122"/>
                 <a:cs typeface="Courier New" pitchFamily="34" charset="-120"/>
               </a:rPr>
-              <a:t>gpuWriteConstant (..., 0x0);                 // 보수(전부 0)를 덮어쓴다</a:t>
-            </a:r>
-            <a:endParaRPr lang="en-US" sz="1300" dirty="0"/>
+              <a:t>        if ((getTimeMilliseconds() - startTime) &gt; limit) return -1;  // 타임아웃</a:t>
+            </a:r>
+            <a:endParaRPr lang="en-US" sz="1250" dirty="0"/>
           </a:p>
           <a:p>
             <a:pPr algn="l" indent="0" marL="0">
@@ -5281,17 +7686,17 @@
               <a:buNone/>
             </a:pPr>
             <a:r>
-              <a:rPr lang="en-US" sz="1300" dirty="0">
-                <a:solidFill>
-                  <a:srgbClr val="3FB8C4"/>
+              <a:rPr lang="en-US" sz="1250" dirty="0">
+                <a:solidFill>
+                  <a:srgbClr val="E7EDF5"/>
                 </a:solidFill>
                 <a:latin typeface="Courier New" pitchFamily="34" charset="0"/>
                 <a:ea typeface="Courier New" pitchFamily="34" charset="-122"/>
                 <a:cs typeface="Courier New" pitchFamily="34" charset="-120"/>
               </a:rPr>
-              <a:t>err += gpuVerifyConstant(..., 0x0);          // 0이 유지되는지 검증</a:t>
-            </a:r>
-            <a:endParaRPr lang="en-US" sz="1300" dirty="0"/>
+              <a:t>        SLEEPMS(length);</a:t>
+            </a:r>
+            <a:endParaRPr lang="en-US" sz="1250" dirty="0"/>
           </a:p>
           <a:p>
             <a:pPr algn="l" indent="0" marL="0">
@@ -5301,7 +7706,7 @@
               <a:buNone/>
             </a:pPr>
             <a:r>
-              <a:rPr lang="en-US" sz="1300" dirty="0">
+              <a:rPr lang="en-US" sz="1250" dirty="0">
                 <a:solidFill>
                   <a:srgbClr val="E7EDF5"/>
                 </a:solidFill>
@@ -5309,38 +7714,71 @@
                 <a:ea typeface="Courier New" pitchFamily="34" charset="-122"/>
                 <a:cs typeface="Courier New" pitchFamily="34" charset="-120"/>
               </a:rPr>
-              <a:t>return err;                                  // 두 위상의 오류 합</a:t>
-            </a:r>
-            <a:endParaRPr lang="en-US" sz="1300" dirty="0"/>
-          </a:p>
-        </p:txBody>
-      </p:sp>
-      <p:sp>
-        <p:nvSpPr>
-          <p:cNvPr id="6" name="Shape 4"/>
-          <p:cNvSpPr/>
-          <p:nvPr/>
-        </p:nvSpPr>
-        <p:spPr>
-          <a:xfrm>
-            <a:off x="548640" y="3886200"/>
-            <a:ext cx="11064240" cy="1828800"/>
-          </a:xfrm>
-          <a:prstGeom prst="roundRect">
-            <a:avLst>
-              <a:gd name="adj" fmla="val 4000"/>
-            </a:avLst>
-          </a:prstGeom>
-          <a:solidFill>
-            <a:srgbClr val="18212E"/>
-          </a:solidFill>
-          <a:ln w="19050">
-            <a:solidFill>
-              <a:srgbClr val="3FB8C4"/>
-            </a:solidFill>
-            <a:prstDash val="solid"/>
-          </a:ln>
-        </p:spPr>
+              <a:t>    }</a:t>
+            </a:r>
+            <a:endParaRPr lang="en-US" sz="1250" dirty="0"/>
+          </a:p>
+          <a:p>
+            <a:pPr algn="l" indent="0" marL="0">
+              <a:lnSpc>
+                <a:spcPct val="110000"/>
+              </a:lnSpc>
+              <a:buNone/>
+            </a:pPr>
+            <a:r>
+              <a:rPr lang="en-US" sz="1250" dirty="0">
+                <a:solidFill>
+                  <a:srgbClr val="E7EDF5"/>
+                </a:solidFill>
+                <a:latin typeface="Courier New" pitchFamily="34" charset="0"/>
+                <a:ea typeface="Courier New" pitchFamily="34" charset="-122"/>
+                <a:cs typeface="Courier New" pitchFamily="34" charset="-120"/>
+              </a:rPr>
+              <a:t>    return 0;</a:t>
+            </a:r>
+            <a:endParaRPr lang="en-US" sz="1250" dirty="0"/>
+          </a:p>
+          <a:p>
+            <a:pPr algn="l" indent="0" marL="0">
+              <a:lnSpc>
+                <a:spcPct val="110000"/>
+              </a:lnSpc>
+              <a:buNone/>
+            </a:pPr>
+            <a:r>
+              <a:rPr lang="en-US" sz="1250" dirty="0">
+                <a:solidFill>
+                  <a:srgbClr val="E7EDF5"/>
+                </a:solidFill>
+                <a:latin typeface="Courier New" pitchFamily="34" charset="0"/>
+                <a:ea typeface="Courier New" pitchFamily="34" charset="-122"/>
+                <a:cs typeface="Courier New" pitchFamily="34" charset="-120"/>
+              </a:rPr>
+              <a:t>}</a:t>
+            </a:r>
+            <a:endParaRPr lang="en-US" sz="1250" dirty="0"/>
+          </a:p>
+          <a:p>
+            <a:pPr algn="l" indent="0" marL="0">
+              <a:lnSpc>
+                <a:spcPct val="110000"/>
+              </a:lnSpc>
+              <a:buNone/>
+            </a:pPr>
+            <a:r>
+              <a:rPr lang="en-US" sz="1250" dirty="0">
+                <a:solidFill>
+                  <a:srgbClr val="3FB8C4"/>
+                </a:solidFill>
+                <a:latin typeface="Courier New" pitchFamily="34" charset="0"/>
+                <a:ea typeface="Courier New" pitchFamily="34" charset="-122"/>
+                <a:cs typeface="Courier New" pitchFamily="34" charset="-120"/>
+              </a:rPr>
+              <a:t>#define SOFTWAIT() if (_pollStatus() != 0) { return 0xFFFFFFFE; }  // 타임아웃 센티넬</a:t>
+            </a:r>
+            <a:endParaRPr lang="en-US" sz="1250" dirty="0"/>
+          </a:p>
+        </p:txBody>
       </p:sp>
       <p:sp>
         <p:nvSpPr>
@@ -5350,89 +7788,34 @@
         </p:nvSpPr>
         <p:spPr>
           <a:xfrm>
-            <a:off x="868680" y="4114800"/>
-            <a:ext cx="10424160" cy="1463040"/>
-          </a:xfrm>
-          <a:prstGeom prst="rect">
-            <a:avLst/>
-          </a:prstGeom>
-          <a:noFill/>
-          <a:ln/>
-        </p:spPr>
-        <p:txBody>
-          <a:bodyPr wrap="square" lIns="0" tIns="0" rIns="0" bIns="0" rtlCol="0" anchor="t"/>
-          <a:lstStyle/>
-          <a:p>
-            <a:pPr marL="342900" indent="-342900">
-              <a:lnSpc>
-                <a:spcPct val="105000"/>
-              </a:lnSpc>
-              <a:spcAft>
-                <a:spcPts val="900"/>
-              </a:spcAft>
-              <a:buSzPct val="100000"/>
-              <a:buChar char="•"/>
-            </a:pPr>
-            <a:r>
-              <a:rPr lang="en-US" sz="1500" dirty="0">
-                <a:solidFill>
-                  <a:srgbClr val="E7EDF5"/>
-                </a:solidFill>
-                <a:latin typeface="Malgun Gothic" pitchFamily="34" charset="0"/>
-                <a:ea typeface="Malgun Gothic" pitchFamily="34" charset="-122"/>
-                <a:cs typeface="Malgun Gothic" pitchFamily="34" charset="-120"/>
-              </a:rPr>
-              <a:t>모든 셀이 1과 0을 모두 안정적으로 저장하는지 검사 (stuck-at 결함 검출)</a:t>
-            </a:r>
-            <a:endParaRPr lang="en-US" sz="1500" dirty="0"/>
-          </a:p>
-          <a:p>
-            <a:pPr marL="342900" indent="-342900">
-              <a:lnSpc>
-                <a:spcPct val="105000"/>
-              </a:lnSpc>
-              <a:spcAft>
-                <a:spcPts val="900"/>
-              </a:spcAft>
-              <a:buSzPct val="100000"/>
-              <a:buChar char="•"/>
-            </a:pPr>
-            <a:r>
-              <a:rPr lang="en-US" sz="1500" dirty="0">
-                <a:solidFill>
-                  <a:srgbClr val="E7EDF5"/>
-                </a:solidFill>
-                <a:latin typeface="Malgun Gothic" pitchFamily="34" charset="0"/>
-                <a:ea typeface="Malgun Gothic" pitchFamily="34" charset="-122"/>
-                <a:cs typeface="Malgun Gothic" pitchFamily="34" charset="-120"/>
-              </a:rPr>
-              <a:t>패턴을 쓴 뒤 보수로 덮어써, 이웃 셀이 값을 오염시키는지(간섭)도 확인</a:t>
-            </a:r>
-            <a:endParaRPr lang="en-US" sz="1500" dirty="0"/>
-          </a:p>
-          <a:p>
-            <a:pPr marL="342900" indent="-342900">
-              <a:lnSpc>
-                <a:spcPct val="105000"/>
-              </a:lnSpc>
-              <a:spcAft>
-                <a:spcPts val="900"/>
-              </a:spcAft>
-              <a:buSzPct val="100000"/>
-              <a:buChar char="•"/>
-            </a:pPr>
-            <a:r>
-              <a:rPr lang="en-US" sz="1500" dirty="0">
-                <a:solidFill>
-                  <a:srgbClr val="E7EDF5"/>
-                </a:solidFill>
-                <a:latin typeface="Malgun Gothic" pitchFamily="34" charset="0"/>
-                <a:ea typeface="Malgun Gothic" pitchFamily="34" charset="-122"/>
-                <a:cs typeface="Malgun Gothic" pitchFamily="34" charset="-120"/>
-              </a:rPr>
-              <a:t>random 변형(core.cu:527)은 상수 대신 난수를 써서 값 의존적 결함을 노린다</a:t>
-            </a:r>
-            <a:endParaRPr lang="en-US" sz="1500" dirty="0"/>
+            <a:off x="548640" y="4297680"/>
+            <a:ext cx="11064240" cy="457200"/>
+          </a:xfrm>
+          <a:prstGeom prst="rect">
+            <a:avLst/>
+          </a:prstGeom>
+          <a:noFill/>
+          <a:ln/>
+        </p:spPr>
+        <p:txBody>
+          <a:bodyPr wrap="square" lIns="0" tIns="0" rIns="0" bIns="0" rtlCol="0" anchor="ctr"/>
+          <a:lstStyle/>
+          <a:p>
+            <a:pPr indent="0" marL="0">
+              <a:buNone/>
+            </a:pPr>
+            <a:r>
+              <a:rPr lang="en-US" sz="1350" i="1" dirty="0">
+                <a:solidFill>
+                  <a:srgbClr val="9FB0C4"/>
+                </a:solidFill>
+                <a:latin typeface="Malgun Gothic" pitchFamily="34" charset="0"/>
+                <a:ea typeface="Malgun Gothic" pitchFamily="34" charset="-122"/>
+                <a:cs typeface="Malgun Gothic" pitchFamily="34" charset="-120"/>
+              </a:rPr>
+              <a:t>기본 15초 안에 커널이 안 끝나면 타임아웃 → 0xFFFFFFFE 반환. 디스플레이 구동 GPU의 워치독 대비책.</a:t>
+            </a:r>
+            <a:endParaRPr lang="en-US" sz="1350" dirty="0"/>
           </a:p>
         </p:txBody>
       </p:sp>
@@ -5485,7 +7868,7 @@
             </a:avLst>
           </a:prstGeom>
           <a:solidFill>
-            <a:srgbClr val="E8A33D"/>
+            <a:srgbClr val="3FB8C4"/>
           </a:solidFill>
           <a:ln/>
         </p:spPr>
@@ -5505,7 +7888,7 @@
                 <a:ea typeface="Courier New" pitchFamily="34" charset="-122"/>
                 <a:cs typeface="Courier New" pitchFamily="34" charset="-120"/>
               </a:rPr>
-              <a:t>7</a:t>
+              <a:t>5</a:t>
             </a:r>
             <a:endParaRPr lang="en-US" sz="2200" dirty="0"/>
           </a:p>
@@ -5544,7 +7927,7 @@
                 <a:ea typeface="Malgun Gothic" pitchFamily="34" charset="-122"/>
                 <a:cs typeface="Malgun Gothic" pitchFamily="34" charset="-120"/>
               </a:rPr>
-              <a:t>실습 미리보기 · Lab 2</a:t>
+              <a:t>쓰기·검증의 시간 순서 (시퀀스)</a:t>
             </a:r>
             <a:endParaRPr lang="en-US" sz="2900" dirty="0"/>
           </a:p>
@@ -5552,241 +7935,475 @@
       </p:sp>
       <p:sp>
         <p:nvSpPr>
-          <p:cNvPr id="4" name="Shape 2"/>
-          <p:cNvSpPr/>
-          <p:nvPr/>
-        </p:nvSpPr>
-        <p:spPr>
-          <a:xfrm>
-            <a:off x="548640" y="1600200"/>
-            <a:ext cx="5303520" cy="1920240"/>
+          <p:cNvPr id="4" name="Text 2"/>
+          <p:cNvSpPr/>
+          <p:nvPr/>
+        </p:nvSpPr>
+        <p:spPr>
+          <a:xfrm>
+            <a:off x="548640" y="1371600"/>
+            <a:ext cx="11064240" cy="411480"/>
+          </a:xfrm>
+          <a:prstGeom prst="rect">
+            <a:avLst/>
+          </a:prstGeom>
+          <a:noFill/>
+          <a:ln/>
+        </p:spPr>
+        <p:txBody>
+          <a:bodyPr wrap="square" lIns="0" tIns="0" rIns="0" bIns="0" rtlCol="0" anchor="ctr"/>
+          <a:lstStyle/>
+          <a:p>
+            <a:pPr indent="0" marL="0">
+              <a:buNone/>
+            </a:pPr>
+            <a:r>
+              <a:rPr lang="en-US" sz="1450" dirty="0">
+                <a:solidFill>
+                  <a:srgbClr val="9FB0C4"/>
+                </a:solidFill>
+                <a:latin typeface="Malgun Gothic" pitchFamily="34" charset="0"/>
+                <a:ea typeface="Malgun Gothic" pitchFamily="34" charset="-122"/>
+                <a:cs typeface="Malgun Gothic" pitchFamily="34" charset="-120"/>
+              </a:rPr>
+              <a:t>호스트와 디바이스 사이에 명령·데이터가 오가는 순서입니다. 위에서 아래로 시간이 흐릅니다.</a:t>
+            </a:r>
+            <a:endParaRPr lang="en-US" sz="1450" dirty="0"/>
+          </a:p>
+        </p:txBody>
+      </p:sp>
+      <p:sp>
+        <p:nvSpPr>
+          <p:cNvPr id="5" name="Shape 3"/>
+          <p:cNvSpPr/>
+          <p:nvPr/>
+        </p:nvSpPr>
+        <p:spPr>
+          <a:xfrm>
+            <a:off x="1188720" y="1828800"/>
+            <a:ext cx="2926080" cy="640080"/>
           </a:xfrm>
           <a:prstGeom prst="roundRect">
             <a:avLst>
-              <a:gd name="adj" fmla="val 3810"/>
+              <a:gd name="adj" fmla="val 11429"/>
             </a:avLst>
           </a:prstGeom>
           <a:solidFill>
             <a:srgbClr val="18212E"/>
           </a:solidFill>
-          <a:ln/>
-        </p:spPr>
-      </p:sp>
-      <p:sp>
-        <p:nvSpPr>
-          <p:cNvPr id="5" name="Text 3"/>
-          <p:cNvSpPr/>
-          <p:nvPr/>
-        </p:nvSpPr>
-        <p:spPr>
-          <a:xfrm>
-            <a:off x="804672" y="1801368"/>
-            <a:ext cx="1188720" cy="502920"/>
+          <a:ln w="19050">
+            <a:solidFill>
+              <a:srgbClr val="3FB8C4"/>
+            </a:solidFill>
+            <a:prstDash val="solid"/>
+          </a:ln>
+        </p:spPr>
+      </p:sp>
+      <p:sp>
+        <p:nvSpPr>
+          <p:cNvPr id="6" name="Text 4"/>
+          <p:cNvSpPr/>
+          <p:nvPr/>
+        </p:nvSpPr>
+        <p:spPr>
+          <a:xfrm>
+            <a:off x="1188720" y="1828800"/>
+            <a:ext cx="2926080" cy="640080"/>
+          </a:xfrm>
+          <a:prstGeom prst="rect">
+            <a:avLst/>
+          </a:prstGeom>
+          <a:noFill/>
+          <a:ln/>
+        </p:spPr>
+        <p:txBody>
+          <a:bodyPr wrap="square" lIns="0" tIns="0" rIns="0" bIns="0" rtlCol="0" anchor="ctr"/>
+          <a:lstStyle/>
+          <a:p>
+            <a:pPr algn="ctr" indent="0" marL="0">
+              <a:buNone/>
+            </a:pPr>
+            <a:r>
+              <a:rPr lang="en-US" sz="1400" b="1" dirty="0">
+                <a:solidFill>
+                  <a:srgbClr val="3FB8C4"/>
+                </a:solidFill>
+                <a:latin typeface="Malgun Gothic" pitchFamily="34" charset="0"/>
+                <a:ea typeface="Malgun Gothic" pitchFamily="34" charset="-122"/>
+                <a:cs typeface="Malgun Gothic" pitchFamily="34" charset="-120"/>
+              </a:rPr>
+              <a:t>호스트 (CPU)</a:t>
+            </a:r>
+            <a:endParaRPr lang="en-US" sz="1400" dirty="0"/>
+          </a:p>
+        </p:txBody>
+      </p:sp>
+      <p:sp>
+        <p:nvSpPr>
+          <p:cNvPr id="7" name="Shape 5"/>
+          <p:cNvSpPr/>
+          <p:nvPr/>
+        </p:nvSpPr>
+        <p:spPr>
+          <a:xfrm>
+            <a:off x="8046720" y="1828800"/>
+            <a:ext cx="2926080" cy="640080"/>
           </a:xfrm>
           <a:prstGeom prst="roundRect">
             <a:avLst>
-              <a:gd name="adj" fmla="val 14545"/>
-            </a:avLst>
-          </a:prstGeom>
-          <a:solidFill>
-            <a:srgbClr val="E8A33D"/>
-          </a:solidFill>
-          <a:ln/>
-        </p:spPr>
-        <p:txBody>
-          <a:bodyPr wrap="square" rtlCol="0" anchor="ctr"/>
-          <a:lstStyle/>
-          <a:p>
-            <a:pPr algn="ctr" indent="0" marL="0">
-              <a:buNone/>
-            </a:pPr>
-            <a:r>
-              <a:rPr lang="en-US" sz="1700" b="1" dirty="0">
-                <a:solidFill>
-                  <a:srgbClr val="101722"/>
-                </a:solidFill>
-                <a:latin typeface="Courier New" pitchFamily="34" charset="0"/>
-                <a:ea typeface="Courier New" pitchFamily="34" charset="-122"/>
-                <a:cs typeface="Courier New" pitchFamily="34" charset="-120"/>
-              </a:rPr>
-              <a:t>Ex 1</a:t>
-            </a:r>
-            <a:endParaRPr lang="en-US" sz="1700" dirty="0"/>
-          </a:p>
-        </p:txBody>
-      </p:sp>
-      <p:sp>
-        <p:nvSpPr>
-          <p:cNvPr id="6" name="Text 4"/>
-          <p:cNvSpPr/>
-          <p:nvPr/>
-        </p:nvSpPr>
-        <p:spPr>
-          <a:xfrm>
-            <a:off x="2148840" y="1819656"/>
-            <a:ext cx="3474720" cy="822960"/>
-          </a:xfrm>
-          <a:prstGeom prst="rect">
-            <a:avLst/>
-          </a:prstGeom>
-          <a:noFill/>
-          <a:ln/>
-        </p:spPr>
-        <p:txBody>
-          <a:bodyPr wrap="square" lIns="0" tIns="0" rIns="0" bIns="0" rtlCol="0" anchor="t"/>
-          <a:lstStyle/>
-          <a:p>
-            <a:pPr indent="0" marL="0">
-              <a:buNone/>
-            </a:pPr>
-            <a:r>
-              <a:rPr lang="en-US" sz="1800" b="1" dirty="0">
-                <a:solidFill>
-                  <a:srgbClr val="E7EDF5"/>
-                </a:solidFill>
-                <a:latin typeface="Malgun Gothic" pitchFamily="34" charset="0"/>
-                <a:ea typeface="Malgun Gothic" pitchFamily="34" charset="-122"/>
-                <a:cs typeface="Malgun Gothic" pitchFamily="34" charset="-120"/>
-              </a:rPr>
-              <a:t>패턴 바꿔보기</a:t>
-            </a:r>
-            <a:endParaRPr lang="en-US" sz="1800" dirty="0"/>
-          </a:p>
-        </p:txBody>
-      </p:sp>
-      <p:sp>
-        <p:nvSpPr>
-          <p:cNvPr id="7" name="Text 5"/>
-          <p:cNvSpPr/>
-          <p:nvPr/>
-        </p:nvSpPr>
-        <p:spPr>
-          <a:xfrm>
-            <a:off x="804672" y="2697480"/>
-            <a:ext cx="4791456" cy="731520"/>
-          </a:xfrm>
-          <a:prstGeom prst="rect">
-            <a:avLst/>
-          </a:prstGeom>
-          <a:noFill/>
-          <a:ln/>
-        </p:spPr>
-        <p:txBody>
-          <a:bodyPr wrap="square" lIns="0" tIns="0" rIns="0" bIns="0" rtlCol="0" anchor="t"/>
-          <a:lstStyle/>
-          <a:p>
-            <a:pPr indent="0" marL="0">
-              <a:lnSpc>
-                <a:spcPct val="110000"/>
-              </a:lnSpc>
-              <a:buNone/>
-            </a:pPr>
-            <a:r>
-              <a:rPr lang="en-US" sz="1350" dirty="0">
-                <a:solidFill>
-                  <a:srgbClr val="9FB0C4"/>
-                </a:solidFill>
-                <a:latin typeface="Malgun Gothic" pitchFamily="34" charset="0"/>
-                <a:ea typeface="Malgun Gothic" pitchFamily="34" charset="-122"/>
-                <a:cs typeface="Malgun Gothic" pitchFamily="34" charset="-120"/>
-              </a:rPr>
-              <a:t>gpuWriteConstant의 상수를 0xAAAAAAAA 등으로</a:t>
-            </a:r>
-            <a:endParaRPr lang="en-US" sz="1350" dirty="0"/>
-          </a:p>
-        </p:txBody>
-      </p:sp>
-      <p:sp>
-        <p:nvSpPr>
-          <p:cNvPr id="8" name="Shape 6"/>
-          <p:cNvSpPr/>
-          <p:nvPr/>
-        </p:nvSpPr>
-        <p:spPr>
-          <a:xfrm>
-            <a:off x="6309360" y="1600200"/>
-            <a:ext cx="5303520" cy="1920240"/>
-          </a:xfrm>
-          <a:prstGeom prst="roundRect">
-            <a:avLst>
-              <a:gd name="adj" fmla="val 3810"/>
+              <a:gd name="adj" fmla="val 11429"/>
             </a:avLst>
           </a:prstGeom>
           <a:solidFill>
             <a:srgbClr val="18212E"/>
           </a:solidFill>
-          <a:ln/>
-        </p:spPr>
-      </p:sp>
-      <p:sp>
-        <p:nvSpPr>
-          <p:cNvPr id="9" name="Text 7"/>
-          <p:cNvSpPr/>
-          <p:nvPr/>
-        </p:nvSpPr>
-        <p:spPr>
-          <a:xfrm>
-            <a:off x="6565392" y="1801368"/>
-            <a:ext cx="1188720" cy="502920"/>
-          </a:xfrm>
-          <a:prstGeom prst="roundRect">
-            <a:avLst>
-              <a:gd name="adj" fmla="val 14545"/>
-            </a:avLst>
-          </a:prstGeom>
-          <a:solidFill>
-            <a:srgbClr val="3FB8C4"/>
-          </a:solidFill>
-          <a:ln/>
-        </p:spPr>
-        <p:txBody>
-          <a:bodyPr wrap="square" rtlCol="0" anchor="ctr"/>
+          <a:ln w="19050">
+            <a:solidFill>
+              <a:srgbClr val="E8A33D"/>
+            </a:solidFill>
+            <a:prstDash val="solid"/>
+          </a:ln>
+        </p:spPr>
+      </p:sp>
+      <p:sp>
+        <p:nvSpPr>
+          <p:cNvPr id="8" name="Text 6"/>
+          <p:cNvSpPr/>
+          <p:nvPr/>
+        </p:nvSpPr>
+        <p:spPr>
+          <a:xfrm>
+            <a:off x="8046720" y="1828800"/>
+            <a:ext cx="2926080" cy="640080"/>
+          </a:xfrm>
+          <a:prstGeom prst="rect">
+            <a:avLst/>
+          </a:prstGeom>
+          <a:noFill/>
+          <a:ln/>
+        </p:spPr>
+        <p:txBody>
+          <a:bodyPr wrap="square" lIns="0" tIns="0" rIns="0" bIns="0" rtlCol="0" anchor="ctr"/>
           <a:lstStyle/>
           <a:p>
             <a:pPr algn="ctr" indent="0" marL="0">
               <a:buNone/>
             </a:pPr>
             <a:r>
-              <a:rPr lang="en-US" sz="1700" b="1" dirty="0">
-                <a:solidFill>
-                  <a:srgbClr val="101722"/>
-                </a:solidFill>
-                <a:latin typeface="Courier New" pitchFamily="34" charset="0"/>
-                <a:ea typeface="Courier New" pitchFamily="34" charset="-122"/>
-                <a:cs typeface="Courier New" pitchFamily="34" charset="-120"/>
-              </a:rPr>
-              <a:t>Ex 2</a:t>
-            </a:r>
-            <a:endParaRPr lang="en-US" sz="1700" dirty="0"/>
-          </a:p>
-        </p:txBody>
-      </p:sp>
-      <p:sp>
-        <p:nvSpPr>
-          <p:cNvPr id="10" name="Text 8"/>
-          <p:cNvSpPr/>
-          <p:nvPr/>
-        </p:nvSpPr>
-        <p:spPr>
-          <a:xfrm>
-            <a:off x="7909560" y="1819656"/>
-            <a:ext cx="3474720" cy="822960"/>
-          </a:xfrm>
-          <a:prstGeom prst="rect">
-            <a:avLst/>
-          </a:prstGeom>
-          <a:noFill/>
-          <a:ln/>
-        </p:spPr>
-        <p:txBody>
-          <a:bodyPr wrap="square" lIns="0" tIns="0" rIns="0" bIns="0" rtlCol="0" anchor="t"/>
-          <a:lstStyle/>
-          <a:p>
-            <a:pPr indent="0" marL="0">
-              <a:buNone/>
-            </a:pPr>
-            <a:r>
-              <a:rPr lang="en-US" sz="1800" b="1" dirty="0">
+              <a:rPr lang="en-US" sz="1400" b="1" dirty="0">
+                <a:solidFill>
+                  <a:srgbClr val="E8A33D"/>
+                </a:solidFill>
+                <a:latin typeface="Malgun Gothic" pitchFamily="34" charset="0"/>
+                <a:ea typeface="Malgun Gothic" pitchFamily="34" charset="-122"/>
+                <a:cs typeface="Malgun Gothic" pitchFamily="34" charset="-120"/>
+              </a:rPr>
+              <a:t>디바이스 (GPU)</a:t>
+            </a:r>
+            <a:endParaRPr lang="en-US" sz="1400" dirty="0"/>
+          </a:p>
+        </p:txBody>
+      </p:sp>
+      <p:sp>
+        <p:nvSpPr>
+          <p:cNvPr id="9" name="Shape 7"/>
+          <p:cNvSpPr/>
+          <p:nvPr/>
+        </p:nvSpPr>
+        <p:spPr>
+          <a:xfrm>
+            <a:off x="2651760" y="2514600"/>
+            <a:ext cx="0" cy="3108960"/>
+          </a:xfrm>
+          <a:prstGeom prst="line">
+            <a:avLst/>
+          </a:prstGeom>
+          <a:noFill/>
+          <a:ln w="19050">
+            <a:solidFill>
+              <a:srgbClr val="2C3A4E"/>
+            </a:solidFill>
+            <a:prstDash val="dash"/>
+          </a:ln>
+        </p:spPr>
+      </p:sp>
+      <p:sp>
+        <p:nvSpPr>
+          <p:cNvPr id="10" name="Shape 8"/>
+          <p:cNvSpPr/>
+          <p:nvPr/>
+        </p:nvSpPr>
+        <p:spPr>
+          <a:xfrm>
+            <a:off x="9509760" y="2514600"/>
+            <a:ext cx="0" cy="3108960"/>
+          </a:xfrm>
+          <a:prstGeom prst="line">
+            <a:avLst/>
+          </a:prstGeom>
+          <a:noFill/>
+          <a:ln w="19050">
+            <a:solidFill>
+              <a:srgbClr val="2C3A4E"/>
+            </a:solidFill>
+            <a:prstDash val="dash"/>
+          </a:ln>
+        </p:spPr>
+      </p:sp>
+      <p:sp>
+        <p:nvSpPr>
+          <p:cNvPr id="11" name="Shape 9"/>
+          <p:cNvSpPr/>
+          <p:nvPr/>
+        </p:nvSpPr>
+        <p:spPr>
+          <a:xfrm>
+            <a:off x="2651760" y="2971800"/>
+            <a:ext cx="6858000" cy="0"/>
+          </a:xfrm>
+          <a:prstGeom prst="line">
+            <a:avLst/>
+          </a:prstGeom>
+          <a:noFill/>
+          <a:ln w="25400">
+            <a:solidFill>
+              <a:srgbClr val="3FB8C4"/>
+            </a:solidFill>
+            <a:prstDash val="solid"/>
+            <a:tailEnd type="triangle"/>
+          </a:ln>
+        </p:spPr>
+      </p:sp>
+      <p:sp>
+        <p:nvSpPr>
+          <p:cNvPr id="12" name="Text 10"/>
+          <p:cNvSpPr/>
+          <p:nvPr/>
+        </p:nvSpPr>
+        <p:spPr>
+          <a:xfrm>
+            <a:off x="2651760" y="2587752"/>
+            <a:ext cx="6858000" cy="347472"/>
+          </a:xfrm>
+          <a:prstGeom prst="rect">
+            <a:avLst/>
+          </a:prstGeom>
+          <a:noFill/>
+          <a:ln/>
+        </p:spPr>
+        <p:txBody>
+          <a:bodyPr wrap="square" lIns="0" tIns="0" rIns="0" bIns="0" rtlCol="0" anchor="ctr"/>
+          <a:lstStyle/>
+          <a:p>
+            <a:pPr algn="ctr" indent="0" marL="0">
+              <a:buNone/>
+            </a:pPr>
+            <a:r>
+              <a:rPr lang="en-US" sz="1250" dirty="0">
+                <a:solidFill>
+                  <a:srgbClr val="3FB8C4"/>
+                </a:solidFill>
+                <a:latin typeface="Malgun Gothic" pitchFamily="34" charset="0"/>
+                <a:ea typeface="Malgun Gothic" pitchFamily="34" charset="-122"/>
+                <a:cs typeface="Malgun Gothic" pitchFamily="34" charset="-120"/>
+              </a:rPr>
+              <a:t>gpuWriteConstant&lt;&lt;&lt;&gt;&gt;&gt;  (패턴 쓰기)</a:t>
+            </a:r>
+            <a:endParaRPr lang="en-US" sz="1250" dirty="0"/>
+          </a:p>
+        </p:txBody>
+      </p:sp>
+      <p:sp>
+        <p:nvSpPr>
+          <p:cNvPr id="13" name="Text 11"/>
+          <p:cNvSpPr/>
+          <p:nvPr/>
+        </p:nvSpPr>
+        <p:spPr>
+          <a:xfrm>
+            <a:off x="2468880" y="3557016"/>
+            <a:ext cx="7223760" cy="365760"/>
+          </a:xfrm>
+          <a:prstGeom prst="rect">
+            <a:avLst/>
+          </a:prstGeom>
+          <a:noFill/>
+          <a:ln/>
+        </p:spPr>
+        <p:txBody>
+          <a:bodyPr wrap="square" lIns="0" tIns="0" rIns="0" bIns="0" rtlCol="0" anchor="ctr"/>
+          <a:lstStyle/>
+          <a:p>
+            <a:pPr algn="ctr" indent="0" marL="0">
+              <a:buNone/>
+            </a:pPr>
+            <a:r>
+              <a:rPr lang="en-US" sz="1250" i="1" dirty="0">
+                <a:solidFill>
+                  <a:srgbClr val="9FB0C4"/>
+                </a:solidFill>
+                <a:latin typeface="Malgun Gothic" pitchFamily="34" charset="0"/>
+                <a:ea typeface="Malgun Gothic" pitchFamily="34" charset="-122"/>
+                <a:cs typeface="Malgun Gothic" pitchFamily="34" charset="-120"/>
+              </a:rPr>
+              <a:t>SOFTWAIT — 커널 완료까지 대기</a:t>
+            </a:r>
+            <a:endParaRPr lang="en-US" sz="1250" dirty="0"/>
+          </a:p>
+        </p:txBody>
+      </p:sp>
+      <p:sp>
+        <p:nvSpPr>
+          <p:cNvPr id="14" name="Shape 12"/>
+          <p:cNvSpPr/>
+          <p:nvPr/>
+        </p:nvSpPr>
+        <p:spPr>
+          <a:xfrm>
+            <a:off x="2651760" y="4471416"/>
+            <a:ext cx="6858000" cy="0"/>
+          </a:xfrm>
+          <a:prstGeom prst="line">
+            <a:avLst/>
+          </a:prstGeom>
+          <a:noFill/>
+          <a:ln w="25400">
+            <a:solidFill>
+              <a:srgbClr val="3FB8C4"/>
+            </a:solidFill>
+            <a:prstDash val="solid"/>
+            <a:tailEnd type="triangle"/>
+          </a:ln>
+        </p:spPr>
+      </p:sp>
+      <p:sp>
+        <p:nvSpPr>
+          <p:cNvPr id="15" name="Text 13"/>
+          <p:cNvSpPr/>
+          <p:nvPr/>
+        </p:nvSpPr>
+        <p:spPr>
+          <a:xfrm>
+            <a:off x="2651760" y="4087368"/>
+            <a:ext cx="6858000" cy="347472"/>
+          </a:xfrm>
+          <a:prstGeom prst="rect">
+            <a:avLst/>
+          </a:prstGeom>
+          <a:noFill/>
+          <a:ln/>
+        </p:spPr>
+        <p:txBody>
+          <a:bodyPr wrap="square" lIns="0" tIns="0" rIns="0" bIns="0" rtlCol="0" anchor="ctr"/>
+          <a:lstStyle/>
+          <a:p>
+            <a:pPr algn="ctr" indent="0" marL="0">
+              <a:buNone/>
+            </a:pPr>
+            <a:r>
+              <a:rPr lang="en-US" sz="1250" dirty="0">
+                <a:solidFill>
+                  <a:srgbClr val="3FB8C4"/>
+                </a:solidFill>
+                <a:latin typeface="Malgun Gothic" pitchFamily="34" charset="0"/>
+                <a:ea typeface="Malgun Gothic" pitchFamily="34" charset="-122"/>
+                <a:cs typeface="Malgun Gothic" pitchFamily="34" charset="-120"/>
+              </a:rPr>
+              <a:t>gpuVerifyConstant&lt;&lt;&lt;&gt;&gt;&gt;  (되읽어 __popc)</a:t>
+            </a:r>
+            <a:endParaRPr lang="en-US" sz="1250" dirty="0"/>
+          </a:p>
+        </p:txBody>
+      </p:sp>
+      <p:sp>
+        <p:nvSpPr>
+          <p:cNvPr id="16" name="Shape 14"/>
+          <p:cNvSpPr/>
+          <p:nvPr/>
+        </p:nvSpPr>
+        <p:spPr>
+          <a:xfrm>
+            <a:off x="2651760" y="5221224"/>
+            <a:ext cx="6858000" cy="0"/>
+          </a:xfrm>
+          <a:prstGeom prst="line">
+            <a:avLst/>
+          </a:prstGeom>
+          <a:noFill/>
+          <a:ln w="25400">
+            <a:solidFill>
+              <a:srgbClr val="E8A33D"/>
+            </a:solidFill>
+            <a:prstDash val="solid"/>
+            <a:headEnd type="triangle"/>
+          </a:ln>
+        </p:spPr>
+      </p:sp>
+      <p:sp>
+        <p:nvSpPr>
+          <p:cNvPr id="17" name="Text 15"/>
+          <p:cNvSpPr/>
+          <p:nvPr/>
+        </p:nvSpPr>
+        <p:spPr>
+          <a:xfrm>
+            <a:off x="2651760" y="4837176"/>
+            <a:ext cx="6858000" cy="347472"/>
+          </a:xfrm>
+          <a:prstGeom prst="rect">
+            <a:avLst/>
+          </a:prstGeom>
+          <a:noFill/>
+          <a:ln/>
+        </p:spPr>
+        <p:txBody>
+          <a:bodyPr wrap="square" lIns="0" tIns="0" rIns="0" bIns="0" rtlCol="0" anchor="ctr"/>
+          <a:lstStyle/>
+          <a:p>
+            <a:pPr algn="ctr" indent="0" marL="0">
+              <a:buNone/>
+            </a:pPr>
+            <a:r>
+              <a:rPr lang="en-US" sz="1250" dirty="0">
+                <a:solidFill>
+                  <a:srgbClr val="E8A33D"/>
+                </a:solidFill>
+                <a:latin typeface="Malgun Gothic" pitchFamily="34" charset="0"/>
+                <a:ea typeface="Malgun Gothic" pitchFamily="34" charset="-122"/>
+                <a:cs typeface="Malgun Gothic" pitchFamily="34" charset="-120"/>
+              </a:rPr>
+              <a:t>cudaMemcpy D2H — 블록별 오류 수 1024개</a:t>
+            </a:r>
+            <a:endParaRPr lang="en-US" sz="1250" dirty="0"/>
+          </a:p>
+        </p:txBody>
+      </p:sp>
+      <p:sp>
+        <p:nvSpPr>
+          <p:cNvPr id="18" name="Text 16"/>
+          <p:cNvSpPr/>
+          <p:nvPr/>
+        </p:nvSpPr>
+        <p:spPr>
+          <a:xfrm>
+            <a:off x="2468880" y="5806440"/>
+            <a:ext cx="7223760" cy="365760"/>
+          </a:xfrm>
+          <a:prstGeom prst="rect">
+            <a:avLst/>
+          </a:prstGeom>
+          <a:noFill/>
+          <a:ln/>
+        </p:spPr>
+        <p:txBody>
+          <a:bodyPr wrap="square" lIns="0" tIns="0" rIns="0" bIns="0" rtlCol="0" anchor="ctr"/>
+          <a:lstStyle/>
+          <a:p>
+            <a:pPr algn="ctr" indent="0" marL="0">
+              <a:buNone/>
+            </a:pPr>
+            <a:r>
+              <a:rPr lang="en-US" sz="1250" i="1" dirty="0">
                 <a:solidFill>
                   <a:srgbClr val="E7EDF5"/>
                 </a:solidFill>
@@ -5794,41 +8411,38 @@
                 <a:ea typeface="Malgun Gothic" pitchFamily="34" charset="-122"/>
                 <a:cs typeface="Malgun Gothic" pitchFamily="34" charset="-120"/>
               </a:rPr>
-              <a:t>오류 인위 주입</a:t>
-            </a:r>
-            <a:endParaRPr lang="en-US" sz="1800" dirty="0"/>
-          </a:p>
-        </p:txBody>
-      </p:sp>
-      <p:sp>
-        <p:nvSpPr>
-          <p:cNvPr id="11" name="Text 9"/>
-          <p:cNvSpPr/>
-          <p:nvPr/>
-        </p:nvSpPr>
-        <p:spPr>
-          <a:xfrm>
-            <a:off x="6565392" y="2697480"/>
-            <a:ext cx="4791456" cy="731520"/>
-          </a:xfrm>
-          <a:prstGeom prst="rect">
-            <a:avLst/>
-          </a:prstGeom>
-          <a:noFill/>
-          <a:ln/>
-        </p:spPr>
-        <p:txBody>
-          <a:bodyPr wrap="square" lIns="0" tIns="0" rIns="0" bIns="0" rtlCol="0" anchor="t"/>
-          <a:lstStyle/>
-          <a:p>
-            <a:pPr indent="0" marL="0">
-              <a:lnSpc>
-                <a:spcPct val="110000"/>
-              </a:lnSpc>
-              <a:buNone/>
-            </a:pPr>
-            <a:r>
-              <a:rPr lang="en-US" sz="1350" dirty="0">
+              <a:t>호스트가 최종 합산 → errorCount</a:t>
+            </a:r>
+            <a:endParaRPr lang="en-US" sz="1250" dirty="0"/>
+          </a:p>
+        </p:txBody>
+      </p:sp>
+      <p:sp>
+        <p:nvSpPr>
+          <p:cNvPr id="19" name="Text 17"/>
+          <p:cNvSpPr/>
+          <p:nvPr/>
+        </p:nvSpPr>
+        <p:spPr>
+          <a:xfrm>
+            <a:off x="548640" y="5852160"/>
+            <a:ext cx="11064240" cy="365760"/>
+          </a:xfrm>
+          <a:prstGeom prst="rect">
+            <a:avLst/>
+          </a:prstGeom>
+          <a:noFill/>
+          <a:ln/>
+        </p:spPr>
+        <p:txBody>
+          <a:bodyPr wrap="square" lIns="0" tIns="0" rIns="0" bIns="0" rtlCol="0" anchor="ctr"/>
+          <a:lstStyle/>
+          <a:p>
+            <a:pPr algn="ctr" indent="0" marL="0">
+              <a:buNone/>
+            </a:pPr>
+            <a:r>
+              <a:rPr lang="en-US" sz="1300" i="1" dirty="0">
                 <a:solidFill>
                   <a:srgbClr val="9FB0C4"/>
                 </a:solidFill>
@@ -5836,301 +8450,9 @@
                 <a:ea typeface="Malgun Gothic" pitchFamily="34" charset="-122"/>
                 <a:cs typeface="Malgun Gothic" pitchFamily="34" charset="-120"/>
               </a:rPr>
-              <a:t>일부러 메모리를 훼손해 오류 검출 재현</a:t>
-            </a:r>
-            <a:endParaRPr lang="en-US" sz="1350" dirty="0"/>
-          </a:p>
-        </p:txBody>
-      </p:sp>
-      <p:sp>
-        <p:nvSpPr>
-          <p:cNvPr id="12" name="Shape 10"/>
-          <p:cNvSpPr/>
-          <p:nvPr/>
-        </p:nvSpPr>
-        <p:spPr>
-          <a:xfrm>
-            <a:off x="548640" y="3840480"/>
-            <a:ext cx="5303520" cy="1920240"/>
-          </a:xfrm>
-          <a:prstGeom prst="roundRect">
-            <a:avLst>
-              <a:gd name="adj" fmla="val 3810"/>
-            </a:avLst>
-          </a:prstGeom>
-          <a:solidFill>
-            <a:srgbClr val="18212E"/>
-          </a:solidFill>
-          <a:ln/>
-        </p:spPr>
-      </p:sp>
-      <p:sp>
-        <p:nvSpPr>
-          <p:cNvPr id="13" name="Text 11"/>
-          <p:cNvSpPr/>
-          <p:nvPr/>
-        </p:nvSpPr>
-        <p:spPr>
-          <a:xfrm>
-            <a:off x="804672" y="4041648"/>
-            <a:ext cx="1188720" cy="502920"/>
-          </a:xfrm>
-          <a:prstGeom prst="roundRect">
-            <a:avLst>
-              <a:gd name="adj" fmla="val 14545"/>
-            </a:avLst>
-          </a:prstGeom>
-          <a:solidFill>
-            <a:srgbClr val="E8A33D"/>
-          </a:solidFill>
-          <a:ln/>
-        </p:spPr>
-        <p:txBody>
-          <a:bodyPr wrap="square" rtlCol="0" anchor="ctr"/>
-          <a:lstStyle/>
-          <a:p>
-            <a:pPr algn="ctr" indent="0" marL="0">
-              <a:buNone/>
-            </a:pPr>
-            <a:r>
-              <a:rPr lang="en-US" sz="1700" b="1" dirty="0">
-                <a:solidFill>
-                  <a:srgbClr val="101722"/>
-                </a:solidFill>
-                <a:latin typeface="Courier New" pitchFamily="34" charset="0"/>
-                <a:ea typeface="Courier New" pitchFamily="34" charset="-122"/>
-                <a:cs typeface="Courier New" pitchFamily="34" charset="-120"/>
-              </a:rPr>
-              <a:t>Ex 3</a:t>
-            </a:r>
-            <a:endParaRPr lang="en-US" sz="1700" dirty="0"/>
-          </a:p>
-        </p:txBody>
-      </p:sp>
-      <p:sp>
-        <p:nvSpPr>
-          <p:cNvPr id="14" name="Text 12"/>
-          <p:cNvSpPr/>
-          <p:nvPr/>
-        </p:nvSpPr>
-        <p:spPr>
-          <a:xfrm>
-            <a:off x="2148840" y="4059936"/>
-            <a:ext cx="3474720" cy="822960"/>
-          </a:xfrm>
-          <a:prstGeom prst="rect">
-            <a:avLst/>
-          </a:prstGeom>
-          <a:noFill/>
-          <a:ln/>
-        </p:spPr>
-        <p:txBody>
-          <a:bodyPr wrap="square" lIns="0" tIns="0" rIns="0" bIns="0" rtlCol="0" anchor="t"/>
-          <a:lstStyle/>
-          <a:p>
-            <a:pPr indent="0" marL="0">
-              <a:buNone/>
-            </a:pPr>
-            <a:r>
-              <a:rPr lang="en-US" sz="1800" b="1" dirty="0">
-                <a:solidFill>
-                  <a:srgbClr val="E7EDF5"/>
-                </a:solidFill>
-                <a:latin typeface="Malgun Gothic" pitchFamily="34" charset="0"/>
-                <a:ea typeface="Malgun Gothic" pitchFamily="34" charset="-122"/>
-                <a:cs typeface="Malgun Gothic" pitchFamily="34" charset="-120"/>
-              </a:rPr>
-              <a:t>cpuVerify와 비교</a:t>
-            </a:r>
-            <a:endParaRPr lang="en-US" sz="1800" dirty="0"/>
-          </a:p>
-        </p:txBody>
-      </p:sp>
-      <p:sp>
-        <p:nvSpPr>
-          <p:cNvPr id="15" name="Text 13"/>
-          <p:cNvSpPr/>
-          <p:nvPr/>
-        </p:nvSpPr>
-        <p:spPr>
-          <a:xfrm>
-            <a:off x="804672" y="4937760"/>
-            <a:ext cx="4791456" cy="731520"/>
-          </a:xfrm>
-          <a:prstGeom prst="rect">
-            <a:avLst/>
-          </a:prstGeom>
-          <a:noFill/>
-          <a:ln/>
-        </p:spPr>
-        <p:txBody>
-          <a:bodyPr wrap="square" lIns="0" tIns="0" rIns="0" bIns="0" rtlCol="0" anchor="t"/>
-          <a:lstStyle/>
-          <a:p>
-            <a:pPr indent="0" marL="0">
-              <a:lnSpc>
-                <a:spcPct val="110000"/>
-              </a:lnSpc>
-              <a:buNone/>
-            </a:pPr>
-            <a:r>
-              <a:rPr lang="en-US" sz="1350" dirty="0">
-                <a:solidFill>
-                  <a:srgbClr val="9FB0C4"/>
-                </a:solidFill>
-                <a:latin typeface="Malgun Gothic" pitchFamily="34" charset="0"/>
-                <a:ea typeface="Malgun Gothic" pitchFamily="34" charset="-122"/>
-                <a:cs typeface="Malgun Gothic" pitchFamily="34" charset="-120"/>
-              </a:rPr>
-              <a:t>CPU 버전(core.cu:254)과 결과·속도 비교</a:t>
-            </a:r>
-            <a:endParaRPr lang="en-US" sz="1350" dirty="0"/>
-          </a:p>
-        </p:txBody>
-      </p:sp>
-      <p:sp>
-        <p:nvSpPr>
-          <p:cNvPr id="16" name="Shape 14"/>
-          <p:cNvSpPr/>
-          <p:nvPr/>
-        </p:nvSpPr>
-        <p:spPr>
-          <a:xfrm>
-            <a:off x="6309360" y="3840480"/>
-            <a:ext cx="5303520" cy="1920240"/>
-          </a:xfrm>
-          <a:prstGeom prst="roundRect">
-            <a:avLst>
-              <a:gd name="adj" fmla="val 3810"/>
-            </a:avLst>
-          </a:prstGeom>
-          <a:solidFill>
-            <a:srgbClr val="18212E"/>
-          </a:solidFill>
-          <a:ln/>
-        </p:spPr>
-      </p:sp>
-      <p:sp>
-        <p:nvSpPr>
-          <p:cNvPr id="17" name="Text 15"/>
-          <p:cNvSpPr/>
-          <p:nvPr/>
-        </p:nvSpPr>
-        <p:spPr>
-          <a:xfrm>
-            <a:off x="6565392" y="4041648"/>
-            <a:ext cx="1188720" cy="502920"/>
-          </a:xfrm>
-          <a:prstGeom prst="roundRect">
-            <a:avLst>
-              <a:gd name="adj" fmla="val 14545"/>
-            </a:avLst>
-          </a:prstGeom>
-          <a:solidFill>
-            <a:srgbClr val="3FB8C4"/>
-          </a:solidFill>
-          <a:ln/>
-        </p:spPr>
-        <p:txBody>
-          <a:bodyPr wrap="square" rtlCol="0" anchor="ctr"/>
-          <a:lstStyle/>
-          <a:p>
-            <a:pPr algn="ctr" indent="0" marL="0">
-              <a:buNone/>
-            </a:pPr>
-            <a:r>
-              <a:rPr lang="en-US" sz="1700" b="1" dirty="0">
-                <a:solidFill>
-                  <a:srgbClr val="101722"/>
-                </a:solidFill>
-                <a:latin typeface="Courier New" pitchFamily="34" charset="0"/>
-                <a:ea typeface="Courier New" pitchFamily="34" charset="-122"/>
-                <a:cs typeface="Courier New" pitchFamily="34" charset="-120"/>
-              </a:rPr>
-              <a:t>Ex 4</a:t>
-            </a:r>
-            <a:endParaRPr lang="en-US" sz="1700" dirty="0"/>
-          </a:p>
-        </p:txBody>
-      </p:sp>
-      <p:sp>
-        <p:nvSpPr>
-          <p:cNvPr id="18" name="Text 16"/>
-          <p:cNvSpPr/>
-          <p:nvPr/>
-        </p:nvSpPr>
-        <p:spPr>
-          <a:xfrm>
-            <a:off x="7909560" y="4059936"/>
-            <a:ext cx="3474720" cy="822960"/>
-          </a:xfrm>
-          <a:prstGeom prst="rect">
-            <a:avLst/>
-          </a:prstGeom>
-          <a:noFill/>
-          <a:ln/>
-        </p:spPr>
-        <p:txBody>
-          <a:bodyPr wrap="square" lIns="0" tIns="0" rIns="0" bIns="0" rtlCol="0" anchor="t"/>
-          <a:lstStyle/>
-          <a:p>
-            <a:pPr indent="0" marL="0">
-              <a:buNone/>
-            </a:pPr>
-            <a:r>
-              <a:rPr lang="en-US" sz="1800" b="1" dirty="0">
-                <a:solidFill>
-                  <a:srgbClr val="E7EDF5"/>
-                </a:solidFill>
-                <a:latin typeface="Malgun Gothic" pitchFamily="34" charset="0"/>
-                <a:ea typeface="Malgun Gothic" pitchFamily="34" charset="-122"/>
-                <a:cs typeface="Malgun Gothic" pitchFamily="34" charset="-120"/>
-              </a:rPr>
-              <a:t>N(loopIters) 관찰</a:t>
-            </a:r>
-            <a:endParaRPr lang="en-US" sz="1800" dirty="0"/>
-          </a:p>
-        </p:txBody>
-      </p:sp>
-      <p:sp>
-        <p:nvSpPr>
-          <p:cNvPr id="19" name="Text 17"/>
-          <p:cNvSpPr/>
-          <p:nvPr/>
-        </p:nvSpPr>
-        <p:spPr>
-          <a:xfrm>
-            <a:off x="6565392" y="4937760"/>
-            <a:ext cx="4791456" cy="731520"/>
-          </a:xfrm>
-          <a:prstGeom prst="rect">
-            <a:avLst/>
-          </a:prstGeom>
-          <a:noFill/>
-          <a:ln/>
-        </p:spPr>
-        <p:txBody>
-          <a:bodyPr wrap="square" lIns="0" tIns="0" rIns="0" bIns="0" rtlCol="0" anchor="t"/>
-          <a:lstStyle/>
-          <a:p>
-            <a:pPr indent="0" marL="0">
-              <a:lnSpc>
-                <a:spcPct val="110000"/>
-              </a:lnSpc>
-              <a:buNone/>
-            </a:pPr>
-            <a:r>
-              <a:rPr lang="en-US" sz="1350" dirty="0">
-                <a:solidFill>
-                  <a:srgbClr val="9FB0C4"/>
-                </a:solidFill>
-                <a:latin typeface="Malgun Gothic" pitchFamily="34" charset="0"/>
-                <a:ea typeface="Malgun Gothic" pitchFamily="34" charset="-122"/>
-                <a:cs typeface="Malgun Gothic" pitchFamily="34" charset="-120"/>
-              </a:rPr>
-              <a:t>테스트 MB를 바꿔 N이 어떻게 변하는지 출력</a:t>
-            </a:r>
-            <a:endParaRPr lang="en-US" sz="1350" dirty="0"/>
+              <a:t>커널 실행 요청(→)은 비동기지만, 결과를 가져오는 cudaMemcpy(←) 전에 검증 커널이 끝나 있어야 합니다.</a:t>
+            </a:r>
+            <a:endParaRPr lang="en-US" sz="1300" dirty="0"/>
           </a:p>
         </p:txBody>
       </p:sp>
@@ -6174,166 +8496,94 @@
         </p:nvSpPr>
         <p:spPr>
           <a:xfrm>
-            <a:off x="548640" y="1463040"/>
-            <a:ext cx="10058400" cy="457200"/>
-          </a:xfrm>
-          <a:prstGeom prst="rect">
-            <a:avLst/>
-          </a:prstGeom>
-          <a:noFill/>
-          <a:ln/>
-        </p:spPr>
-        <p:txBody>
-          <a:bodyPr wrap="square" lIns="0" tIns="0" rIns="0" bIns="0" rtlCol="0" anchor="ctr"/>
-          <a:lstStyle/>
-          <a:p>
-            <a:pPr indent="0" marL="0">
-              <a:buNone/>
-            </a:pPr>
-            <a:r>
-              <a:rPr lang="en-US" sz="1800" b="1" dirty="0">
-                <a:solidFill>
-                  <a:srgbClr val="E8A33D"/>
-                </a:solidFill>
-                <a:latin typeface="Malgun Gothic" pitchFamily="34" charset="0"/>
-                <a:ea typeface="Malgun Gothic" pitchFamily="34" charset="-122"/>
-                <a:cs typeface="Malgun Gothic" pitchFamily="34" charset="-120"/>
-              </a:rPr>
-              <a:t>다음 세션 예고</a:t>
-            </a:r>
-            <a:endParaRPr lang="en-US" sz="1800" dirty="0"/>
-          </a:p>
-        </p:txBody>
-      </p:sp>
-      <p:sp>
-        <p:nvSpPr>
-          <p:cNvPr id="3" name="Text 1"/>
-          <p:cNvSpPr/>
-          <p:nvPr/>
-        </p:nvSpPr>
-        <p:spPr>
-          <a:xfrm>
-            <a:off x="548640" y="1965960"/>
-            <a:ext cx="10972800" cy="914400"/>
-          </a:xfrm>
-          <a:prstGeom prst="rect">
-            <a:avLst/>
-          </a:prstGeom>
-          <a:noFill/>
-          <a:ln/>
-        </p:spPr>
-        <p:txBody>
-          <a:bodyPr wrap="square" lIns="0" tIns="0" rIns="0" bIns="0" rtlCol="0" anchor="ctr"/>
-          <a:lstStyle/>
-          <a:p>
-            <a:pPr indent="0" marL="0">
-              <a:buNone/>
-            </a:pPr>
-            <a:r>
-              <a:rPr lang="en-US" sz="3700" b="1" dirty="0">
-                <a:solidFill>
-                  <a:srgbClr val="E7EDF5"/>
-                </a:solidFill>
-                <a:latin typeface="Malgun Gothic" pitchFamily="34" charset="0"/>
-                <a:ea typeface="Malgun Gothic" pitchFamily="34" charset="-122"/>
-                <a:cs typeface="Malgun Gothic" pitchFamily="34" charset="-120"/>
-              </a:rPr>
-              <a:t>세션 3 · 공유 메모리와 병렬 리덕션</a:t>
-            </a:r>
-            <a:endParaRPr lang="en-US" sz="3700" dirty="0"/>
-          </a:p>
-        </p:txBody>
-      </p:sp>
-      <p:sp>
-        <p:nvSpPr>
-          <p:cNvPr id="4" name="Text 2"/>
-          <p:cNvSpPr/>
-          <p:nvPr/>
-        </p:nvSpPr>
-        <p:spPr>
-          <a:xfrm>
-            <a:off x="548640" y="3063240"/>
-            <a:ext cx="10972800" cy="1280160"/>
-          </a:xfrm>
-          <a:prstGeom prst="rect">
-            <a:avLst/>
-          </a:prstGeom>
-          <a:noFill/>
-          <a:ln/>
-        </p:spPr>
-        <p:txBody>
-          <a:bodyPr wrap="square" lIns="0" tIns="0" rIns="0" bIns="0" rtlCol="0" anchor="t"/>
-          <a:lstStyle/>
-          <a:p>
-            <a:pPr indent="0" marL="0">
-              <a:lnSpc>
-                <a:spcPct val="120000"/>
-              </a:lnSpc>
-              <a:buNone/>
-            </a:pPr>
-            <a:r>
-              <a:rPr lang="en-US" sz="1700" dirty="0">
-                <a:solidFill>
-                  <a:srgbClr val="E7EDF5"/>
-                </a:solidFill>
-                <a:latin typeface="Malgun Gothic" pitchFamily="34" charset="0"/>
-                <a:ea typeface="Malgun Gothic" pitchFamily="34" charset="-122"/>
-                <a:cs typeface="Malgun Gothic" pitchFamily="34" charset="-120"/>
-              </a:rPr>
-              <a:t>52만 개 스레드가 각자 센 오류 수를, 어떻게 </a:t>
-            </a:r>
-            <a:pPr indent="0" marL="0">
-              <a:lnSpc>
-                <a:spcPct val="120000"/>
-              </a:lnSpc>
-              <a:buNone/>
-            </a:pPr>
-            <a:r>
-              <a:rPr lang="en-US" sz="1700" b="1" dirty="0">
-                <a:solidFill>
-                  <a:srgbClr val="3FB8C4"/>
-                </a:solidFill>
-                <a:latin typeface="Malgun Gothic" pitchFamily="34" charset="0"/>
-                <a:ea typeface="Malgun Gothic" pitchFamily="34" charset="-122"/>
-                <a:cs typeface="Malgun Gothic" pitchFamily="34" charset="-120"/>
-              </a:rPr>
-              <a:t>하나의 숫자로 합칠까?</a:t>
-            </a:r>
-            <a:pPr indent="0" marL="0">
-              <a:lnSpc>
-                <a:spcPct val="120000"/>
-              </a:lnSpc>
-              <a:buNone/>
-            </a:pPr>
-            <a:r>
-              <a:rPr lang="en-US" sz="1700" dirty="0">
-                <a:solidFill>
-                  <a:srgbClr val="E7EDF5"/>
-                </a:solidFill>
-                <a:latin typeface="Malgun Gothic" pitchFamily="34" charset="0"/>
-                <a:ea typeface="Malgun Gothic" pitchFamily="34" charset="-122"/>
-                <a:cs typeface="Malgun Gothic" pitchFamily="34" charset="-120"/>
-              </a:rPr>
-              <a:t> MemtestG80의 가장 우아한 코드를 만납니다.</a:t>
-            </a:r>
-            <a:endParaRPr lang="en-US" sz="1700" dirty="0"/>
-          </a:p>
-        </p:txBody>
-      </p:sp>
-      <p:sp>
-        <p:nvSpPr>
-          <p:cNvPr id="5" name="Shape 3"/>
-          <p:cNvSpPr/>
-          <p:nvPr/>
-        </p:nvSpPr>
-        <p:spPr>
-          <a:xfrm>
-            <a:off x="548640" y="4937760"/>
-            <a:ext cx="8412480" cy="1005840"/>
+            <a:off x="548640" y="411480"/>
+            <a:ext cx="658368" cy="658368"/>
           </a:xfrm>
           <a:prstGeom prst="roundRect">
             <a:avLst>
-              <a:gd name="adj" fmla="val 4545"/>
+              <a:gd name="adj" fmla="val 13889"/>
+            </a:avLst>
+          </a:prstGeom>
+          <a:solidFill>
+            <a:srgbClr val="E8A33D"/>
+          </a:solidFill>
+          <a:ln/>
+        </p:spPr>
+        <p:txBody>
+          <a:bodyPr wrap="square" rtlCol="0" anchor="ctr"/>
+          <a:lstStyle/>
+          <a:p>
+            <a:pPr algn="ctr" indent="0" marL="0">
+              <a:buNone/>
+            </a:pPr>
+            <a:r>
+              <a:rPr lang="en-US" sz="2200" b="1" dirty="0">
+                <a:solidFill>
+                  <a:srgbClr val="101722"/>
+                </a:solidFill>
+                <a:latin typeface="Courier New" pitchFamily="34" charset="0"/>
+                <a:ea typeface="Courier New" pitchFamily="34" charset="-122"/>
+                <a:cs typeface="Courier New" pitchFamily="34" charset="-120"/>
+              </a:rPr>
+              <a:t>6</a:t>
+            </a:r>
+            <a:endParaRPr lang="en-US" sz="2200" dirty="0"/>
+          </a:p>
+        </p:txBody>
+      </p:sp>
+      <p:sp>
+        <p:nvSpPr>
+          <p:cNvPr id="3" name="Text 1"/>
+          <p:cNvSpPr/>
+          <p:nvPr/>
+        </p:nvSpPr>
+        <p:spPr>
+          <a:xfrm>
+            <a:off x="1371600" y="384048"/>
+            <a:ext cx="10241280" cy="713232"/>
+          </a:xfrm>
+          <a:prstGeom prst="rect">
+            <a:avLst/>
+          </a:prstGeom>
+          <a:noFill/>
+          <a:ln/>
+        </p:spPr>
+        <p:txBody>
+          <a:bodyPr wrap="square" lIns="0" tIns="0" rIns="0" bIns="0" rtlCol="0" anchor="ctr"/>
+          <a:lstStyle/>
+          <a:p>
+            <a:pPr algn="l" indent="0" marL="0">
+              <a:buNone/>
+            </a:pPr>
+            <a:r>
+              <a:rPr lang="en-US" sz="2900" b="1" dirty="0">
+                <a:solidFill>
+                  <a:srgbClr val="E7EDF5"/>
+                </a:solidFill>
+                <a:latin typeface="Malgun Gothic" pitchFamily="34" charset="0"/>
+                <a:ea typeface="Malgun Gothic" pitchFamily="34" charset="-122"/>
+                <a:cs typeface="Malgun Gothic" pitchFamily="34" charset="-120"/>
+              </a:rPr>
+              <a:t>Moving Inversions · 가장 고전적인 테스트</a:t>
+            </a:r>
+            <a:endParaRPr lang="en-US" sz="2900" dirty="0"/>
+          </a:p>
+        </p:txBody>
+      </p:sp>
+      <p:sp>
+        <p:nvSpPr>
+          <p:cNvPr id="4" name="Shape 2"/>
+          <p:cNvSpPr/>
+          <p:nvPr/>
+        </p:nvSpPr>
+        <p:spPr>
+          <a:xfrm>
+            <a:off x="548640" y="1508760"/>
+            <a:ext cx="11064240" cy="2103120"/>
+          </a:xfrm>
+          <a:prstGeom prst="roundRect">
+            <a:avLst>
+              <a:gd name="adj" fmla="val 2174"/>
             </a:avLst>
           </a:prstGeom>
           <a:solidFill>
@@ -6349,14 +8599,14 @@
       </p:sp>
       <p:sp>
         <p:nvSpPr>
-          <p:cNvPr id="6" name="Text 4"/>
-          <p:cNvSpPr/>
-          <p:nvPr/>
-        </p:nvSpPr>
-        <p:spPr>
-          <a:xfrm>
-            <a:off x="768096" y="5084064"/>
-            <a:ext cx="7973568" cy="713232"/>
+          <p:cNvPr id="5" name="Text 3"/>
+          <p:cNvSpPr/>
+          <p:nvPr/>
+        </p:nvSpPr>
+        <p:spPr>
+          <a:xfrm>
+            <a:off x="768096" y="1655064"/>
+            <a:ext cx="10625328" cy="1810512"/>
           </a:xfrm>
           <a:prstGeom prst="rect">
             <a:avLst/>
@@ -6375,17 +8625,17 @@
               <a:buNone/>
             </a:pPr>
             <a:r>
-              <a:rPr lang="en-US" sz="1250" dirty="0">
-                <a:solidFill>
-                  <a:srgbClr val="F2C079"/>
+              <a:rPr lang="en-US" sz="1300" dirty="0">
+                <a:solidFill>
+                  <a:srgbClr val="6B7D94"/>
                 </a:solidFill>
                 <a:latin typeface="Courier New" pitchFamily="34" charset="0"/>
                 <a:ea typeface="Courier New" pitchFamily="34" charset="-122"/>
                 <a:cs typeface="Courier New" pitchFamily="34" charset="-120"/>
               </a:rPr>
-              <a:t>__popc(x ^ constant)   →  뒤집힌 비트 개수를 센다</a:t>
-            </a:r>
-            <a:endParaRPr lang="en-US" sz="1250" dirty="0"/>
+              <a:t>// core.cu:370 — gpuMovingInversionsOnesZeros</a:t>
+            </a:r>
+            <a:endParaRPr lang="en-US" sz="1300" dirty="0"/>
           </a:p>
           <a:p>
             <a:pPr algn="l" indent="0" marL="0">
@@ -6395,19 +8645,135 @@
               <a:buNone/>
             </a:pPr>
             <a:r>
-              <a:rPr lang="en-US" sz="1250" dirty="0">
-                <a:solidFill>
-                  <a:srgbClr val="3FB8C4"/>
+              <a:rPr lang="en-US" sz="1300" dirty="0">
+                <a:solidFill>
+                  <a:srgbClr val="F2C079"/>
                 </a:solidFill>
                 <a:latin typeface="Courier New" pitchFamily="34" charset="0"/>
                 <a:ea typeface="Courier New" pitchFamily="34" charset="-122"/>
                 <a:cs typeface="Courier New" pitchFamily="34" charset="-120"/>
               </a:rPr>
-              <a:t>트리 리덕션           →  블록 안에서 병렬로 합산</a:t>
-            </a:r>
-            <a:endParaRPr lang="en-US" sz="1250" dirty="0"/>
-          </a:p>
-        </p:txBody>
+              <a:t>gpuWriteConstant (..., 0xFFFFFFFF);          // 전부 1을 쓴다</a:t>
+            </a:r>
+            <a:endParaRPr lang="en-US" sz="1300" dirty="0"/>
+          </a:p>
+          <a:p>
+            <a:pPr algn="l" indent="0" marL="0">
+              <a:lnSpc>
+                <a:spcPct val="110000"/>
+              </a:lnSpc>
+              <a:buNone/>
+            </a:pPr>
+            <a:r>
+              <a:rPr lang="en-US" sz="1300" dirty="0">
+                <a:solidFill>
+                  <a:srgbClr val="3FB8C4"/>
+                </a:solidFill>
+                <a:latin typeface="Courier New" pitchFamily="34" charset="0"/>
+                <a:ea typeface="Courier New" pitchFamily="34" charset="-122"/>
+                <a:cs typeface="Courier New" pitchFamily="34" charset="-120"/>
+              </a:rPr>
+              <a:t>err  = gpuVerifyConstant(..., 0xFFFFFFFF);   // 1이 유지되는지 검증</a:t>
+            </a:r>
+            <a:endParaRPr lang="en-US" sz="1300" dirty="0"/>
+          </a:p>
+          <a:p>
+            <a:pPr algn="l" indent="0" marL="0">
+              <a:lnSpc>
+                <a:spcPct val="110000"/>
+              </a:lnSpc>
+              <a:buNone/>
+            </a:pPr>
+            <a:endParaRPr lang="en-US" sz="1300" dirty="0"/>
+          </a:p>
+          <a:p>
+            <a:pPr algn="l" indent="0" marL="0">
+              <a:lnSpc>
+                <a:spcPct val="110000"/>
+              </a:lnSpc>
+              <a:buNone/>
+            </a:pPr>
+            <a:r>
+              <a:rPr lang="en-US" sz="1300" dirty="0">
+                <a:solidFill>
+                  <a:srgbClr val="F2C079"/>
+                </a:solidFill>
+                <a:latin typeface="Courier New" pitchFamily="34" charset="0"/>
+                <a:ea typeface="Courier New" pitchFamily="34" charset="-122"/>
+                <a:cs typeface="Courier New" pitchFamily="34" charset="-120"/>
+              </a:rPr>
+              <a:t>gpuWriteConstant (..., 0x0);                 // 보수(전부 0)를 덮어쓴다</a:t>
+            </a:r>
+            <a:endParaRPr lang="en-US" sz="1300" dirty="0"/>
+          </a:p>
+          <a:p>
+            <a:pPr algn="l" indent="0" marL="0">
+              <a:lnSpc>
+                <a:spcPct val="110000"/>
+              </a:lnSpc>
+              <a:buNone/>
+            </a:pPr>
+            <a:r>
+              <a:rPr lang="en-US" sz="1300" dirty="0">
+                <a:solidFill>
+                  <a:srgbClr val="3FB8C4"/>
+                </a:solidFill>
+                <a:latin typeface="Courier New" pitchFamily="34" charset="0"/>
+                <a:ea typeface="Courier New" pitchFamily="34" charset="-122"/>
+                <a:cs typeface="Courier New" pitchFamily="34" charset="-120"/>
+              </a:rPr>
+              <a:t>err += gpuVerifyConstant(..., 0x0);          // 0이 유지되는지 검증</a:t>
+            </a:r>
+            <a:endParaRPr lang="en-US" sz="1300" dirty="0"/>
+          </a:p>
+          <a:p>
+            <a:pPr algn="l" indent="0" marL="0">
+              <a:lnSpc>
+                <a:spcPct val="110000"/>
+              </a:lnSpc>
+              <a:buNone/>
+            </a:pPr>
+            <a:r>
+              <a:rPr lang="en-US" sz="1300" dirty="0">
+                <a:solidFill>
+                  <a:srgbClr val="E7EDF5"/>
+                </a:solidFill>
+                <a:latin typeface="Courier New" pitchFamily="34" charset="0"/>
+                <a:ea typeface="Courier New" pitchFamily="34" charset="-122"/>
+                <a:cs typeface="Courier New" pitchFamily="34" charset="-120"/>
+              </a:rPr>
+              <a:t>return err;                                  // 두 위상의 오류 합</a:t>
+            </a:r>
+            <a:endParaRPr lang="en-US" sz="1300" dirty="0"/>
+          </a:p>
+        </p:txBody>
+      </p:sp>
+      <p:sp>
+        <p:nvSpPr>
+          <p:cNvPr id="6" name="Shape 4"/>
+          <p:cNvSpPr/>
+          <p:nvPr/>
+        </p:nvSpPr>
+        <p:spPr>
+          <a:xfrm>
+            <a:off x="548640" y="3886200"/>
+            <a:ext cx="11064240" cy="1828800"/>
+          </a:xfrm>
+          <a:prstGeom prst="roundRect">
+            <a:avLst>
+              <a:gd name="adj" fmla="val 4000"/>
+            </a:avLst>
+          </a:prstGeom>
+          <a:solidFill>
+            <a:srgbClr val="18212E"/>
+          </a:solidFill>
+          <a:ln w="19050">
+            <a:solidFill>
+              <a:srgbClr val="3FB8C4"/>
+            </a:solidFill>
+            <a:prstDash val="solid"/>
+          </a:ln>
+        </p:spPr>
       </p:sp>
       <p:sp>
         <p:nvSpPr>
@@ -6417,34 +8783,89 @@
         </p:nvSpPr>
         <p:spPr>
           <a:xfrm>
-            <a:off x="548640" y="6126480"/>
-            <a:ext cx="10972800" cy="365760"/>
-          </a:xfrm>
-          <a:prstGeom prst="rect">
-            <a:avLst/>
-          </a:prstGeom>
-          <a:noFill/>
-          <a:ln/>
-        </p:spPr>
-        <p:txBody>
-          <a:bodyPr wrap="square" lIns="0" tIns="0" rIns="0" bIns="0" rtlCol="0" anchor="ctr"/>
-          <a:lstStyle/>
-          <a:p>
-            <a:pPr indent="0" marL="0">
-              <a:buNone/>
-            </a:pPr>
-            <a:r>
-              <a:rPr lang="en-US" sz="1350" i="1" dirty="0">
-                <a:solidFill>
-                  <a:srgbClr val="9FB0C4"/>
-                </a:solidFill>
-                <a:latin typeface="Malgun Gothic" pitchFamily="34" charset="0"/>
-                <a:ea typeface="Malgun Gothic" pitchFamily="34" charset="-122"/>
-                <a:cs typeface="Malgun Gothic" pitchFamily="34" charset="-120"/>
-              </a:rPr>
-              <a:t>실습 랩 2(쓰기·검증)를 먼저 완료하고 오세요.</a:t>
-            </a:r>
-            <a:endParaRPr lang="en-US" sz="1350" dirty="0"/>
+            <a:off x="868680" y="4114800"/>
+            <a:ext cx="10424160" cy="1463040"/>
+          </a:xfrm>
+          <a:prstGeom prst="rect">
+            <a:avLst/>
+          </a:prstGeom>
+          <a:noFill/>
+          <a:ln/>
+        </p:spPr>
+        <p:txBody>
+          <a:bodyPr wrap="square" lIns="0" tIns="0" rIns="0" bIns="0" rtlCol="0" anchor="t"/>
+          <a:lstStyle/>
+          <a:p>
+            <a:pPr marL="342900" indent="-342900">
+              <a:lnSpc>
+                <a:spcPct val="105000"/>
+              </a:lnSpc>
+              <a:spcAft>
+                <a:spcPts val="900"/>
+              </a:spcAft>
+              <a:buSzPct val="100000"/>
+              <a:buChar char="•"/>
+            </a:pPr>
+            <a:r>
+              <a:rPr lang="en-US" sz="1500" dirty="0">
+                <a:solidFill>
+                  <a:srgbClr val="E7EDF5"/>
+                </a:solidFill>
+                <a:latin typeface="Malgun Gothic" pitchFamily="34" charset="0"/>
+                <a:ea typeface="Malgun Gothic" pitchFamily="34" charset="-122"/>
+                <a:cs typeface="Malgun Gothic" pitchFamily="34" charset="-120"/>
+              </a:rPr>
+              <a:t>모든 셀이 1과 0을 모두 안정적으로 저장하는지 검사 (stuck-at 결함 검출)</a:t>
+            </a:r>
+            <a:endParaRPr lang="en-US" sz="1500" dirty="0"/>
+          </a:p>
+          <a:p>
+            <a:pPr marL="342900" indent="-342900">
+              <a:lnSpc>
+                <a:spcPct val="105000"/>
+              </a:lnSpc>
+              <a:spcAft>
+                <a:spcPts val="900"/>
+              </a:spcAft>
+              <a:buSzPct val="100000"/>
+              <a:buChar char="•"/>
+            </a:pPr>
+            <a:r>
+              <a:rPr lang="en-US" sz="1500" dirty="0">
+                <a:solidFill>
+                  <a:srgbClr val="E7EDF5"/>
+                </a:solidFill>
+                <a:latin typeface="Malgun Gothic" pitchFamily="34" charset="0"/>
+                <a:ea typeface="Malgun Gothic" pitchFamily="34" charset="-122"/>
+                <a:cs typeface="Malgun Gothic" pitchFamily="34" charset="-120"/>
+              </a:rPr>
+              <a:t>패턴을 쓴 뒤 보수로 덮어써, 이웃 셀이 값을 오염시키는지(간섭)도 확인</a:t>
+            </a:r>
+            <a:endParaRPr lang="en-US" sz="1500" dirty="0"/>
+          </a:p>
+          <a:p>
+            <a:pPr marL="342900" indent="-342900">
+              <a:lnSpc>
+                <a:spcPct val="105000"/>
+              </a:lnSpc>
+              <a:spcAft>
+                <a:spcPts val="900"/>
+              </a:spcAft>
+              <a:buSzPct val="100000"/>
+              <a:buChar char="•"/>
+            </a:pPr>
+            <a:r>
+              <a:rPr lang="en-US" sz="1500" dirty="0">
+                <a:solidFill>
+                  <a:srgbClr val="E7EDF5"/>
+                </a:solidFill>
+                <a:latin typeface="Malgun Gothic" pitchFamily="34" charset="0"/>
+                <a:ea typeface="Malgun Gothic" pitchFamily="34" charset="-122"/>
+                <a:cs typeface="Malgun Gothic" pitchFamily="34" charset="-120"/>
+              </a:rPr>
+              <a:t>random 변형(core.cu:527)은 상수 대신 난수를 써서 값 의존적 결함을 노린다</a:t>
+            </a:r>
+            <a:endParaRPr lang="en-US" sz="1500" dirty="0"/>
           </a:p>
         </p:txBody>
       </p:sp>
